--- a/docs/reports/project-status-2026-07-30.pptx
+++ b/docs/reports/project-status-2026-07-30.pptx
@@ -1752,8 +1752,8 @@
         </p:nvSpPr>
         <p:spPr>
           <a:xfrm>
-            <a:off x="6949440" y="1280160"/>
-            <a:ext cx="1828800" cy="1828800"/>
+            <a:off x="6903720" y="1371600"/>
+            <a:ext cx="1920240" cy="1920240"/>
           </a:xfrm>
           <a:prstGeom prst="ellipse">
             <a:avLst/>
@@ -1777,7 +1777,7 @@
         </p:nvSpPr>
         <p:spPr>
           <a:xfrm>
-            <a:off x="7406640" y="1737360"/>
+            <a:off x="7406640" y="1874520"/>
             <a:ext cx="914400" cy="914400"/>
           </a:xfrm>
           <a:prstGeom prst="ellipse">
@@ -1802,7 +1802,7 @@
         </p:nvSpPr>
         <p:spPr>
           <a:xfrm>
-            <a:off x="640080" y="1097280"/>
+            <a:off x="640080" y="1143000"/>
             <a:ext cx="5486400" cy="320040"/>
           </a:xfrm>
           <a:prstGeom prst="rect">
@@ -1841,7 +1841,7 @@
         </p:nvSpPr>
         <p:spPr>
           <a:xfrm>
-            <a:off x="640080" y="1554480"/>
+            <a:off x="640080" y="1600200"/>
             <a:ext cx="5669280" cy="640080"/>
           </a:xfrm>
           <a:prstGeom prst="rect">
@@ -1880,7 +1880,7 @@
         </p:nvSpPr>
         <p:spPr>
           <a:xfrm>
-            <a:off x="640080" y="2240280"/>
+            <a:off x="640080" y="2331720"/>
             <a:ext cx="5486400" cy="457200"/>
           </a:xfrm>
           <a:prstGeom prst="rect">
@@ -1919,7 +1919,7 @@
         </p:nvSpPr>
         <p:spPr>
           <a:xfrm>
-            <a:off x="640080" y="3017520"/>
+            <a:off x="640080" y="3108960"/>
             <a:ext cx="5486400" cy="320040"/>
           </a:xfrm>
           <a:prstGeom prst="rect">
@@ -1938,7 +1938,7 @@
             <a:r>
               <a:rPr lang="en-US" sz="1400" dirty="0">
                 <a:solidFill>
-                  <a:srgbClr val="A8C5C9"/>
+                  <a:srgbClr val="D4EEF0"/>
                 </a:solidFill>
                 <a:latin typeface="Calibri" pitchFamily="34" charset="0"/>
                 <a:ea typeface="Calibri" pitchFamily="34" charset="-122"/>
@@ -1958,7 +1958,7 @@
         </p:nvSpPr>
         <p:spPr>
           <a:xfrm>
-            <a:off x="640080" y="4297680"/>
+            <a:off x="640080" y="4343400"/>
             <a:ext cx="5486400" cy="274320"/>
           </a:xfrm>
           <a:prstGeom prst="rect">
@@ -1975,54 +1975,93 @@
               <a:buNone/>
             </a:pPr>
             <a:r>
+              <a:rPr lang="en-US" sz="1300" dirty="0">
+                <a:solidFill>
+                  <a:srgbClr val="D4EEF0"/>
+                </a:solidFill>
+                <a:latin typeface="Calibri" pitchFamily="34" charset="0"/>
+                <a:ea typeface="Calibri" pitchFamily="34" charset="-122"/>
+                <a:cs typeface="Calibri" pitchFamily="34" charset="-120"/>
+              </a:rPr>
+              <a:t>受众：项目维护者 / 研发团队</a:t>
+            </a:r>
+            <a:endParaRPr lang="en-US" sz="1300" dirty="0"/>
+          </a:p>
+        </p:txBody>
+      </p:sp>
+      <p:sp>
+        <p:nvSpPr>
+          <p:cNvPr id="12" name="Text 10"/>
+          <p:cNvSpPr/>
+          <p:nvPr/>
+        </p:nvSpPr>
+        <p:spPr>
+          <a:xfrm>
+            <a:off x="6766560" y="3657600"/>
+            <a:ext cx="2194560" cy="320040"/>
+          </a:xfrm>
+          <a:prstGeom prst="rect">
+            <a:avLst/>
+          </a:prstGeom>
+          <a:noFill/>
+          <a:ln/>
+        </p:spPr>
+        <p:txBody>
+          <a:bodyPr wrap="square" lIns="0" tIns="0" rIns="0" bIns="0" rtlCol="0" anchor="ctr"/>
+          <a:lstStyle/>
+          <a:p>
+            <a:pPr algn="ctr" indent="0" marL="0">
+              <a:buNone/>
+            </a:pPr>
+            <a:r>
+              <a:rPr lang="en-US" sz="1600" b="1" dirty="0">
+                <a:solidFill>
+                  <a:srgbClr val="FFFFFF"/>
+                </a:solidFill>
+                <a:latin typeface="Georgia" pitchFamily="34" charset="0"/>
+                <a:ea typeface="Georgia" pitchFamily="34" charset="-122"/>
+                <a:cs typeface="Georgia" pitchFamily="34" charset="-120"/>
+              </a:rPr>
+              <a:t>状态日报</a:t>
+            </a:r>
+            <a:endParaRPr lang="en-US" sz="1600" dirty="0"/>
+          </a:p>
+        </p:txBody>
+      </p:sp>
+      <p:sp>
+        <p:nvSpPr>
+          <p:cNvPr id="13" name="Text 11"/>
+          <p:cNvSpPr/>
+          <p:nvPr/>
+        </p:nvSpPr>
+        <p:spPr>
+          <a:xfrm>
+            <a:off x="6766560" y="4023360"/>
+            <a:ext cx="2194560" cy="274320"/>
+          </a:xfrm>
+          <a:prstGeom prst="rect">
+            <a:avLst/>
+          </a:prstGeom>
+          <a:noFill/>
+          <a:ln/>
+        </p:spPr>
+        <p:txBody>
+          <a:bodyPr wrap="square" lIns="0" tIns="0" rIns="0" bIns="0" rtlCol="0" anchor="ctr"/>
+          <a:lstStyle/>
+          <a:p>
+            <a:pPr algn="ctr" indent="0" marL="0">
+              <a:buNone/>
+            </a:pPr>
+            <a:r>
               <a:rPr lang="en-US" sz="1200" dirty="0">
                 <a:solidFill>
-                  <a:srgbClr val="7A9AA0"/>
-                </a:solidFill>
-                <a:latin typeface="Calibri" pitchFamily="34" charset="0"/>
-                <a:ea typeface="Calibri" pitchFamily="34" charset="-122"/>
-                <a:cs typeface="Calibri" pitchFamily="34" charset="-120"/>
-              </a:rPr>
-              <a:t>受众：项目维护者 / 研发团队</a:t>
-            </a:r>
-            <a:endParaRPr lang="en-US" sz="1200" dirty="0"/>
-          </a:p>
-        </p:txBody>
-      </p:sp>
-      <p:sp>
-        <p:nvSpPr>
-          <p:cNvPr id="12" name="Text 10"/>
-          <p:cNvSpPr/>
-          <p:nvPr/>
-        </p:nvSpPr>
-        <p:spPr>
-          <a:xfrm>
-            <a:off x="6766560" y="4297680"/>
-            <a:ext cx="2194560" cy="274320"/>
-          </a:xfrm>
-          <a:prstGeom prst="rect">
-            <a:avLst/>
-          </a:prstGeom>
-          <a:noFill/>
-          <a:ln/>
-        </p:spPr>
-        <p:txBody>
-          <a:bodyPr wrap="square" lIns="0" tIns="0" rIns="0" bIns="0" rtlCol="0" anchor="ctr"/>
-          <a:lstStyle/>
-          <a:p>
-            <a:pPr algn="ctr" indent="0" marL="0">
-              <a:buNone/>
-            </a:pPr>
-            <a:r>
-              <a:rPr lang="en-US" sz="1200" dirty="0">
-                <a:solidFill>
                   <a:srgbClr val="02C39A"/>
                 </a:solidFill>
                 <a:latin typeface="Calibri" pitchFamily="34" charset="0"/>
                 <a:ea typeface="Calibri" pitchFamily="34" charset="-122"/>
                 <a:cs typeface="Calibri" pitchFamily="34" charset="-120"/>
               </a:rPr>
-              <a:t>Teal Trust</a:t>
+              <a:t>Teal Trust 配色</a:t>
             </a:r>
             <a:endParaRPr lang="en-US" sz="1200" dirty="0"/>
           </a:p>
@@ -2111,7 +2150,7 @@
         </p:nvSpPr>
         <p:spPr>
           <a:xfrm>
-            <a:off x="457200" y="457200"/>
+            <a:off x="457200" y="411480"/>
             <a:ext cx="8229600" cy="502920"/>
           </a:xfrm>
           <a:prstGeom prst="rect">
@@ -2150,8 +2189,8 @@
         </p:nvSpPr>
         <p:spPr>
           <a:xfrm>
-            <a:off x="457200" y="1005840"/>
-            <a:ext cx="8229600" cy="365760"/>
+            <a:off x="457200" y="960120"/>
+            <a:ext cx="8229600" cy="320040"/>
           </a:xfrm>
           <a:prstGeom prst="rect">
             <a:avLst/>
@@ -2189,12 +2228,12 @@
         </p:nvSpPr>
         <p:spPr>
           <a:xfrm>
-            <a:off x="457200" y="1645920"/>
-            <a:ext cx="4023360" cy="1051560"/>
+            <a:off x="457200" y="1508760"/>
+            <a:ext cx="4023360" cy="1143000"/>
           </a:xfrm>
           <a:prstGeom prst="roundRect">
             <a:avLst>
-              <a:gd name="adj" fmla="val 8696"/>
+              <a:gd name="adj" fmla="val 8000"/>
             </a:avLst>
           </a:prstGeom>
           <a:solidFill>
@@ -2211,7 +2250,7 @@
         </p:nvSpPr>
         <p:spPr>
           <a:xfrm>
-            <a:off x="731520" y="1828800"/>
+            <a:off x="731520" y="1709928"/>
             <a:ext cx="3474720" cy="274320"/>
           </a:xfrm>
           <a:prstGeom prst="rect">
@@ -2250,7 +2289,7 @@
         </p:nvSpPr>
         <p:spPr>
           <a:xfrm>
-            <a:off x="731520" y="2148840"/>
+            <a:off x="731520" y="2057400"/>
             <a:ext cx="3474720" cy="411480"/>
           </a:xfrm>
           <a:prstGeom prst="rect">
@@ -2275,7 +2314,7 @@
                 <a:ea typeface="Calibri" pitchFamily="34" charset="-122"/>
                 <a:cs typeface="Calibri" pitchFamily="34" charset="-120"/>
               </a:rPr>
-              <a:t>生成 · 可视化编辑 · 部署分享 · 管理监控 四条主线齐备</a:t>
+              <a:t>生成、可视化编辑、部署分享、管理监控四条主线齐备</a:t>
             </a:r>
             <a:endParaRPr lang="en-US" sz="1400" dirty="0"/>
           </a:p>
@@ -2289,12 +2328,12 @@
         </p:nvSpPr>
         <p:spPr>
           <a:xfrm>
-            <a:off x="4754880" y="1645920"/>
-            <a:ext cx="4023360" cy="1051560"/>
+            <a:off x="4754880" y="1508760"/>
+            <a:ext cx="4023360" cy="1143000"/>
           </a:xfrm>
           <a:prstGeom prst="roundRect">
             <a:avLst>
-              <a:gd name="adj" fmla="val 8696"/>
+              <a:gd name="adj" fmla="val 8000"/>
             </a:avLst>
           </a:prstGeom>
           <a:solidFill>
@@ -2311,7 +2350,7 @@
         </p:nvSpPr>
         <p:spPr>
           <a:xfrm>
-            <a:off x="5029200" y="1828800"/>
+            <a:off x="5029200" y="1709928"/>
             <a:ext cx="3474720" cy="274320"/>
           </a:xfrm>
           <a:prstGeom prst="rect">
@@ -2350,7 +2389,7 @@
         </p:nvSpPr>
         <p:spPr>
           <a:xfrm>
-            <a:off x="5029200" y="2148840"/>
+            <a:off x="5029200" y="2057400"/>
             <a:ext cx="3474720" cy="411480"/>
           </a:xfrm>
           <a:prstGeom prst="rect">
@@ -2375,7 +2414,7 @@
                 <a:ea typeface="Calibri" pitchFamily="34" charset="-122"/>
                 <a:cs typeface="Calibri" pitchFamily="34" charset="-120"/>
               </a:rPr>
-              <a:t>近 7 日无业务提交；开放 #5 / #65（#66 待审）</a:t>
+              <a:t>近 7 日无业务提交；开放 #5、#65，PR #66 待审</a:t>
             </a:r>
             <a:endParaRPr lang="en-US" sz="1400" dirty="0"/>
           </a:p>
@@ -2389,12 +2428,12 @@
         </p:nvSpPr>
         <p:spPr>
           <a:xfrm>
-            <a:off x="457200" y="2880360"/>
-            <a:ext cx="4023360" cy="1051560"/>
+            <a:off x="457200" y="2834640"/>
+            <a:ext cx="4023360" cy="1143000"/>
           </a:xfrm>
           <a:prstGeom prst="roundRect">
             <a:avLst>
-              <a:gd name="adj" fmla="val 8696"/>
+              <a:gd name="adj" fmla="val 8000"/>
             </a:avLst>
           </a:prstGeom>
           <a:solidFill>
@@ -2411,7 +2450,7 @@
         </p:nvSpPr>
         <p:spPr>
           <a:xfrm>
-            <a:off x="731520" y="3063240"/>
+            <a:off x="731520" y="3035808"/>
             <a:ext cx="3474720" cy="274320"/>
           </a:xfrm>
           <a:prstGeom prst="rect">
@@ -2475,7 +2514,7 @@
                 <a:ea typeface="Calibri" pitchFamily="34" charset="-122"/>
                 <a:cs typeface="Calibri" pitchFamily="34" charset="-120"/>
               </a:rPr>
-              <a:t>Vue 生成缺陷阻断体验；CI 与运行指标仍缺</a:t>
+              <a:t>Vue 生成缺陷阻断体验；CI 与运行指标仍缺失</a:t>
             </a:r>
             <a:endParaRPr lang="en-US" sz="1400" dirty="0"/>
           </a:p>
@@ -2489,12 +2528,12 @@
         </p:nvSpPr>
         <p:spPr>
           <a:xfrm>
-            <a:off x="4754880" y="2880360"/>
-            <a:ext cx="4023360" cy="1051560"/>
+            <a:off x="4754880" y="2834640"/>
+            <a:ext cx="4023360" cy="1143000"/>
           </a:xfrm>
           <a:prstGeom prst="roundRect">
             <a:avLst>
-              <a:gd name="adj" fmla="val 8696"/>
+              <a:gd name="adj" fmla="val 8000"/>
             </a:avLst>
           </a:prstGeom>
           <a:solidFill>
@@ -2511,7 +2550,7 @@
         </p:nvSpPr>
         <p:spPr>
           <a:xfrm>
-            <a:off x="5029200" y="3063240"/>
+            <a:off x="5029200" y="3035808"/>
             <a:ext cx="3474720" cy="274320"/>
           </a:xfrm>
           <a:prstGeom prst="rect">
@@ -2578,6 +2617,84 @@
               <a:t>修 #5 → 合 #66 → 最小 CI → 指标进日报</a:t>
             </a:r>
             <a:endParaRPr lang="en-US" sz="1400" dirty="0"/>
+          </a:p>
+        </p:txBody>
+      </p:sp>
+      <p:sp>
+        <p:nvSpPr>
+          <p:cNvPr id="18" name="Text 16"/>
+          <p:cNvSpPr/>
+          <p:nvPr/>
+        </p:nvSpPr>
+        <p:spPr>
+          <a:xfrm>
+            <a:off x="457200" y="4754880"/>
+            <a:ext cx="6858000" cy="256032"/>
+          </a:xfrm>
+          <a:prstGeom prst="rect">
+            <a:avLst/>
+          </a:prstGeom>
+          <a:noFill/>
+          <a:ln/>
+        </p:spPr>
+        <p:txBody>
+          <a:bodyPr wrap="square" lIns="0" tIns="0" rIns="0" bIns="0" rtlCol="0" anchor="ctr"/>
+          <a:lstStyle/>
+          <a:p>
+            <a:pPr indent="0" marL="0">
+              <a:buNone/>
+            </a:pPr>
+            <a:r>
+              <a:rPr lang="en-US" sz="1000" dirty="0">
+                <a:solidFill>
+                  <a:srgbClr val="7A9AA0"/>
+                </a:solidFill>
+                <a:latin typeface="Calibri" pitchFamily="34" charset="0"/>
+                <a:ea typeface="Calibri" pitchFamily="34" charset="-122"/>
+                <a:cs typeface="Calibri" pitchFamily="34" charset="-120"/>
+              </a:rPr>
+              <a:t>yu-ai-code-mother  ·  每日状态  ·  2026-07-30</a:t>
+            </a:r>
+            <a:endParaRPr lang="en-US" sz="1000" dirty="0"/>
+          </a:p>
+        </p:txBody>
+      </p:sp>
+      <p:sp>
+        <p:nvSpPr>
+          <p:cNvPr id="19" name="Text 17"/>
+          <p:cNvSpPr/>
+          <p:nvPr/>
+        </p:nvSpPr>
+        <p:spPr>
+          <a:xfrm>
+            <a:off x="7772400" y="4754880"/>
+            <a:ext cx="914400" cy="256032"/>
+          </a:xfrm>
+          <a:prstGeom prst="rect">
+            <a:avLst/>
+          </a:prstGeom>
+          <a:noFill/>
+          <a:ln/>
+        </p:spPr>
+        <p:txBody>
+          <a:bodyPr wrap="square" lIns="0" tIns="0" rIns="0" bIns="0" rtlCol="0" anchor="ctr"/>
+          <a:lstStyle/>
+          <a:p>
+            <a:pPr algn="r" indent="0" marL="0">
+              <a:buNone/>
+            </a:pPr>
+            <a:r>
+              <a:rPr lang="en-US" sz="1000" dirty="0">
+                <a:solidFill>
+                  <a:srgbClr val="7A9AA0"/>
+                </a:solidFill>
+                <a:latin typeface="Calibri" pitchFamily="34" charset="0"/>
+                <a:ea typeface="Calibri" pitchFamily="34" charset="-122"/>
+                <a:cs typeface="Calibri" pitchFamily="34" charset="-120"/>
+              </a:rPr>
+              <a:t>10 / 10</a:t>
+            </a:r>
+            <a:endParaRPr lang="en-US" sz="1000" dirty="0"/>
           </a:p>
         </p:txBody>
       </p:sp>
@@ -2640,7 +2757,7 @@
         <p:spPr>
           <a:xfrm>
             <a:off x="0" y="0"/>
-            <a:ext cx="9144000" cy="109728"/>
+            <a:ext cx="9144000" cy="91440"/>
           </a:xfrm>
           <a:prstGeom prst="rect">
             <a:avLst/>
@@ -2658,39 +2775,14 @@
       </p:sp>
       <p:sp>
         <p:nvSpPr>
-          <p:cNvPr id="4" name="Shape 2"/>
-          <p:cNvSpPr/>
-          <p:nvPr/>
-        </p:nvSpPr>
-        <p:spPr>
-          <a:xfrm>
-            <a:off x="0" y="109728"/>
-            <a:ext cx="109728" cy="5033772"/>
-          </a:xfrm>
-          <a:prstGeom prst="rect">
-            <a:avLst/>
-          </a:prstGeom>
-          <a:solidFill>
-            <a:srgbClr val="00A896"/>
-          </a:solidFill>
-          <a:ln w="12700">
-            <a:solidFill>
-              <a:srgbClr val="00A896"/>
-            </a:solidFill>
-            <a:prstDash val="solid"/>
-          </a:ln>
-        </p:spPr>
-      </p:sp>
-      <p:sp>
-        <p:nvSpPr>
-          <p:cNvPr id="5" name="Text 3"/>
+          <p:cNvPr id="4" name="Text 2"/>
           <p:cNvSpPr/>
           <p:nvPr/>
         </p:nvSpPr>
         <p:spPr>
           <a:xfrm>
             <a:off x="457200" y="256032"/>
-            <a:ext cx="8229600" cy="502920"/>
+            <a:ext cx="8229600" cy="457200"/>
           </a:xfrm>
           <a:prstGeom prst="rect">
             <a:avLst/>
@@ -2722,14 +2814,14 @@
       </p:sp>
       <p:sp>
         <p:nvSpPr>
-          <p:cNvPr id="6" name="Text 4"/>
-          <p:cNvSpPr/>
-          <p:nvPr/>
-        </p:nvSpPr>
-        <p:spPr>
-          <a:xfrm>
-            <a:off x="457200" y="749808"/>
-            <a:ext cx="8229600" cy="292608"/>
+          <p:cNvPr id="5" name="Text 3"/>
+          <p:cNvSpPr/>
+          <p:nvPr/>
+        </p:nvSpPr>
+        <p:spPr>
+          <a:xfrm>
+            <a:off x="457200" y="713232"/>
+            <a:ext cx="8229600" cy="274320"/>
           </a:xfrm>
           <a:prstGeom prst="rect">
             <a:avLst/>
@@ -2747,7 +2839,7 @@
             <a:r>
               <a:rPr lang="en-US" sz="1300" i="1" dirty="0">
                 <a:solidFill>
-                  <a:srgbClr val="5A6F76"/>
+                  <a:srgbClr val="3D555C"/>
                 </a:solidFill>
                 <a:latin typeface="Calibri" pitchFamily="34" charset="0"/>
                 <a:ea typeface="Calibri" pitchFamily="34" charset="-122"/>
@@ -2761,18 +2853,18 @@
       </p:sp>
       <p:sp>
         <p:nvSpPr>
-          <p:cNvPr id="7" name="Shape 5"/>
-          <p:cNvSpPr/>
-          <p:nvPr/>
-        </p:nvSpPr>
-        <p:spPr>
-          <a:xfrm>
-            <a:off x="457200" y="1234440"/>
-            <a:ext cx="3977640" cy="1371600"/>
+          <p:cNvPr id="6" name="Shape 4"/>
+          <p:cNvSpPr/>
+          <p:nvPr/>
+        </p:nvSpPr>
+        <p:spPr>
+          <a:xfrm>
+            <a:off x="457200" y="1143000"/>
+            <a:ext cx="4023360" cy="1417320"/>
           </a:xfrm>
           <a:prstGeom prst="roundRect">
             <a:avLst>
-              <a:gd name="adj" fmla="val 6667"/>
+              <a:gd name="adj" fmla="val 6452"/>
             </a:avLst>
           </a:prstGeom>
           <a:solidFill>
@@ -2790,14 +2882,14 @@
       </p:sp>
       <p:sp>
         <p:nvSpPr>
-          <p:cNvPr id="8" name="Shape 6"/>
-          <p:cNvSpPr/>
-          <p:nvPr/>
-        </p:nvSpPr>
-        <p:spPr>
-          <a:xfrm>
-            <a:off x="457200" y="1234440"/>
-            <a:ext cx="109728" cy="1371600"/>
+          <p:cNvPr id="7" name="Shape 5"/>
+          <p:cNvSpPr/>
+          <p:nvPr/>
+        </p:nvSpPr>
+        <p:spPr>
+          <a:xfrm>
+            <a:off x="457200" y="1143000"/>
+            <a:ext cx="109728" cy="1417320"/>
           </a:xfrm>
           <a:prstGeom prst="rect">
             <a:avLst/>
@@ -2815,14 +2907,14 @@
       </p:sp>
       <p:sp>
         <p:nvSpPr>
-          <p:cNvPr id="9" name="Text 7"/>
-          <p:cNvSpPr/>
-          <p:nvPr/>
-        </p:nvSpPr>
-        <p:spPr>
-          <a:xfrm>
-            <a:off x="777240" y="1463040"/>
-            <a:ext cx="3383280" cy="320040"/>
+          <p:cNvPr id="8" name="Text 6"/>
+          <p:cNvSpPr/>
+          <p:nvPr/>
+        </p:nvSpPr>
+        <p:spPr>
+          <a:xfrm>
+            <a:off x="777240" y="1399032"/>
+            <a:ext cx="3474720" cy="320040"/>
           </a:xfrm>
           <a:prstGeom prst="rect">
             <a:avLst/>
@@ -2854,14 +2946,14 @@
       </p:sp>
       <p:sp>
         <p:nvSpPr>
-          <p:cNvPr id="10" name="Text 8"/>
-          <p:cNvSpPr/>
-          <p:nvPr/>
-        </p:nvSpPr>
-        <p:spPr>
-          <a:xfrm>
-            <a:off x="777240" y="1874520"/>
-            <a:ext cx="3383280" cy="548640"/>
+          <p:cNvPr id="9" name="Text 7"/>
+          <p:cNvSpPr/>
+          <p:nvPr/>
+        </p:nvSpPr>
+        <p:spPr>
+          <a:xfrm>
+            <a:off x="777240" y="1828800"/>
+            <a:ext cx="3474720" cy="548640"/>
           </a:xfrm>
           <a:prstGeom prst="rect">
             <a:avLst/>
@@ -2879,13 +2971,13 @@
             <a:r>
               <a:rPr lang="en-US" sz="1300" dirty="0">
                 <a:solidFill>
-                  <a:srgbClr val="5A6F76"/>
-                </a:solidFill>
-                <a:latin typeface="Calibri" pitchFamily="34" charset="0"/>
-                <a:ea typeface="Calibri" pitchFamily="34" charset="-122"/>
-                <a:cs typeface="Calibri" pitchFamily="34" charset="-120"/>
-              </a:rPr>
-              <a:t>用户描述需求 → AI 生成可预览、可编辑、可部署的 Web 应用</a:t>
+                  <a:srgbClr val="3D555C"/>
+                </a:solidFill>
+                <a:latin typeface="Calibri" pitchFamily="34" charset="0"/>
+                <a:ea typeface="Calibri" pitchFamily="34" charset="-122"/>
+                <a:cs typeface="Calibri" pitchFamily="34" charset="-120"/>
+              </a:rPr>
+              <a:t>用户描述需求后，AI 生成可预览、可编辑、可部署的 Web 应用</a:t>
             </a:r>
             <a:endParaRPr lang="en-US" sz="1300" dirty="0"/>
           </a:p>
@@ -2893,18 +2985,18 @@
       </p:sp>
       <p:sp>
         <p:nvSpPr>
-          <p:cNvPr id="11" name="Shape 9"/>
-          <p:cNvSpPr/>
-          <p:nvPr/>
-        </p:nvSpPr>
-        <p:spPr>
-          <a:xfrm>
-            <a:off x="4663440" y="1234440"/>
-            <a:ext cx="3977640" cy="1371600"/>
+          <p:cNvPr id="10" name="Shape 8"/>
+          <p:cNvSpPr/>
+          <p:nvPr/>
+        </p:nvSpPr>
+        <p:spPr>
+          <a:xfrm>
+            <a:off x="4754880" y="1143000"/>
+            <a:ext cx="4023360" cy="1417320"/>
           </a:xfrm>
           <a:prstGeom prst="roundRect">
             <a:avLst>
-              <a:gd name="adj" fmla="val 6667"/>
+              <a:gd name="adj" fmla="val 6452"/>
             </a:avLst>
           </a:prstGeom>
           <a:solidFill>
@@ -2922,14 +3014,14 @@
       </p:sp>
       <p:sp>
         <p:nvSpPr>
-          <p:cNvPr id="12" name="Shape 10"/>
-          <p:cNvSpPr/>
-          <p:nvPr/>
-        </p:nvSpPr>
-        <p:spPr>
-          <a:xfrm>
-            <a:off x="4663440" y="1234440"/>
-            <a:ext cx="109728" cy="1371600"/>
+          <p:cNvPr id="11" name="Shape 9"/>
+          <p:cNvSpPr/>
+          <p:nvPr/>
+        </p:nvSpPr>
+        <p:spPr>
+          <a:xfrm>
+            <a:off x="4754880" y="1143000"/>
+            <a:ext cx="109728" cy="1417320"/>
           </a:xfrm>
           <a:prstGeom prst="rect">
             <a:avLst/>
@@ -2947,14 +3039,14 @@
       </p:sp>
       <p:sp>
         <p:nvSpPr>
-          <p:cNvPr id="13" name="Text 11"/>
-          <p:cNvSpPr/>
-          <p:nvPr/>
-        </p:nvSpPr>
-        <p:spPr>
-          <a:xfrm>
-            <a:off x="4983480" y="1463040"/>
-            <a:ext cx="3383280" cy="320040"/>
+          <p:cNvPr id="12" name="Text 10"/>
+          <p:cNvSpPr/>
+          <p:nvPr/>
+        </p:nvSpPr>
+        <p:spPr>
+          <a:xfrm>
+            <a:off x="5074920" y="1399032"/>
+            <a:ext cx="3474720" cy="320040"/>
           </a:xfrm>
           <a:prstGeom prst="rect">
             <a:avLst/>
@@ -2986,14 +3078,14 @@
       </p:sp>
       <p:sp>
         <p:nvSpPr>
-          <p:cNvPr id="14" name="Text 12"/>
-          <p:cNvSpPr/>
-          <p:nvPr/>
-        </p:nvSpPr>
-        <p:spPr>
-          <a:xfrm>
-            <a:off x="4983480" y="1874520"/>
-            <a:ext cx="3383280" cy="548640"/>
+          <p:cNvPr id="13" name="Text 11"/>
+          <p:cNvSpPr/>
+          <p:nvPr/>
+        </p:nvSpPr>
+        <p:spPr>
+          <a:xfrm>
+            <a:off x="5074920" y="1828800"/>
+            <a:ext cx="3474720" cy="548640"/>
           </a:xfrm>
           <a:prstGeom prst="rect">
             <a:avLst/>
@@ -3011,13 +3103,13 @@
             <a:r>
               <a:rPr lang="en-US" sz="1300" dirty="0">
                 <a:solidFill>
-                  <a:srgbClr val="5A6F76"/>
-                </a:solidFill>
-                <a:latin typeface="Calibri" pitchFamily="34" charset="0"/>
-                <a:ea typeface="Calibri" pitchFamily="34" charset="-122"/>
-                <a:cs typeface="Calibri" pitchFamily="34" charset="-120"/>
-              </a:rPr>
-              <a:t>Spring Boot 3.5 · LangChain4j · LangGraph4j · Vue 3 · Redis · Dubbo/Nacos</a:t>
+                  <a:srgbClr val="3D555C"/>
+                </a:solidFill>
+                <a:latin typeface="Calibri" pitchFamily="34" charset="0"/>
+                <a:ea typeface="Calibri" pitchFamily="34" charset="-122"/>
+                <a:cs typeface="Calibri" pitchFamily="34" charset="-120"/>
+              </a:rPr>
+              <a:t>Spring Boot 3.5、LangChain4j、LangGraph4j、Vue 3、Redis、Dubbo/Nacos</a:t>
             </a:r>
             <a:endParaRPr lang="en-US" sz="1300" dirty="0"/>
           </a:p>
@@ -3025,18 +3117,18 @@
       </p:sp>
       <p:sp>
         <p:nvSpPr>
-          <p:cNvPr id="15" name="Shape 13"/>
+          <p:cNvPr id="14" name="Shape 12"/>
           <p:cNvSpPr/>
           <p:nvPr/>
         </p:nvSpPr>
         <p:spPr>
           <a:xfrm>
             <a:off x="457200" y="2788920"/>
-            <a:ext cx="3977640" cy="1371600"/>
+            <a:ext cx="4023360" cy="1417320"/>
           </a:xfrm>
           <a:prstGeom prst="roundRect">
             <a:avLst>
-              <a:gd name="adj" fmla="val 6667"/>
+              <a:gd name="adj" fmla="val 6452"/>
             </a:avLst>
           </a:prstGeom>
           <a:solidFill>
@@ -3054,14 +3146,14 @@
       </p:sp>
       <p:sp>
         <p:nvSpPr>
-          <p:cNvPr id="16" name="Shape 14"/>
+          <p:cNvPr id="15" name="Shape 13"/>
           <p:cNvSpPr/>
           <p:nvPr/>
         </p:nvSpPr>
         <p:spPr>
           <a:xfrm>
             <a:off x="457200" y="2788920"/>
-            <a:ext cx="109728" cy="1371600"/>
+            <a:ext cx="109728" cy="1417320"/>
           </a:xfrm>
           <a:prstGeom prst="rect">
             <a:avLst/>
@@ -3079,14 +3171,14 @@
       </p:sp>
       <p:sp>
         <p:nvSpPr>
-          <p:cNvPr id="17" name="Text 15"/>
-          <p:cNvSpPr/>
-          <p:nvPr/>
-        </p:nvSpPr>
-        <p:spPr>
-          <a:xfrm>
-            <a:off x="777240" y="3017520"/>
-            <a:ext cx="3383280" cy="320040"/>
+          <p:cNvPr id="16" name="Text 14"/>
+          <p:cNvSpPr/>
+          <p:nvPr/>
+        </p:nvSpPr>
+        <p:spPr>
+          <a:xfrm>
+            <a:off x="777240" y="3044952"/>
+            <a:ext cx="3474720" cy="320040"/>
           </a:xfrm>
           <a:prstGeom prst="rect">
             <a:avLst/>
@@ -3118,14 +3210,14 @@
       </p:sp>
       <p:sp>
         <p:nvSpPr>
-          <p:cNvPr id="18" name="Text 16"/>
-          <p:cNvSpPr/>
-          <p:nvPr/>
-        </p:nvSpPr>
-        <p:spPr>
-          <a:xfrm>
-            <a:off x="777240" y="3429000"/>
-            <a:ext cx="3383280" cy="548640"/>
+          <p:cNvPr id="17" name="Text 15"/>
+          <p:cNvSpPr/>
+          <p:nvPr/>
+        </p:nvSpPr>
+        <p:spPr>
+          <a:xfrm>
+            <a:off x="777240" y="3474720"/>
+            <a:ext cx="3474720" cy="548640"/>
           </a:xfrm>
           <a:prstGeom prst="rect">
             <a:avLst/>
@@ -3143,7 +3235,7 @@
             <a:r>
               <a:rPr lang="en-US" sz="1300" dirty="0">
                 <a:solidFill>
-                  <a:srgbClr val="5A6F76"/>
+                  <a:srgbClr val="3D555C"/>
                 </a:solidFill>
                 <a:latin typeface="Calibri" pitchFamily="34" charset="0"/>
                 <a:ea typeface="Calibri" pitchFamily="34" charset="-122"/>
@@ -3157,18 +3249,18 @@
       </p:sp>
       <p:sp>
         <p:nvSpPr>
-          <p:cNvPr id="19" name="Shape 17"/>
-          <p:cNvSpPr/>
-          <p:nvPr/>
-        </p:nvSpPr>
-        <p:spPr>
-          <a:xfrm>
-            <a:off x="4663440" y="2788920"/>
-            <a:ext cx="3977640" cy="1371600"/>
+          <p:cNvPr id="18" name="Shape 16"/>
+          <p:cNvSpPr/>
+          <p:nvPr/>
+        </p:nvSpPr>
+        <p:spPr>
+          <a:xfrm>
+            <a:off x="4754880" y="2788920"/>
+            <a:ext cx="4023360" cy="1417320"/>
           </a:xfrm>
           <a:prstGeom prst="roundRect">
             <a:avLst>
-              <a:gd name="adj" fmla="val 6667"/>
+              <a:gd name="adj" fmla="val 6452"/>
             </a:avLst>
           </a:prstGeom>
           <a:solidFill>
@@ -3186,14 +3278,14 @@
       </p:sp>
       <p:sp>
         <p:nvSpPr>
-          <p:cNvPr id="20" name="Shape 18"/>
-          <p:cNvSpPr/>
-          <p:nvPr/>
-        </p:nvSpPr>
-        <p:spPr>
-          <a:xfrm>
-            <a:off x="4663440" y="2788920"/>
-            <a:ext cx="109728" cy="1371600"/>
+          <p:cNvPr id="19" name="Shape 17"/>
+          <p:cNvSpPr/>
+          <p:nvPr/>
+        </p:nvSpPr>
+        <p:spPr>
+          <a:xfrm>
+            <a:off x="4754880" y="2788920"/>
+            <a:ext cx="109728" cy="1417320"/>
           </a:xfrm>
           <a:prstGeom prst="rect">
             <a:avLst/>
@@ -3211,14 +3303,14 @@
       </p:sp>
       <p:sp>
         <p:nvSpPr>
-          <p:cNvPr id="21" name="Text 19"/>
-          <p:cNvSpPr/>
-          <p:nvPr/>
-        </p:nvSpPr>
-        <p:spPr>
-          <a:xfrm>
-            <a:off x="4983480" y="3017520"/>
-            <a:ext cx="3383280" cy="320040"/>
+          <p:cNvPr id="20" name="Text 18"/>
+          <p:cNvSpPr/>
+          <p:nvPr/>
+        </p:nvSpPr>
+        <p:spPr>
+          <a:xfrm>
+            <a:off x="5074920" y="3044952"/>
+            <a:ext cx="3474720" cy="320040"/>
           </a:xfrm>
           <a:prstGeom prst="rect">
             <a:avLst/>
@@ -3250,40 +3342,79 @@
       </p:sp>
       <p:sp>
         <p:nvSpPr>
+          <p:cNvPr id="21" name="Text 19"/>
+          <p:cNvSpPr/>
+          <p:nvPr/>
+        </p:nvSpPr>
+        <p:spPr>
+          <a:xfrm>
+            <a:off x="5074920" y="3474720"/>
+            <a:ext cx="3474720" cy="548640"/>
+          </a:xfrm>
+          <a:prstGeom prst="rect">
+            <a:avLst/>
+          </a:prstGeom>
+          <a:noFill/>
+          <a:ln/>
+        </p:spPr>
+        <p:txBody>
+          <a:bodyPr wrap="square" lIns="0" tIns="0" rIns="0" bIns="0" rtlCol="0" anchor="ctr"/>
+          <a:lstStyle/>
+          <a:p>
+            <a:pPr indent="0" marL="0">
+              <a:buNone/>
+            </a:pPr>
+            <a:r>
+              <a:rPr lang="en-US" sz="1300" dirty="0">
+                <a:solidFill>
+                  <a:srgbClr val="3D555C"/>
+                </a:solidFill>
+                <a:latin typeface="Calibri" pitchFamily="34" charset="0"/>
+                <a:ea typeface="Calibri" pitchFamily="34" charset="-122"/>
+                <a:cs typeface="Calibri" pitchFamily="34" charset="-120"/>
+              </a:rPr>
+              <a:t>后端约 146 个 Java 文件；前端 17 个 Vue 页；15 个测试类</a:t>
+            </a:r>
+            <a:endParaRPr lang="en-US" sz="1300" dirty="0"/>
+          </a:p>
+        </p:txBody>
+      </p:sp>
+      <p:sp>
+        <p:nvSpPr>
           <p:cNvPr id="22" name="Text 20"/>
           <p:cNvSpPr/>
           <p:nvPr/>
         </p:nvSpPr>
         <p:spPr>
           <a:xfrm>
-            <a:off x="4983480" y="3429000"/>
-            <a:ext cx="3383280" cy="548640"/>
-          </a:xfrm>
-          <a:prstGeom prst="rect">
-            <a:avLst/>
-          </a:prstGeom>
-          <a:noFill/>
-          <a:ln/>
-        </p:spPr>
-        <p:txBody>
-          <a:bodyPr wrap="square" lIns="0" tIns="0" rIns="0" bIns="0" rtlCol="0" anchor="ctr"/>
-          <a:lstStyle/>
-          <a:p>
-            <a:pPr indent="0" marL="0">
-              <a:buNone/>
-            </a:pPr>
-            <a:r>
-              <a:rPr lang="en-US" sz="1300" dirty="0">
-                <a:solidFill>
-                  <a:srgbClr val="5A6F76"/>
-                </a:solidFill>
-                <a:latin typeface="Calibri" pitchFamily="34" charset="0"/>
-                <a:ea typeface="Calibri" pitchFamily="34" charset="-122"/>
-                <a:cs typeface="Calibri" pitchFamily="34" charset="-120"/>
-              </a:rPr>
-              <a:t>后端约 146 Java 文件；前端 17 Vue 页；测试用例 15 个类</a:t>
-            </a:r>
-            <a:endParaRPr lang="en-US" sz="1300" dirty="0"/>
+            <a:off x="457200" y="4800600"/>
+            <a:ext cx="6858000" cy="256032"/>
+          </a:xfrm>
+          <a:prstGeom prst="rect">
+            <a:avLst/>
+          </a:prstGeom>
+          <a:noFill/>
+          <a:ln/>
+        </p:spPr>
+        <p:txBody>
+          <a:bodyPr wrap="square" lIns="0" tIns="0" rIns="0" bIns="0" rtlCol="0" anchor="ctr"/>
+          <a:lstStyle/>
+          <a:p>
+            <a:pPr indent="0" marL="0">
+              <a:buNone/>
+            </a:pPr>
+            <a:r>
+              <a:rPr lang="en-US" sz="1000" dirty="0">
+                <a:solidFill>
+                  <a:srgbClr val="3D555C"/>
+                </a:solidFill>
+                <a:latin typeface="Calibri" pitchFamily="34" charset="0"/>
+                <a:ea typeface="Calibri" pitchFamily="34" charset="-122"/>
+                <a:cs typeface="Calibri" pitchFamily="34" charset="-120"/>
+              </a:rPr>
+              <a:t>yu-ai-code-mother  ·  每日状态  ·  2026-07-30</a:t>
+            </a:r>
+            <a:endParaRPr lang="en-US" sz="1000" dirty="0"/>
           </a:p>
         </p:txBody>
       </p:sp>
@@ -3295,65 +3426,26 @@
         </p:nvSpPr>
         <p:spPr>
           <a:xfrm>
-            <a:off x="457200" y="4828032"/>
-            <a:ext cx="6858000" cy="256032"/>
-          </a:xfrm>
-          <a:prstGeom prst="rect">
-            <a:avLst/>
-          </a:prstGeom>
-          <a:noFill/>
-          <a:ln/>
-        </p:spPr>
-        <p:txBody>
-          <a:bodyPr wrap="square" lIns="0" tIns="0" rIns="0" bIns="0" rtlCol="0" anchor="ctr"/>
-          <a:lstStyle/>
-          <a:p>
-            <a:pPr indent="0" marL="0">
+            <a:off x="7772400" y="4800600"/>
+            <a:ext cx="914400" cy="256032"/>
+          </a:xfrm>
+          <a:prstGeom prst="rect">
+            <a:avLst/>
+          </a:prstGeom>
+          <a:noFill/>
+          <a:ln/>
+        </p:spPr>
+        <p:txBody>
+          <a:bodyPr wrap="square" lIns="0" tIns="0" rIns="0" bIns="0" rtlCol="0" anchor="ctr"/>
+          <a:lstStyle/>
+          <a:p>
+            <a:pPr algn="r" indent="0" marL="0">
               <a:buNone/>
             </a:pPr>
             <a:r>
               <a:rPr lang="en-US" sz="1000" dirty="0">
                 <a:solidFill>
-                  <a:srgbClr val="5A6F76"/>
-                </a:solidFill>
-                <a:latin typeface="Calibri" pitchFamily="34" charset="0"/>
-                <a:ea typeface="Calibri" pitchFamily="34" charset="-122"/>
-                <a:cs typeface="Calibri" pitchFamily="34" charset="-120"/>
-              </a:rPr>
-              <a:t>yu-ai-code-mother  ·  每日状态  ·  2026-07-30</a:t>
-            </a:r>
-            <a:endParaRPr lang="en-US" sz="1000" dirty="0"/>
-          </a:p>
-        </p:txBody>
-      </p:sp>
-      <p:sp>
-        <p:nvSpPr>
-          <p:cNvPr id="24" name="Text 22"/>
-          <p:cNvSpPr/>
-          <p:nvPr/>
-        </p:nvSpPr>
-        <p:spPr>
-          <a:xfrm>
-            <a:off x="7772400" y="4828032"/>
-            <a:ext cx="914400" cy="256032"/>
-          </a:xfrm>
-          <a:prstGeom prst="rect">
-            <a:avLst/>
-          </a:prstGeom>
-          <a:noFill/>
-          <a:ln/>
-        </p:spPr>
-        <p:txBody>
-          <a:bodyPr wrap="square" lIns="0" tIns="0" rIns="0" bIns="0" rtlCol="0" anchor="ctr"/>
-          <a:lstStyle/>
-          <a:p>
-            <a:pPr algn="r" indent="0" marL="0">
-              <a:buNone/>
-            </a:pPr>
-            <a:r>
-              <a:rPr lang="en-US" sz="1000" dirty="0">
-                <a:solidFill>
-                  <a:srgbClr val="5A6F76"/>
+                  <a:srgbClr val="3D555C"/>
                 </a:solidFill>
                 <a:latin typeface="Calibri" pitchFamily="34" charset="0"/>
                 <a:ea typeface="Calibri" pitchFamily="34" charset="-122"/>
@@ -3424,7 +3516,7 @@
         <p:spPr>
           <a:xfrm>
             <a:off x="0" y="0"/>
-            <a:ext cx="9144000" cy="109728"/>
+            <a:ext cx="9144000" cy="91440"/>
           </a:xfrm>
           <a:prstGeom prst="rect">
             <a:avLst/>
@@ -3442,39 +3534,14 @@
       </p:sp>
       <p:sp>
         <p:nvSpPr>
-          <p:cNvPr id="4" name="Shape 2"/>
-          <p:cNvSpPr/>
-          <p:nvPr/>
-        </p:nvSpPr>
-        <p:spPr>
-          <a:xfrm>
-            <a:off x="0" y="109728"/>
-            <a:ext cx="109728" cy="5033772"/>
-          </a:xfrm>
-          <a:prstGeom prst="rect">
-            <a:avLst/>
-          </a:prstGeom>
-          <a:solidFill>
-            <a:srgbClr val="00A896"/>
-          </a:solidFill>
-          <a:ln w="12700">
-            <a:solidFill>
-              <a:srgbClr val="00A896"/>
-            </a:solidFill>
-            <a:prstDash val="solid"/>
-          </a:ln>
-        </p:spPr>
-      </p:sp>
-      <p:sp>
-        <p:nvSpPr>
-          <p:cNvPr id="5" name="Text 3"/>
+          <p:cNvPr id="4" name="Text 2"/>
           <p:cNvSpPr/>
           <p:nvPr/>
         </p:nvSpPr>
         <p:spPr>
           <a:xfrm>
             <a:off x="457200" y="256032"/>
-            <a:ext cx="8229600" cy="502920"/>
+            <a:ext cx="8229600" cy="457200"/>
           </a:xfrm>
           <a:prstGeom prst="rect">
             <a:avLst/>
@@ -3506,14 +3573,14 @@
       </p:sp>
       <p:sp>
         <p:nvSpPr>
-          <p:cNvPr id="6" name="Text 4"/>
-          <p:cNvSpPr/>
-          <p:nvPr/>
-        </p:nvSpPr>
-        <p:spPr>
-          <a:xfrm>
-            <a:off x="457200" y="749808"/>
-            <a:ext cx="8229600" cy="292608"/>
+          <p:cNvPr id="5" name="Text 3"/>
+          <p:cNvSpPr/>
+          <p:nvPr/>
+        </p:nvSpPr>
+        <p:spPr>
+          <a:xfrm>
+            <a:off x="457200" y="713232"/>
+            <a:ext cx="8229600" cy="274320"/>
           </a:xfrm>
           <a:prstGeom prst="rect">
             <a:avLst/>
@@ -3531,7 +3598,7 @@
             <a:r>
               <a:rPr lang="en-US" sz="1300" i="1" dirty="0">
                 <a:solidFill>
-                  <a:srgbClr val="5A6F76"/>
+                  <a:srgbClr val="3D555C"/>
                 </a:solidFill>
                 <a:latin typeface="Calibri" pitchFamily="34" charset="0"/>
                 <a:ea typeface="Calibri" pitchFamily="34" charset="-122"/>
@@ -3545,18 +3612,18 @@
       </p:sp>
       <p:sp>
         <p:nvSpPr>
-          <p:cNvPr id="7" name="Shape 5"/>
-          <p:cNvSpPr/>
-          <p:nvPr/>
-        </p:nvSpPr>
-        <p:spPr>
-          <a:xfrm>
-            <a:off x="457200" y="1188720"/>
-            <a:ext cx="8229600" cy="713232"/>
+          <p:cNvPr id="6" name="Shape 4"/>
+          <p:cNvSpPr/>
+          <p:nvPr/>
+        </p:nvSpPr>
+        <p:spPr>
+          <a:xfrm>
+            <a:off x="457200" y="1097280"/>
+            <a:ext cx="8229600" cy="749808"/>
           </a:xfrm>
           <a:prstGeom prst="roundRect">
             <a:avLst>
-              <a:gd name="adj" fmla="val 10256"/>
+              <a:gd name="adj" fmla="val 9756"/>
             </a:avLst>
           </a:prstGeom>
           <a:solidFill>
@@ -3567,13 +3634,13 @@
       </p:sp>
       <p:sp>
         <p:nvSpPr>
-          <p:cNvPr id="8" name="Shape 6"/>
-          <p:cNvSpPr/>
-          <p:nvPr/>
-        </p:nvSpPr>
-        <p:spPr>
-          <a:xfrm>
-            <a:off x="594360" y="1316736"/>
+          <p:cNvPr id="7" name="Shape 5"/>
+          <p:cNvSpPr/>
+          <p:nvPr/>
+        </p:nvSpPr>
+        <p:spPr>
+          <a:xfrm>
+            <a:off x="640080" y="1243584"/>
             <a:ext cx="822960" cy="457200"/>
           </a:xfrm>
           <a:prstGeom prst="roundRect">
@@ -3589,13 +3656,13 @@
       </p:sp>
       <p:sp>
         <p:nvSpPr>
-          <p:cNvPr id="9" name="Text 7"/>
-          <p:cNvSpPr/>
-          <p:nvPr/>
-        </p:nvSpPr>
-        <p:spPr>
-          <a:xfrm>
-            <a:off x="594360" y="1371600"/>
+          <p:cNvPr id="8" name="Text 6"/>
+          <p:cNvSpPr/>
+          <p:nvPr/>
+        </p:nvSpPr>
+        <p:spPr>
+          <a:xfrm>
+            <a:off x="640080" y="1298448"/>
             <a:ext cx="822960" cy="365760"/>
           </a:xfrm>
           <a:prstGeom prst="rect">
@@ -3628,14 +3695,14 @@
       </p:sp>
       <p:sp>
         <p:nvSpPr>
-          <p:cNvPr id="10" name="Text 8"/>
-          <p:cNvSpPr/>
-          <p:nvPr/>
-        </p:nvSpPr>
-        <p:spPr>
-          <a:xfrm>
-            <a:off x="1645920" y="1298448"/>
-            <a:ext cx="6766560" cy="274320"/>
+          <p:cNvPr id="9" name="Text 7"/>
+          <p:cNvSpPr/>
+          <p:nvPr/>
+        </p:nvSpPr>
+        <p:spPr>
+          <a:xfrm>
+            <a:off x="1691640" y="1225296"/>
+            <a:ext cx="6675120" cy="274320"/>
           </a:xfrm>
           <a:prstGeom prst="rect">
             <a:avLst/>
@@ -3667,14 +3734,14 @@
       </p:sp>
       <p:sp>
         <p:nvSpPr>
-          <p:cNvPr id="11" name="Text 9"/>
-          <p:cNvSpPr/>
-          <p:nvPr/>
-        </p:nvSpPr>
-        <p:spPr>
-          <a:xfrm>
-            <a:off x="1645920" y="1572768"/>
-            <a:ext cx="6766560" cy="256032"/>
+          <p:cNvPr id="10" name="Text 8"/>
+          <p:cNvSpPr/>
+          <p:nvPr/>
+        </p:nvSpPr>
+        <p:spPr>
+          <a:xfrm>
+            <a:off x="1691640" y="1517904"/>
+            <a:ext cx="6675120" cy="256032"/>
           </a:xfrm>
           <a:prstGeom prst="rect">
             <a:avLst/>
@@ -3692,13 +3759,13 @@
             <a:r>
               <a:rPr lang="en-US" sz="1300" dirty="0">
                 <a:solidFill>
-                  <a:srgbClr val="5A6F76"/>
-                </a:solidFill>
-                <a:latin typeface="Calibri" pitchFamily="34" charset="0"/>
-                <a:ea typeface="Calibri" pitchFamily="34" charset="-122"/>
-                <a:cs typeface="Calibri" pitchFamily="34" charset="-120"/>
-              </a:rPr>
-              <a:t>需求理解 + 策略路由 + 工具调用，流式输出执行过程</a:t>
+                  <a:srgbClr val="3D555C"/>
+                </a:solidFill>
+                <a:latin typeface="Calibri" pitchFamily="34" charset="0"/>
+                <a:ea typeface="Calibri" pitchFamily="34" charset="-122"/>
+                <a:cs typeface="Calibri" pitchFamily="34" charset="-120"/>
+              </a:rPr>
+              <a:t>需求理解、策略路由与工具调用，流式输出执行过程</a:t>
             </a:r>
             <a:endParaRPr lang="en-US" sz="1300" dirty="0"/>
           </a:p>
@@ -3706,18 +3773,18 @@
       </p:sp>
       <p:sp>
         <p:nvSpPr>
-          <p:cNvPr id="12" name="Shape 10"/>
-          <p:cNvSpPr/>
-          <p:nvPr/>
-        </p:nvSpPr>
-        <p:spPr>
-          <a:xfrm>
-            <a:off x="457200" y="2011680"/>
-            <a:ext cx="8229600" cy="713232"/>
+          <p:cNvPr id="11" name="Shape 9"/>
+          <p:cNvSpPr/>
+          <p:nvPr/>
+        </p:nvSpPr>
+        <p:spPr>
+          <a:xfrm>
+            <a:off x="457200" y="1965960"/>
+            <a:ext cx="8229600" cy="749808"/>
           </a:xfrm>
           <a:prstGeom prst="roundRect">
             <a:avLst>
-              <a:gd name="adj" fmla="val 10256"/>
+              <a:gd name="adj" fmla="val 9756"/>
             </a:avLst>
           </a:prstGeom>
           <a:solidFill>
@@ -3728,13 +3795,13 @@
       </p:sp>
       <p:sp>
         <p:nvSpPr>
-          <p:cNvPr id="13" name="Shape 11"/>
-          <p:cNvSpPr/>
-          <p:nvPr/>
-        </p:nvSpPr>
-        <p:spPr>
-          <a:xfrm>
-            <a:off x="594360" y="2139696"/>
+          <p:cNvPr id="12" name="Shape 10"/>
+          <p:cNvSpPr/>
+          <p:nvPr/>
+        </p:nvSpPr>
+        <p:spPr>
+          <a:xfrm>
+            <a:off x="640080" y="2112264"/>
             <a:ext cx="822960" cy="457200"/>
           </a:xfrm>
           <a:prstGeom prst="roundRect">
@@ -3743,20 +3810,20 @@
             </a:avLst>
           </a:prstGeom>
           <a:solidFill>
-            <a:srgbClr val="00A896"/>
-          </a:solidFill>
-          <a:ln/>
-        </p:spPr>
-      </p:sp>
-      <p:sp>
-        <p:nvSpPr>
-          <p:cNvPr id="14" name="Text 12"/>
-          <p:cNvSpPr/>
-          <p:nvPr/>
-        </p:nvSpPr>
-        <p:spPr>
-          <a:xfrm>
-            <a:off x="594360" y="2194560"/>
+            <a:srgbClr val="028090"/>
+          </a:solidFill>
+          <a:ln/>
+        </p:spPr>
+      </p:sp>
+      <p:sp>
+        <p:nvSpPr>
+          <p:cNvPr id="13" name="Text 11"/>
+          <p:cNvSpPr/>
+          <p:nvPr/>
+        </p:nvSpPr>
+        <p:spPr>
+          <a:xfrm>
+            <a:off x="640080" y="2167128"/>
             <a:ext cx="822960" cy="365760"/>
           </a:xfrm>
           <a:prstGeom prst="rect">
@@ -3789,14 +3856,14 @@
       </p:sp>
       <p:sp>
         <p:nvSpPr>
-          <p:cNvPr id="15" name="Text 13"/>
-          <p:cNvSpPr/>
-          <p:nvPr/>
-        </p:nvSpPr>
-        <p:spPr>
-          <a:xfrm>
-            <a:off x="1645920" y="2121408"/>
-            <a:ext cx="6766560" cy="274320"/>
+          <p:cNvPr id="14" name="Text 12"/>
+          <p:cNvSpPr/>
+          <p:nvPr/>
+        </p:nvSpPr>
+        <p:spPr>
+          <a:xfrm>
+            <a:off x="1691640" y="2093976"/>
+            <a:ext cx="6675120" cy="274320"/>
           </a:xfrm>
           <a:prstGeom prst="rect">
             <a:avLst/>
@@ -3828,14 +3895,14 @@
       </p:sp>
       <p:sp>
         <p:nvSpPr>
-          <p:cNvPr id="16" name="Text 14"/>
-          <p:cNvSpPr/>
-          <p:nvPr/>
-        </p:nvSpPr>
-        <p:spPr>
-          <a:xfrm>
-            <a:off x="1645920" y="2395728"/>
-            <a:ext cx="6766560" cy="256032"/>
+          <p:cNvPr id="15" name="Text 13"/>
+          <p:cNvSpPr/>
+          <p:nvPr/>
+        </p:nvSpPr>
+        <p:spPr>
+          <a:xfrm>
+            <a:off x="1691640" y="2386584"/>
+            <a:ext cx="6675120" cy="256032"/>
           </a:xfrm>
           <a:prstGeom prst="rect">
             <a:avLst/>
@@ -3853,13 +3920,13 @@
             <a:r>
               <a:rPr lang="en-US" sz="1300" dirty="0">
                 <a:solidFill>
-                  <a:srgbClr val="5A6F76"/>
-                </a:solidFill>
-                <a:latin typeface="Calibri" pitchFamily="34" charset="0"/>
-                <a:ea typeface="Calibri" pitchFamily="34" charset="-122"/>
-                <a:cs typeface="Calibri" pitchFamily="34" charset="-120"/>
-              </a:rPr>
-              <a:t>选中页面元素与 AI 对话，支持原生全量与工程增量修改</a:t>
+                  <a:srgbClr val="3D555C"/>
+                </a:solidFill>
+                <a:latin typeface="Calibri" pitchFamily="34" charset="0"/>
+                <a:ea typeface="Calibri" pitchFamily="34" charset="-122"/>
+                <a:cs typeface="Calibri" pitchFamily="34" charset="-120"/>
+              </a:rPr>
+              <a:t>选中页面元素与 AI 对话，支持全量修改与工程增量修改</a:t>
             </a:r>
             <a:endParaRPr lang="en-US" sz="1300" dirty="0"/>
           </a:p>
@@ -3867,18 +3934,18 @@
       </p:sp>
       <p:sp>
         <p:nvSpPr>
-          <p:cNvPr id="17" name="Shape 15"/>
+          <p:cNvPr id="16" name="Shape 14"/>
           <p:cNvSpPr/>
           <p:nvPr/>
         </p:nvSpPr>
         <p:spPr>
           <a:xfrm>
             <a:off x="457200" y="2834640"/>
-            <a:ext cx="8229600" cy="713232"/>
+            <a:ext cx="8229600" cy="749808"/>
           </a:xfrm>
           <a:prstGeom prst="roundRect">
             <a:avLst>
-              <a:gd name="adj" fmla="val 10256"/>
+              <a:gd name="adj" fmla="val 9756"/>
             </a:avLst>
           </a:prstGeom>
           <a:solidFill>
@@ -3889,13 +3956,13 @@
       </p:sp>
       <p:sp>
         <p:nvSpPr>
-          <p:cNvPr id="18" name="Shape 16"/>
-          <p:cNvSpPr/>
-          <p:nvPr/>
-        </p:nvSpPr>
-        <p:spPr>
-          <a:xfrm>
-            <a:off x="594360" y="2962656"/>
+          <p:cNvPr id="17" name="Shape 15"/>
+          <p:cNvSpPr/>
+          <p:nvPr/>
+        </p:nvSpPr>
+        <p:spPr>
+          <a:xfrm>
+            <a:off x="640080" y="2980944"/>
             <a:ext cx="822960" cy="457200"/>
           </a:xfrm>
           <a:prstGeom prst="roundRect">
@@ -3911,13 +3978,13 @@
       </p:sp>
       <p:sp>
         <p:nvSpPr>
-          <p:cNvPr id="19" name="Text 17"/>
-          <p:cNvSpPr/>
-          <p:nvPr/>
-        </p:nvSpPr>
-        <p:spPr>
-          <a:xfrm>
-            <a:off x="594360" y="3017520"/>
+          <p:cNvPr id="18" name="Text 16"/>
+          <p:cNvSpPr/>
+          <p:nvPr/>
+        </p:nvSpPr>
+        <p:spPr>
+          <a:xfrm>
+            <a:off x="640080" y="3035808"/>
             <a:ext cx="822960" cy="365760"/>
           </a:xfrm>
           <a:prstGeom prst="rect">
@@ -3950,14 +4017,14 @@
       </p:sp>
       <p:sp>
         <p:nvSpPr>
-          <p:cNvPr id="20" name="Text 18"/>
-          <p:cNvSpPr/>
-          <p:nvPr/>
-        </p:nvSpPr>
-        <p:spPr>
-          <a:xfrm>
-            <a:off x="1645920" y="2944368"/>
-            <a:ext cx="6766560" cy="274320"/>
+          <p:cNvPr id="19" name="Text 17"/>
+          <p:cNvSpPr/>
+          <p:nvPr/>
+        </p:nvSpPr>
+        <p:spPr>
+          <a:xfrm>
+            <a:off x="1691640" y="2962656"/>
+            <a:ext cx="6675120" cy="274320"/>
           </a:xfrm>
           <a:prstGeom prst="rect">
             <a:avLst/>
@@ -3989,14 +4056,14 @@
       </p:sp>
       <p:sp>
         <p:nvSpPr>
-          <p:cNvPr id="21" name="Text 19"/>
-          <p:cNvSpPr/>
-          <p:nvPr/>
-        </p:nvSpPr>
-        <p:spPr>
-          <a:xfrm>
-            <a:off x="1645920" y="3218688"/>
-            <a:ext cx="6766560" cy="256032"/>
+          <p:cNvPr id="20" name="Text 18"/>
+          <p:cNvSpPr/>
+          <p:nvPr/>
+        </p:nvSpPr>
+        <p:spPr>
+          <a:xfrm>
+            <a:off x="1691640" y="3255264"/>
+            <a:ext cx="6675120" cy="256032"/>
           </a:xfrm>
           <a:prstGeom prst="rect">
             <a:avLst/>
@@ -4014,7 +4081,7 @@
             <a:r>
               <a:rPr lang="en-US" sz="1300" dirty="0">
                 <a:solidFill>
-                  <a:srgbClr val="5A6F76"/>
+                  <a:srgbClr val="3D555C"/>
                 </a:solidFill>
                 <a:latin typeface="Calibri" pitchFamily="34" charset="0"/>
                 <a:ea typeface="Calibri" pitchFamily="34" charset="-122"/>
@@ -4028,18 +4095,18 @@
       </p:sp>
       <p:sp>
         <p:nvSpPr>
-          <p:cNvPr id="22" name="Shape 20"/>
-          <p:cNvSpPr/>
-          <p:nvPr/>
-        </p:nvSpPr>
-        <p:spPr>
-          <a:xfrm>
-            <a:off x="457200" y="3657600"/>
-            <a:ext cx="8229600" cy="713232"/>
+          <p:cNvPr id="21" name="Shape 19"/>
+          <p:cNvSpPr/>
+          <p:nvPr/>
+        </p:nvSpPr>
+        <p:spPr>
+          <a:xfrm>
+            <a:off x="457200" y="3703320"/>
+            <a:ext cx="8229600" cy="749808"/>
           </a:xfrm>
           <a:prstGeom prst="roundRect">
             <a:avLst>
-              <a:gd name="adj" fmla="val 10256"/>
+              <a:gd name="adj" fmla="val 9756"/>
             </a:avLst>
           </a:prstGeom>
           <a:solidFill>
@@ -4050,13 +4117,13 @@
       </p:sp>
       <p:sp>
         <p:nvSpPr>
-          <p:cNvPr id="23" name="Shape 21"/>
-          <p:cNvSpPr/>
-          <p:nvPr/>
-        </p:nvSpPr>
-        <p:spPr>
-          <a:xfrm>
-            <a:off x="594360" y="3785616"/>
+          <p:cNvPr id="22" name="Shape 20"/>
+          <p:cNvSpPr/>
+          <p:nvPr/>
+        </p:nvSpPr>
+        <p:spPr>
+          <a:xfrm>
+            <a:off x="640080" y="3849624"/>
             <a:ext cx="822960" cy="457200"/>
           </a:xfrm>
           <a:prstGeom prst="roundRect">
@@ -4065,20 +4132,20 @@
             </a:avLst>
           </a:prstGeom>
           <a:solidFill>
-            <a:srgbClr val="00A896"/>
-          </a:solidFill>
-          <a:ln/>
-        </p:spPr>
-      </p:sp>
-      <p:sp>
-        <p:nvSpPr>
-          <p:cNvPr id="24" name="Text 22"/>
-          <p:cNvSpPr/>
-          <p:nvPr/>
-        </p:nvSpPr>
-        <p:spPr>
-          <a:xfrm>
-            <a:off x="594360" y="3840480"/>
+            <a:srgbClr val="028090"/>
+          </a:solidFill>
+          <a:ln/>
+        </p:spPr>
+      </p:sp>
+      <p:sp>
+        <p:nvSpPr>
+          <p:cNvPr id="23" name="Text 21"/>
+          <p:cNvSpPr/>
+          <p:nvPr/>
+        </p:nvSpPr>
+        <p:spPr>
+          <a:xfrm>
+            <a:off x="640080" y="3904488"/>
             <a:ext cx="822960" cy="365760"/>
           </a:xfrm>
           <a:prstGeom prst="rect">
@@ -4111,14 +4178,14 @@
       </p:sp>
       <p:sp>
         <p:nvSpPr>
-          <p:cNvPr id="25" name="Text 23"/>
-          <p:cNvSpPr/>
-          <p:nvPr/>
-        </p:nvSpPr>
-        <p:spPr>
-          <a:xfrm>
-            <a:off x="1645920" y="3767328"/>
-            <a:ext cx="6766560" cy="274320"/>
+          <p:cNvPr id="24" name="Text 22"/>
+          <p:cNvSpPr/>
+          <p:nvPr/>
+        </p:nvSpPr>
+        <p:spPr>
+          <a:xfrm>
+            <a:off x="1691640" y="3831336"/>
+            <a:ext cx="6675120" cy="274320"/>
           </a:xfrm>
           <a:prstGeom prst="rect">
             <a:avLst/>
@@ -4150,40 +4217,79 @@
       </p:sp>
       <p:sp>
         <p:nvSpPr>
+          <p:cNvPr id="25" name="Text 23"/>
+          <p:cNvSpPr/>
+          <p:nvPr/>
+        </p:nvSpPr>
+        <p:spPr>
+          <a:xfrm>
+            <a:off x="1691640" y="4123944"/>
+            <a:ext cx="6675120" cy="256032"/>
+          </a:xfrm>
+          <a:prstGeom prst="rect">
+            <a:avLst/>
+          </a:prstGeom>
+          <a:noFill/>
+          <a:ln/>
+        </p:spPr>
+        <p:txBody>
+          <a:bodyPr wrap="square" lIns="0" tIns="0" rIns="0" bIns="0" rtlCol="0" anchor="ctr"/>
+          <a:lstStyle/>
+          <a:p>
+            <a:pPr indent="0" marL="0">
+              <a:buNone/>
+            </a:pPr>
+            <a:r>
+              <a:rPr lang="en-US" sz="1300" dirty="0">
+                <a:solidFill>
+                  <a:srgbClr val="3D555C"/>
+                </a:solidFill>
+                <a:latin typeface="Calibri" pitchFamily="34" charset="0"/>
+                <a:ea typeface="Calibri" pitchFamily="34" charset="-122"/>
+                <a:cs typeface="Calibri" pitchFamily="34" charset="-120"/>
+              </a:rPr>
+              <a:t>用户与应用管理、精选案例、AI 与系统监控看板</a:t>
+            </a:r>
+            <a:endParaRPr lang="en-US" sz="1300" dirty="0"/>
+          </a:p>
+        </p:txBody>
+      </p:sp>
+      <p:sp>
+        <p:nvSpPr>
           <p:cNvPr id="26" name="Text 24"/>
           <p:cNvSpPr/>
           <p:nvPr/>
         </p:nvSpPr>
         <p:spPr>
           <a:xfrm>
-            <a:off x="1645920" y="4041648"/>
-            <a:ext cx="6766560" cy="256032"/>
-          </a:xfrm>
-          <a:prstGeom prst="rect">
-            <a:avLst/>
-          </a:prstGeom>
-          <a:noFill/>
-          <a:ln/>
-        </p:spPr>
-        <p:txBody>
-          <a:bodyPr wrap="square" lIns="0" tIns="0" rIns="0" bIns="0" rtlCol="0" anchor="ctr"/>
-          <a:lstStyle/>
-          <a:p>
-            <a:pPr indent="0" marL="0">
-              <a:buNone/>
-            </a:pPr>
-            <a:r>
-              <a:rPr lang="en-US" sz="1300" dirty="0">
-                <a:solidFill>
-                  <a:srgbClr val="5A6F76"/>
-                </a:solidFill>
-                <a:latin typeface="Calibri" pitchFamily="34" charset="0"/>
-                <a:ea typeface="Calibri" pitchFamily="34" charset="-122"/>
-                <a:cs typeface="Calibri" pitchFamily="34" charset="-120"/>
-              </a:rPr>
-              <a:t>用户/应用管理、精选案例、AI 与系统监控看板</a:t>
-            </a:r>
-            <a:endParaRPr lang="en-US" sz="1300" dirty="0"/>
+            <a:off x="457200" y="4800600"/>
+            <a:ext cx="6858000" cy="256032"/>
+          </a:xfrm>
+          <a:prstGeom prst="rect">
+            <a:avLst/>
+          </a:prstGeom>
+          <a:noFill/>
+          <a:ln/>
+        </p:spPr>
+        <p:txBody>
+          <a:bodyPr wrap="square" lIns="0" tIns="0" rIns="0" bIns="0" rtlCol="0" anchor="ctr"/>
+          <a:lstStyle/>
+          <a:p>
+            <a:pPr indent="0" marL="0">
+              <a:buNone/>
+            </a:pPr>
+            <a:r>
+              <a:rPr lang="en-US" sz="1000" dirty="0">
+                <a:solidFill>
+                  <a:srgbClr val="3D555C"/>
+                </a:solidFill>
+                <a:latin typeface="Calibri" pitchFamily="34" charset="0"/>
+                <a:ea typeface="Calibri" pitchFamily="34" charset="-122"/>
+                <a:cs typeface="Calibri" pitchFamily="34" charset="-120"/>
+              </a:rPr>
+              <a:t>yu-ai-code-mother  ·  每日状态  ·  2026-07-30</a:t>
+            </a:r>
+            <a:endParaRPr lang="en-US" sz="1000" dirty="0"/>
           </a:p>
         </p:txBody>
       </p:sp>
@@ -4195,65 +4301,26 @@
         </p:nvSpPr>
         <p:spPr>
           <a:xfrm>
-            <a:off x="457200" y="4828032"/>
-            <a:ext cx="6858000" cy="256032"/>
-          </a:xfrm>
-          <a:prstGeom prst="rect">
-            <a:avLst/>
-          </a:prstGeom>
-          <a:noFill/>
-          <a:ln/>
-        </p:spPr>
-        <p:txBody>
-          <a:bodyPr wrap="square" lIns="0" tIns="0" rIns="0" bIns="0" rtlCol="0" anchor="ctr"/>
-          <a:lstStyle/>
-          <a:p>
-            <a:pPr indent="0" marL="0">
+            <a:off x="7772400" y="4800600"/>
+            <a:ext cx="914400" cy="256032"/>
+          </a:xfrm>
+          <a:prstGeom prst="rect">
+            <a:avLst/>
+          </a:prstGeom>
+          <a:noFill/>
+          <a:ln/>
+        </p:spPr>
+        <p:txBody>
+          <a:bodyPr wrap="square" lIns="0" tIns="0" rIns="0" bIns="0" rtlCol="0" anchor="ctr"/>
+          <a:lstStyle/>
+          <a:p>
+            <a:pPr algn="r" indent="0" marL="0">
               <a:buNone/>
             </a:pPr>
             <a:r>
               <a:rPr lang="en-US" sz="1000" dirty="0">
                 <a:solidFill>
-                  <a:srgbClr val="5A6F76"/>
-                </a:solidFill>
-                <a:latin typeface="Calibri" pitchFamily="34" charset="0"/>
-                <a:ea typeface="Calibri" pitchFamily="34" charset="-122"/>
-                <a:cs typeface="Calibri" pitchFamily="34" charset="-120"/>
-              </a:rPr>
-              <a:t>yu-ai-code-mother  ·  每日状态  ·  2026-07-30</a:t>
-            </a:r>
-            <a:endParaRPr lang="en-US" sz="1000" dirty="0"/>
-          </a:p>
-        </p:txBody>
-      </p:sp>
-      <p:sp>
-        <p:nvSpPr>
-          <p:cNvPr id="28" name="Text 26"/>
-          <p:cNvSpPr/>
-          <p:nvPr/>
-        </p:nvSpPr>
-        <p:spPr>
-          <a:xfrm>
-            <a:off x="7772400" y="4828032"/>
-            <a:ext cx="914400" cy="256032"/>
-          </a:xfrm>
-          <a:prstGeom prst="rect">
-            <a:avLst/>
-          </a:prstGeom>
-          <a:noFill/>
-          <a:ln/>
-        </p:spPr>
-        <p:txBody>
-          <a:bodyPr wrap="square" lIns="0" tIns="0" rIns="0" bIns="0" rtlCol="0" anchor="ctr"/>
-          <a:lstStyle/>
-          <a:p>
-            <a:pPr algn="r" indent="0" marL="0">
-              <a:buNone/>
-            </a:pPr>
-            <a:r>
-              <a:rPr lang="en-US" sz="1000" dirty="0">
-                <a:solidFill>
-                  <a:srgbClr val="5A6F76"/>
+                  <a:srgbClr val="3D555C"/>
                 </a:solidFill>
                 <a:latin typeface="Calibri" pitchFamily="34" charset="0"/>
                 <a:ea typeface="Calibri" pitchFamily="34" charset="-122"/>
@@ -4324,7 +4391,7 @@
         <p:spPr>
           <a:xfrm>
             <a:off x="0" y="0"/>
-            <a:ext cx="9144000" cy="109728"/>
+            <a:ext cx="9144000" cy="91440"/>
           </a:xfrm>
           <a:prstGeom prst="rect">
             <a:avLst/>
@@ -4342,39 +4409,14 @@
       </p:sp>
       <p:sp>
         <p:nvSpPr>
-          <p:cNvPr id="4" name="Shape 2"/>
-          <p:cNvSpPr/>
-          <p:nvPr/>
-        </p:nvSpPr>
-        <p:spPr>
-          <a:xfrm>
-            <a:off x="0" y="109728"/>
-            <a:ext cx="109728" cy="5033772"/>
-          </a:xfrm>
-          <a:prstGeom prst="rect">
-            <a:avLst/>
-          </a:prstGeom>
-          <a:solidFill>
-            <a:srgbClr val="00A896"/>
-          </a:solidFill>
-          <a:ln w="12700">
-            <a:solidFill>
-              <a:srgbClr val="00A896"/>
-            </a:solidFill>
-            <a:prstDash val="solid"/>
-          </a:ln>
-        </p:spPr>
-      </p:sp>
-      <p:sp>
-        <p:nvSpPr>
-          <p:cNvPr id="5" name="Text 3"/>
+          <p:cNvPr id="4" name="Text 2"/>
           <p:cNvSpPr/>
           <p:nvPr/>
         </p:nvSpPr>
         <p:spPr>
           <a:xfrm>
             <a:off x="457200" y="256032"/>
-            <a:ext cx="8229600" cy="502920"/>
+            <a:ext cx="8229600" cy="457200"/>
           </a:xfrm>
           <a:prstGeom prst="rect">
             <a:avLst/>
@@ -4406,14 +4448,14 @@
       </p:sp>
       <p:sp>
         <p:nvSpPr>
-          <p:cNvPr id="6" name="Text 4"/>
-          <p:cNvSpPr/>
-          <p:nvPr/>
-        </p:nvSpPr>
-        <p:spPr>
-          <a:xfrm>
-            <a:off x="457200" y="749808"/>
-            <a:ext cx="8229600" cy="292608"/>
+          <p:cNvPr id="5" name="Text 3"/>
+          <p:cNvSpPr/>
+          <p:nvPr/>
+        </p:nvSpPr>
+        <p:spPr>
+          <a:xfrm>
+            <a:off x="457200" y="713232"/>
+            <a:ext cx="8229600" cy="274320"/>
           </a:xfrm>
           <a:prstGeom prst="rect">
             <a:avLst/>
@@ -4431,7 +4473,7 @@
             <a:r>
               <a:rPr lang="en-US" sz="1300" i="1" dirty="0">
                 <a:solidFill>
-                  <a:srgbClr val="5A6F76"/>
+                  <a:srgbClr val="3D555C"/>
                 </a:solidFill>
                 <a:latin typeface="Calibri" pitchFamily="34" charset="0"/>
                 <a:ea typeface="Calibri" pitchFamily="34" charset="-122"/>
@@ -4445,18 +4487,18 @@
       </p:sp>
       <p:sp>
         <p:nvSpPr>
-          <p:cNvPr id="7" name="Shape 5"/>
-          <p:cNvSpPr/>
-          <p:nvPr/>
-        </p:nvSpPr>
-        <p:spPr>
-          <a:xfrm>
-            <a:off x="457200" y="1188720"/>
-            <a:ext cx="2926080" cy="3291840"/>
+          <p:cNvPr id="6" name="Shape 4"/>
+          <p:cNvSpPr/>
+          <p:nvPr/>
+        </p:nvSpPr>
+        <p:spPr>
+          <a:xfrm>
+            <a:off x="457200" y="1097280"/>
+            <a:ext cx="2880360" cy="3383280"/>
           </a:xfrm>
           <a:prstGeom prst="roundRect">
             <a:avLst>
-              <a:gd name="adj" fmla="val 3750"/>
+              <a:gd name="adj" fmla="val 3810"/>
             </a:avLst>
           </a:prstGeom>
           <a:solidFill>
@@ -4467,52 +4509,52 @@
       </p:sp>
       <p:sp>
         <p:nvSpPr>
+          <p:cNvPr id="7" name="Text 5"/>
+          <p:cNvSpPr/>
+          <p:nvPr/>
+        </p:nvSpPr>
+        <p:spPr>
+          <a:xfrm>
+            <a:off x="685800" y="1371600"/>
+            <a:ext cx="2468880" cy="320040"/>
+          </a:xfrm>
+          <a:prstGeom prst="rect">
+            <a:avLst/>
+          </a:prstGeom>
+          <a:noFill/>
+          <a:ln/>
+        </p:spPr>
+        <p:txBody>
+          <a:bodyPr wrap="square" lIns="0" tIns="0" rIns="0" bIns="0" rtlCol="0" anchor="ctr"/>
+          <a:lstStyle/>
+          <a:p>
+            <a:pPr indent="0" marL="0">
+              <a:buNone/>
+            </a:pPr>
+            <a:r>
+              <a:rPr lang="en-US" sz="1400" dirty="0">
+                <a:solidFill>
+                  <a:srgbClr val="02C39A"/>
+                </a:solidFill>
+                <a:latin typeface="Calibri" pitchFamily="34" charset="0"/>
+                <a:ea typeface="Calibri" pitchFamily="34" charset="-122"/>
+                <a:cs typeface="Calibri" pitchFamily="34" charset="-120"/>
+              </a:rPr>
+              <a:t>近 7 日</a:t>
+            </a:r>
+            <a:endParaRPr lang="en-US" sz="1400" dirty="0"/>
+          </a:p>
+        </p:txBody>
+      </p:sp>
+      <p:sp>
+        <p:nvSpPr>
           <p:cNvPr id="8" name="Text 6"/>
           <p:cNvSpPr/>
           <p:nvPr/>
         </p:nvSpPr>
         <p:spPr>
           <a:xfrm>
-            <a:off x="685800" y="1463040"/>
-            <a:ext cx="2468880" cy="320040"/>
-          </a:xfrm>
-          <a:prstGeom prst="rect">
-            <a:avLst/>
-          </a:prstGeom>
-          <a:noFill/>
-          <a:ln/>
-        </p:spPr>
-        <p:txBody>
-          <a:bodyPr wrap="square" lIns="0" tIns="0" rIns="0" bIns="0" rtlCol="0" anchor="ctr"/>
-          <a:lstStyle/>
-          <a:p>
-            <a:pPr indent="0" marL="0">
-              <a:buNone/>
-            </a:pPr>
-            <a:r>
-              <a:rPr lang="en-US" sz="1400" dirty="0">
-                <a:solidFill>
-                  <a:srgbClr val="02C39A"/>
-                </a:solidFill>
-                <a:latin typeface="Calibri" pitchFamily="34" charset="0"/>
-                <a:ea typeface="Calibri" pitchFamily="34" charset="-122"/>
-                <a:cs typeface="Calibri" pitchFamily="34" charset="-120"/>
-              </a:rPr>
-              <a:t>近 7 日</a:t>
-            </a:r>
-            <a:endParaRPr lang="en-US" sz="1400" dirty="0"/>
-          </a:p>
-        </p:txBody>
-      </p:sp>
-      <p:sp>
-        <p:nvSpPr>
-          <p:cNvPr id="9" name="Text 7"/>
-          <p:cNvSpPr/>
-          <p:nvPr/>
-        </p:nvSpPr>
-        <p:spPr>
-          <a:xfrm>
-            <a:off x="685800" y="1920240"/>
+            <a:off x="685800" y="1828800"/>
             <a:ext cx="2468880" cy="822960"/>
           </a:xfrm>
           <a:prstGeom prst="rect">
@@ -4545,46 +4587,46 @@
       </p:sp>
       <p:sp>
         <p:nvSpPr>
+          <p:cNvPr id="9" name="Text 7"/>
+          <p:cNvSpPr/>
+          <p:nvPr/>
+        </p:nvSpPr>
+        <p:spPr>
+          <a:xfrm>
+            <a:off x="685800" y="2697480"/>
+            <a:ext cx="2468880" cy="320040"/>
+          </a:xfrm>
+          <a:prstGeom prst="rect">
+            <a:avLst/>
+          </a:prstGeom>
+          <a:noFill/>
+          <a:ln/>
+        </p:spPr>
+        <p:txBody>
+          <a:bodyPr wrap="square" lIns="0" tIns="0" rIns="0" bIns="0" rtlCol="0" anchor="ctr"/>
+          <a:lstStyle/>
+          <a:p>
+            <a:pPr indent="0" marL="0">
+              <a:buNone/>
+            </a:pPr>
+            <a:r>
+              <a:rPr lang="en-US" sz="1600" dirty="0">
+                <a:solidFill>
+                  <a:srgbClr val="D4EEF0"/>
+                </a:solidFill>
+                <a:latin typeface="Calibri" pitchFamily="34" charset="0"/>
+                <a:ea typeface="Calibri" pitchFamily="34" charset="-122"/>
+                <a:cs typeface="Calibri" pitchFamily="34" charset="-120"/>
+              </a:rPr>
+              <a:t>业务代码提交</a:t>
+            </a:r>
+            <a:endParaRPr lang="en-US" sz="1600" dirty="0"/>
+          </a:p>
+        </p:txBody>
+      </p:sp>
+      <p:sp>
+        <p:nvSpPr>
           <p:cNvPr id="10" name="Text 8"/>
-          <p:cNvSpPr/>
-          <p:nvPr/>
-        </p:nvSpPr>
-        <p:spPr>
-          <a:xfrm>
-            <a:off x="685800" y="2788920"/>
-            <a:ext cx="2468880" cy="320040"/>
-          </a:xfrm>
-          <a:prstGeom prst="rect">
-            <a:avLst/>
-          </a:prstGeom>
-          <a:noFill/>
-          <a:ln/>
-        </p:spPr>
-        <p:txBody>
-          <a:bodyPr wrap="square" lIns="0" tIns="0" rIns="0" bIns="0" rtlCol="0" anchor="ctr"/>
-          <a:lstStyle/>
-          <a:p>
-            <a:pPr indent="0" marL="0">
-              <a:buNone/>
-            </a:pPr>
-            <a:r>
-              <a:rPr lang="en-US" sz="1600" dirty="0">
-                <a:solidFill>
-                  <a:srgbClr val="00A896"/>
-                </a:solidFill>
-                <a:latin typeface="Calibri" pitchFamily="34" charset="0"/>
-                <a:ea typeface="Calibri" pitchFamily="34" charset="-122"/>
-                <a:cs typeface="Calibri" pitchFamily="34" charset="-120"/>
-              </a:rPr>
-              <a:t>业务代码提交</a:t>
-            </a:r>
-            <a:endParaRPr lang="en-US" sz="1600" dirty="0"/>
-          </a:p>
-        </p:txBody>
-      </p:sp>
-      <p:sp>
-        <p:nvSpPr>
-          <p:cNvPr id="11" name="Text 9"/>
           <p:cNvSpPr/>
           <p:nvPr/>
         </p:nvSpPr>
@@ -4609,7 +4651,7 @@
             <a:r>
               <a:rPr lang="en-US" sz="1200" dirty="0">
                 <a:solidFill>
-                  <a:srgbClr val="A8C5C9"/>
+                  <a:srgbClr val="D4EEF0"/>
                 </a:solidFill>
                 <a:latin typeface="Calibri" pitchFamily="34" charset="0"/>
                 <a:ea typeface="Calibri" pitchFamily="34" charset="-122"/>
@@ -4626,13 +4668,13 @@
             <a:r>
               <a:rPr lang="en-US" sz="1200" dirty="0">
                 <a:solidFill>
-                  <a:srgbClr val="A8C5C9"/>
-                </a:solidFill>
-                <a:latin typeface="Calibri" pitchFamily="34" charset="0"/>
-                <a:ea typeface="Calibri" pitchFamily="34" charset="-122"/>
-                <a:cs typeface="Calibri" pitchFamily="34" charset="-120"/>
-              </a:rPr>
-              <a:t>教程第 14 期微服务改造完成态</a:t>
+                  <a:srgbClr val="D4EEF0"/>
+                </a:solidFill>
+                <a:latin typeface="Calibri" pitchFamily="34" charset="0"/>
+                <a:ea typeface="Calibri" pitchFamily="34" charset="-122"/>
+                <a:cs typeface="Calibri" pitchFamily="34" charset="-120"/>
+              </a:rPr>
+              <a:t>教程第 14 期微服务完成态</a:t>
             </a:r>
             <a:endParaRPr lang="en-US" sz="1200" dirty="0"/>
           </a:p>
@@ -4643,13 +4685,13 @@
             <a:r>
               <a:rPr lang="en-US" sz="1200" dirty="0">
                 <a:solidFill>
-                  <a:srgbClr val="A8C5C9"/>
-                </a:solidFill>
-                <a:latin typeface="Calibri" pitchFamily="34" charset="0"/>
-                <a:ea typeface="Calibri" pitchFamily="34" charset="-122"/>
-                <a:cs typeface="Calibri" pitchFamily="34" charset="-120"/>
-              </a:rPr>
-              <a:t>（HEAD: 893918c）</a:t>
+                  <a:srgbClr val="D4EEF0"/>
+                </a:solidFill>
+                <a:latin typeface="Calibri" pitchFamily="34" charset="0"/>
+                <a:ea typeface="Calibri" pitchFamily="34" charset="-122"/>
+                <a:cs typeface="Calibri" pitchFamily="34" charset="-120"/>
+              </a:rPr>
+              <a:t>HEAD：893918c</a:t>
             </a:r>
             <a:endParaRPr lang="en-US" sz="1200" dirty="0"/>
           </a:p>
@@ -4657,18 +4699,18 @@
       </p:sp>
       <p:sp>
         <p:nvSpPr>
-          <p:cNvPr id="12" name="Shape 10"/>
-          <p:cNvSpPr/>
-          <p:nvPr/>
-        </p:nvSpPr>
-        <p:spPr>
-          <a:xfrm>
-            <a:off x="3657600" y="1188720"/>
-            <a:ext cx="5029200" cy="731520"/>
+          <p:cNvPr id="11" name="Shape 9"/>
+          <p:cNvSpPr/>
+          <p:nvPr/>
+        </p:nvSpPr>
+        <p:spPr>
+          <a:xfrm>
+            <a:off x="3611880" y="1097280"/>
+            <a:ext cx="5074920" cy="749808"/>
           </a:xfrm>
           <a:prstGeom prst="roundRect">
             <a:avLst>
-              <a:gd name="adj" fmla="val 10000"/>
+              <a:gd name="adj" fmla="val 9756"/>
             </a:avLst>
           </a:prstGeom>
           <a:solidFill>
@@ -4679,14 +4721,14 @@
       </p:sp>
       <p:sp>
         <p:nvSpPr>
-          <p:cNvPr id="13" name="Shape 11"/>
-          <p:cNvSpPr/>
-          <p:nvPr/>
-        </p:nvSpPr>
-        <p:spPr>
-          <a:xfrm>
-            <a:off x="3794760" y="1353312"/>
-            <a:ext cx="777240" cy="402336"/>
+          <p:cNvPr id="12" name="Shape 10"/>
+          <p:cNvSpPr/>
+          <p:nvPr/>
+        </p:nvSpPr>
+        <p:spPr>
+          <a:xfrm>
+            <a:off x="3749040" y="1271016"/>
+            <a:ext cx="822960" cy="402336"/>
           </a:xfrm>
           <a:prstGeom prst="roundRect">
             <a:avLst>
@@ -4701,52 +4743,52 @@
       </p:sp>
       <p:sp>
         <p:nvSpPr>
+          <p:cNvPr id="13" name="Text 11"/>
+          <p:cNvSpPr/>
+          <p:nvPr/>
+        </p:nvSpPr>
+        <p:spPr>
+          <a:xfrm>
+            <a:off x="3749040" y="1335024"/>
+            <a:ext cx="822960" cy="274320"/>
+          </a:xfrm>
+          <a:prstGeom prst="rect">
+            <a:avLst/>
+          </a:prstGeom>
+          <a:noFill/>
+          <a:ln/>
+        </p:spPr>
+        <p:txBody>
+          <a:bodyPr wrap="square" lIns="0" tIns="0" rIns="0" bIns="0" rtlCol="0" anchor="ctr"/>
+          <a:lstStyle/>
+          <a:p>
+            <a:pPr algn="ctr" indent="0" marL="0">
+              <a:buNone/>
+            </a:pPr>
+            <a:r>
+              <a:rPr lang="en-US" sz="1100" b="1" dirty="0">
+                <a:solidFill>
+                  <a:srgbClr val="028090"/>
+                </a:solidFill>
+                <a:latin typeface="Calibri" pitchFamily="34" charset="0"/>
+                <a:ea typeface="Calibri" pitchFamily="34" charset="-122"/>
+                <a:cs typeface="Calibri" pitchFamily="34" charset="-120"/>
+              </a:rPr>
+              <a:t>昨日</a:t>
+            </a:r>
+            <a:endParaRPr lang="en-US" sz="1100" dirty="0"/>
+          </a:p>
+        </p:txBody>
+      </p:sp>
+      <p:sp>
+        <p:nvSpPr>
           <p:cNvPr id="14" name="Text 12"/>
           <p:cNvSpPr/>
           <p:nvPr/>
         </p:nvSpPr>
         <p:spPr>
           <a:xfrm>
-            <a:off x="3794760" y="1417320"/>
-            <a:ext cx="777240" cy="274320"/>
-          </a:xfrm>
-          <a:prstGeom prst="rect">
-            <a:avLst/>
-          </a:prstGeom>
-          <a:noFill/>
-          <a:ln/>
-        </p:spPr>
-        <p:txBody>
-          <a:bodyPr wrap="square" lIns="0" tIns="0" rIns="0" bIns="0" rtlCol="0" anchor="ctr"/>
-          <a:lstStyle/>
-          <a:p>
-            <a:pPr algn="ctr" indent="0" marL="0">
-              <a:buNone/>
-            </a:pPr>
-            <a:r>
-              <a:rPr lang="en-US" sz="1100" b="1" dirty="0">
-                <a:solidFill>
-                  <a:srgbClr val="028090"/>
-                </a:solidFill>
-                <a:latin typeface="Calibri" pitchFamily="34" charset="0"/>
-                <a:ea typeface="Calibri" pitchFamily="34" charset="-122"/>
-                <a:cs typeface="Calibri" pitchFamily="34" charset="-120"/>
-              </a:rPr>
-              <a:t>昨日</a:t>
-            </a:r>
-            <a:endParaRPr lang="en-US" sz="1100" dirty="0"/>
-          </a:p>
-        </p:txBody>
-      </p:sp>
-      <p:sp>
-        <p:nvSpPr>
-          <p:cNvPr id="15" name="Text 13"/>
-          <p:cNvSpPr/>
-          <p:nvPr/>
-        </p:nvSpPr>
-        <p:spPr>
-          <a:xfrm>
-            <a:off x="4754880" y="1280160"/>
+            <a:off x="4754880" y="1207008"/>
             <a:ext cx="3749040" cy="274320"/>
           </a:xfrm>
           <a:prstGeom prst="rect">
@@ -4779,13 +4821,13 @@
       </p:sp>
       <p:sp>
         <p:nvSpPr>
-          <p:cNvPr id="16" name="Text 14"/>
-          <p:cNvSpPr/>
-          <p:nvPr/>
-        </p:nvSpPr>
-        <p:spPr>
-          <a:xfrm>
-            <a:off x="4754880" y="1572768"/>
+          <p:cNvPr id="15" name="Text 13"/>
+          <p:cNvSpPr/>
+          <p:nvPr/>
+        </p:nvSpPr>
+        <p:spPr>
+          <a:xfrm>
+            <a:off x="4754880" y="1499616"/>
             <a:ext cx="3749040" cy="256032"/>
           </a:xfrm>
           <a:prstGeom prst="rect">
@@ -4804,7 +4846,7 @@
             <a:r>
               <a:rPr lang="en-US" sz="1200" dirty="0">
                 <a:solidFill>
-                  <a:srgbClr val="5A6F76"/>
+                  <a:srgbClr val="3D555C"/>
                 </a:solidFill>
                 <a:latin typeface="Calibri" pitchFamily="34" charset="0"/>
                 <a:ea typeface="Calibri" pitchFamily="34" charset="-122"/>
@@ -4818,18 +4860,18 @@
       </p:sp>
       <p:sp>
         <p:nvSpPr>
-          <p:cNvPr id="17" name="Shape 15"/>
-          <p:cNvSpPr/>
-          <p:nvPr/>
-        </p:nvSpPr>
-        <p:spPr>
-          <a:xfrm>
-            <a:off x="3657600" y="2011680"/>
-            <a:ext cx="5029200" cy="731520"/>
+          <p:cNvPr id="16" name="Shape 14"/>
+          <p:cNvSpPr/>
+          <p:nvPr/>
+        </p:nvSpPr>
+        <p:spPr>
+          <a:xfrm>
+            <a:off x="3611880" y="1965960"/>
+            <a:ext cx="5074920" cy="749808"/>
           </a:xfrm>
           <a:prstGeom prst="roundRect">
             <a:avLst>
-              <a:gd name="adj" fmla="val 10000"/>
+              <a:gd name="adj" fmla="val 9756"/>
             </a:avLst>
           </a:prstGeom>
           <a:solidFill>
@@ -4840,14 +4882,14 @@
       </p:sp>
       <p:sp>
         <p:nvSpPr>
-          <p:cNvPr id="18" name="Shape 16"/>
-          <p:cNvSpPr/>
-          <p:nvPr/>
-        </p:nvSpPr>
-        <p:spPr>
-          <a:xfrm>
-            <a:off x="3794760" y="2176272"/>
-            <a:ext cx="777240" cy="402336"/>
+          <p:cNvPr id="17" name="Shape 15"/>
+          <p:cNvSpPr/>
+          <p:nvPr/>
+        </p:nvSpPr>
+        <p:spPr>
+          <a:xfrm>
+            <a:off x="3749040" y="2139696"/>
+            <a:ext cx="822960" cy="402336"/>
           </a:xfrm>
           <a:prstGeom prst="roundRect">
             <a:avLst>
@@ -4862,52 +4904,52 @@
       </p:sp>
       <p:sp>
         <p:nvSpPr>
+          <p:cNvPr id="18" name="Text 16"/>
+          <p:cNvSpPr/>
+          <p:nvPr/>
+        </p:nvSpPr>
+        <p:spPr>
+          <a:xfrm>
+            <a:off x="3749040" y="2203704"/>
+            <a:ext cx="822960" cy="274320"/>
+          </a:xfrm>
+          <a:prstGeom prst="rect">
+            <a:avLst/>
+          </a:prstGeom>
+          <a:noFill/>
+          <a:ln/>
+        </p:spPr>
+        <p:txBody>
+          <a:bodyPr wrap="square" lIns="0" tIns="0" rIns="0" bIns="0" rtlCol="0" anchor="ctr"/>
+          <a:lstStyle/>
+          <a:p>
+            <a:pPr algn="ctr" indent="0" marL="0">
+              <a:buNone/>
+            </a:pPr>
+            <a:r>
+              <a:rPr lang="en-US" sz="1100" b="1" dirty="0">
+                <a:solidFill>
+                  <a:srgbClr val="028090"/>
+                </a:solidFill>
+                <a:latin typeface="Calibri" pitchFamily="34" charset="0"/>
+                <a:ea typeface="Calibri" pitchFamily="34" charset="-122"/>
+                <a:cs typeface="Calibri" pitchFamily="34" charset="-120"/>
+              </a:rPr>
+              <a:t>07-26</a:t>
+            </a:r>
+            <a:endParaRPr lang="en-US" sz="1100" dirty="0"/>
+          </a:p>
+        </p:txBody>
+      </p:sp>
+      <p:sp>
+        <p:nvSpPr>
           <p:cNvPr id="19" name="Text 17"/>
           <p:cNvSpPr/>
           <p:nvPr/>
         </p:nvSpPr>
         <p:spPr>
           <a:xfrm>
-            <a:off x="3794760" y="2240280"/>
-            <a:ext cx="777240" cy="274320"/>
-          </a:xfrm>
-          <a:prstGeom prst="rect">
-            <a:avLst/>
-          </a:prstGeom>
-          <a:noFill/>
-          <a:ln/>
-        </p:spPr>
-        <p:txBody>
-          <a:bodyPr wrap="square" lIns="0" tIns="0" rIns="0" bIns="0" rtlCol="0" anchor="ctr"/>
-          <a:lstStyle/>
-          <a:p>
-            <a:pPr algn="ctr" indent="0" marL="0">
-              <a:buNone/>
-            </a:pPr>
-            <a:r>
-              <a:rPr lang="en-US" sz="1100" b="1" dirty="0">
-                <a:solidFill>
-                  <a:srgbClr val="028090"/>
-                </a:solidFill>
-                <a:latin typeface="Calibri" pitchFamily="34" charset="0"/>
-                <a:ea typeface="Calibri" pitchFamily="34" charset="-122"/>
-                <a:cs typeface="Calibri" pitchFamily="34" charset="-120"/>
-              </a:rPr>
-              <a:t>07-26</a:t>
-            </a:r>
-            <a:endParaRPr lang="en-US" sz="1100" dirty="0"/>
-          </a:p>
-        </p:txBody>
-      </p:sp>
-      <p:sp>
-        <p:nvSpPr>
-          <p:cNvPr id="20" name="Text 18"/>
-          <p:cNvSpPr/>
-          <p:nvPr/>
-        </p:nvSpPr>
-        <p:spPr>
-          <a:xfrm>
-            <a:off x="4754880" y="2103120"/>
+            <a:off x="4754880" y="2075688"/>
             <a:ext cx="3749040" cy="274320"/>
           </a:xfrm>
           <a:prstGeom prst="rect">
@@ -4940,13 +4982,13 @@
       </p:sp>
       <p:sp>
         <p:nvSpPr>
-          <p:cNvPr id="21" name="Text 19"/>
-          <p:cNvSpPr/>
-          <p:nvPr/>
-        </p:nvSpPr>
-        <p:spPr>
-          <a:xfrm>
-            <a:off x="4754880" y="2395728"/>
+          <p:cNvPr id="20" name="Text 18"/>
+          <p:cNvSpPr/>
+          <p:nvPr/>
+        </p:nvSpPr>
+        <p:spPr>
+          <a:xfrm>
+            <a:off x="4754880" y="2368296"/>
             <a:ext cx="3749040" cy="256032"/>
           </a:xfrm>
           <a:prstGeom prst="rect">
@@ -4965,13 +5007,13 @@
             <a:r>
               <a:rPr lang="en-US" sz="1200" dirty="0">
                 <a:solidFill>
-                  <a:srgbClr val="5A6F76"/>
-                </a:solidFill>
-                <a:latin typeface="Calibri" pitchFamily="34" charset="0"/>
-                <a:ea typeface="Calibri" pitchFamily="34" charset="-122"/>
-                <a:cs typeface="Calibri" pitchFamily="34" charset="-120"/>
-              </a:rPr>
-              <a:t>Issue #65 + PR #66 新增联网搜索工具，待评审</a:t>
+                  <a:srgbClr val="3D555C"/>
+                </a:solidFill>
+                <a:latin typeface="Calibri" pitchFamily="34" charset="0"/>
+                <a:ea typeface="Calibri" pitchFamily="34" charset="-122"/>
+                <a:cs typeface="Calibri" pitchFamily="34" charset="-120"/>
+              </a:rPr>
+              <a:t>Issue #65 与 PR #66 待评审合入</a:t>
             </a:r>
             <a:endParaRPr lang="en-US" sz="1200" dirty="0"/>
           </a:p>
@@ -4979,18 +5021,18 @@
       </p:sp>
       <p:sp>
         <p:nvSpPr>
-          <p:cNvPr id="22" name="Shape 20"/>
-          <p:cNvSpPr/>
-          <p:nvPr/>
-        </p:nvSpPr>
-        <p:spPr>
-          <a:xfrm>
-            <a:off x="3657600" y="2834640"/>
-            <a:ext cx="5029200" cy="731520"/>
+          <p:cNvPr id="21" name="Shape 19"/>
+          <p:cNvSpPr/>
+          <p:nvPr/>
+        </p:nvSpPr>
+        <p:spPr>
+          <a:xfrm>
+            <a:off x="3611880" y="2834640"/>
+            <a:ext cx="5074920" cy="749808"/>
           </a:xfrm>
           <a:prstGeom prst="roundRect">
             <a:avLst>
-              <a:gd name="adj" fmla="val 10000"/>
+              <a:gd name="adj" fmla="val 9756"/>
             </a:avLst>
           </a:prstGeom>
           <a:solidFill>
@@ -5001,14 +5043,14 @@
       </p:sp>
       <p:sp>
         <p:nvSpPr>
-          <p:cNvPr id="23" name="Shape 21"/>
-          <p:cNvSpPr/>
-          <p:nvPr/>
-        </p:nvSpPr>
-        <p:spPr>
-          <a:xfrm>
-            <a:off x="3794760" y="2999232"/>
-            <a:ext cx="777240" cy="402336"/>
+          <p:cNvPr id="22" name="Shape 20"/>
+          <p:cNvSpPr/>
+          <p:nvPr/>
+        </p:nvSpPr>
+        <p:spPr>
+          <a:xfrm>
+            <a:off x="3749040" y="3008376"/>
+            <a:ext cx="822960" cy="402336"/>
           </a:xfrm>
           <a:prstGeom prst="roundRect">
             <a:avLst>
@@ -5023,52 +5065,52 @@
       </p:sp>
       <p:sp>
         <p:nvSpPr>
+          <p:cNvPr id="23" name="Text 21"/>
+          <p:cNvSpPr/>
+          <p:nvPr/>
+        </p:nvSpPr>
+        <p:spPr>
+          <a:xfrm>
+            <a:off x="3749040" y="3072384"/>
+            <a:ext cx="822960" cy="274320"/>
+          </a:xfrm>
+          <a:prstGeom prst="rect">
+            <a:avLst/>
+          </a:prstGeom>
+          <a:noFill/>
+          <a:ln/>
+        </p:spPr>
+        <p:txBody>
+          <a:bodyPr wrap="square" lIns="0" tIns="0" rIns="0" bIns="0" rtlCol="0" anchor="ctr"/>
+          <a:lstStyle/>
+          <a:p>
+            <a:pPr algn="ctr" indent="0" marL="0">
+              <a:buNone/>
+            </a:pPr>
+            <a:r>
+              <a:rPr lang="en-US" sz="1100" b="1" dirty="0">
+                <a:solidFill>
+                  <a:srgbClr val="028090"/>
+                </a:solidFill>
+                <a:latin typeface="Calibri" pitchFamily="34" charset="0"/>
+                <a:ea typeface="Calibri" pitchFamily="34" charset="-122"/>
+                <a:cs typeface="Calibri" pitchFamily="34" charset="-120"/>
+              </a:rPr>
+              <a:t>主线</a:t>
+            </a:r>
+            <a:endParaRPr lang="en-US" sz="1100" dirty="0"/>
+          </a:p>
+        </p:txBody>
+      </p:sp>
+      <p:sp>
+        <p:nvSpPr>
           <p:cNvPr id="24" name="Text 22"/>
           <p:cNvSpPr/>
           <p:nvPr/>
         </p:nvSpPr>
         <p:spPr>
           <a:xfrm>
-            <a:off x="3794760" y="3063240"/>
-            <a:ext cx="777240" cy="274320"/>
-          </a:xfrm>
-          <a:prstGeom prst="rect">
-            <a:avLst/>
-          </a:prstGeom>
-          <a:noFill/>
-          <a:ln/>
-        </p:spPr>
-        <p:txBody>
-          <a:bodyPr wrap="square" lIns="0" tIns="0" rIns="0" bIns="0" rtlCol="0" anchor="ctr"/>
-          <a:lstStyle/>
-          <a:p>
-            <a:pPr algn="ctr" indent="0" marL="0">
-              <a:buNone/>
-            </a:pPr>
-            <a:r>
-              <a:rPr lang="en-US" sz="1100" b="1" dirty="0">
-                <a:solidFill>
-                  <a:srgbClr val="028090"/>
-                </a:solidFill>
-                <a:latin typeface="Calibri" pitchFamily="34" charset="0"/>
-                <a:ea typeface="Calibri" pitchFamily="34" charset="-122"/>
-                <a:cs typeface="Calibri" pitchFamily="34" charset="-120"/>
-              </a:rPr>
-              <a:t>主线</a:t>
-            </a:r>
-            <a:endParaRPr lang="en-US" sz="1100" dirty="0"/>
-          </a:p>
-        </p:txBody>
-      </p:sp>
-      <p:sp>
-        <p:nvSpPr>
-          <p:cNvPr id="25" name="Text 23"/>
-          <p:cNvSpPr/>
-          <p:nvPr/>
-        </p:nvSpPr>
-        <p:spPr>
-          <a:xfrm>
-            <a:off x="4754880" y="2926080"/>
+            <a:off x="4754880" y="2944368"/>
             <a:ext cx="3749040" cy="274320"/>
           </a:xfrm>
           <a:prstGeom prst="rect">
@@ -5101,13 +5143,13 @@
       </p:sp>
       <p:sp>
         <p:nvSpPr>
-          <p:cNvPr id="26" name="Text 24"/>
-          <p:cNvSpPr/>
-          <p:nvPr/>
-        </p:nvSpPr>
-        <p:spPr>
-          <a:xfrm>
-            <a:off x="4754880" y="3218688"/>
+          <p:cNvPr id="25" name="Text 23"/>
+          <p:cNvSpPr/>
+          <p:nvPr/>
+        </p:nvSpPr>
+        <p:spPr>
+          <a:xfrm>
+            <a:off x="4754880" y="3236976"/>
             <a:ext cx="3749040" cy="256032"/>
           </a:xfrm>
           <a:prstGeom prst="rect">
@@ -5126,13 +5168,13 @@
             <a:r>
               <a:rPr lang="en-US" sz="1200" dirty="0">
                 <a:solidFill>
-                  <a:srgbClr val="5A6F76"/>
-                </a:solidFill>
-                <a:latin typeface="Calibri" pitchFamily="34" charset="0"/>
-                <a:ea typeface="Calibri" pitchFamily="34" charset="-122"/>
-                <a:cs typeface="Calibri" pitchFamily="34" charset="-120"/>
-              </a:rPr>
-              <a:t>user / app / ai / screenshot / client / common / model</a:t>
+                  <a:srgbClr val="3D555C"/>
+                </a:solidFill>
+                <a:latin typeface="Calibri" pitchFamily="34" charset="0"/>
+                <a:ea typeface="Calibri" pitchFamily="34" charset="-122"/>
+                <a:cs typeface="Calibri" pitchFamily="34" charset="-120"/>
+              </a:rPr>
+              <a:t>user、app、ai、screenshot、client、common、model</a:t>
             </a:r>
             <a:endParaRPr lang="en-US" sz="1200" dirty="0"/>
           </a:p>
@@ -5140,18 +5182,18 @@
       </p:sp>
       <p:sp>
         <p:nvSpPr>
-          <p:cNvPr id="27" name="Shape 25"/>
-          <p:cNvSpPr/>
-          <p:nvPr/>
-        </p:nvSpPr>
-        <p:spPr>
-          <a:xfrm>
-            <a:off x="3657600" y="3657600"/>
-            <a:ext cx="5029200" cy="731520"/>
+          <p:cNvPr id="26" name="Shape 24"/>
+          <p:cNvSpPr/>
+          <p:nvPr/>
+        </p:nvSpPr>
+        <p:spPr>
+          <a:xfrm>
+            <a:off x="3611880" y="3703320"/>
+            <a:ext cx="5074920" cy="749808"/>
           </a:xfrm>
           <a:prstGeom prst="roundRect">
             <a:avLst>
-              <a:gd name="adj" fmla="val 10000"/>
+              <a:gd name="adj" fmla="val 9756"/>
             </a:avLst>
           </a:prstGeom>
           <a:solidFill>
@@ -5162,14 +5204,14 @@
       </p:sp>
       <p:sp>
         <p:nvSpPr>
-          <p:cNvPr id="28" name="Shape 26"/>
-          <p:cNvSpPr/>
-          <p:nvPr/>
-        </p:nvSpPr>
-        <p:spPr>
-          <a:xfrm>
-            <a:off x="3794760" y="3822192"/>
-            <a:ext cx="777240" cy="402336"/>
+          <p:cNvPr id="27" name="Shape 25"/>
+          <p:cNvSpPr/>
+          <p:nvPr/>
+        </p:nvSpPr>
+        <p:spPr>
+          <a:xfrm>
+            <a:off x="3749040" y="3877056"/>
+            <a:ext cx="822960" cy="402336"/>
           </a:xfrm>
           <a:prstGeom prst="roundRect">
             <a:avLst>
@@ -5184,52 +5226,52 @@
       </p:sp>
       <p:sp>
         <p:nvSpPr>
+          <p:cNvPr id="28" name="Text 26"/>
+          <p:cNvSpPr/>
+          <p:nvPr/>
+        </p:nvSpPr>
+        <p:spPr>
+          <a:xfrm>
+            <a:off x="3749040" y="3941064"/>
+            <a:ext cx="822960" cy="274320"/>
+          </a:xfrm>
+          <a:prstGeom prst="rect">
+            <a:avLst/>
+          </a:prstGeom>
+          <a:noFill/>
+          <a:ln/>
+        </p:spPr>
+        <p:txBody>
+          <a:bodyPr wrap="square" lIns="0" tIns="0" rIns="0" bIns="0" rtlCol="0" anchor="ctr"/>
+          <a:lstStyle/>
+          <a:p>
+            <a:pPr algn="ctr" indent="0" marL="0">
+              <a:buNone/>
+            </a:pPr>
+            <a:r>
+              <a:rPr lang="en-US" sz="1100" b="1" dirty="0">
+                <a:solidFill>
+                  <a:srgbClr val="028090"/>
+                </a:solidFill>
+                <a:latin typeface="Calibri" pitchFamily="34" charset="0"/>
+                <a:ea typeface="Calibri" pitchFamily="34" charset="-122"/>
+                <a:cs typeface="Calibri" pitchFamily="34" charset="-120"/>
+              </a:rPr>
+              <a:t>存量</a:t>
+            </a:r>
+            <a:endParaRPr lang="en-US" sz="1100" dirty="0"/>
+          </a:p>
+        </p:txBody>
+      </p:sp>
+      <p:sp>
+        <p:nvSpPr>
           <p:cNvPr id="29" name="Text 27"/>
           <p:cNvSpPr/>
           <p:nvPr/>
         </p:nvSpPr>
         <p:spPr>
           <a:xfrm>
-            <a:off x="3794760" y="3886200"/>
-            <a:ext cx="777240" cy="274320"/>
-          </a:xfrm>
-          <a:prstGeom prst="rect">
-            <a:avLst/>
-          </a:prstGeom>
-          <a:noFill/>
-          <a:ln/>
-        </p:spPr>
-        <p:txBody>
-          <a:bodyPr wrap="square" lIns="0" tIns="0" rIns="0" bIns="0" rtlCol="0" anchor="ctr"/>
-          <a:lstStyle/>
-          <a:p>
-            <a:pPr algn="ctr" indent="0" marL="0">
-              <a:buNone/>
-            </a:pPr>
-            <a:r>
-              <a:rPr lang="en-US" sz="1100" b="1" dirty="0">
-                <a:solidFill>
-                  <a:srgbClr val="028090"/>
-                </a:solidFill>
-                <a:latin typeface="Calibri" pitchFamily="34" charset="0"/>
-                <a:ea typeface="Calibri" pitchFamily="34" charset="-122"/>
-                <a:cs typeface="Calibri" pitchFamily="34" charset="-120"/>
-              </a:rPr>
-              <a:t>存量</a:t>
-            </a:r>
-            <a:endParaRPr lang="en-US" sz="1100" dirty="0"/>
-          </a:p>
-        </p:txBody>
-      </p:sp>
-      <p:sp>
-        <p:nvSpPr>
-          <p:cNvPr id="30" name="Text 28"/>
-          <p:cNvSpPr/>
-          <p:nvPr/>
-        </p:nvSpPr>
-        <p:spPr>
-          <a:xfrm>
-            <a:off x="4754880" y="3749040"/>
+            <a:off x="4754880" y="3813048"/>
             <a:ext cx="3749040" cy="274320"/>
           </a:xfrm>
           <a:prstGeom prst="rect">
@@ -5262,40 +5304,79 @@
       </p:sp>
       <p:sp>
         <p:nvSpPr>
+          <p:cNvPr id="30" name="Text 28"/>
+          <p:cNvSpPr/>
+          <p:nvPr/>
+        </p:nvSpPr>
+        <p:spPr>
+          <a:xfrm>
+            <a:off x="4754880" y="4105656"/>
+            <a:ext cx="3749040" cy="256032"/>
+          </a:xfrm>
+          <a:prstGeom prst="rect">
+            <a:avLst/>
+          </a:prstGeom>
+          <a:noFill/>
+          <a:ln/>
+        </p:spPr>
+        <p:txBody>
+          <a:bodyPr wrap="square" lIns="0" tIns="0" rIns="0" bIns="0" rtlCol="0" anchor="ctr"/>
+          <a:lstStyle/>
+          <a:p>
+            <a:pPr indent="0" marL="0">
+              <a:buNone/>
+            </a:pPr>
+            <a:r>
+              <a:rPr lang="en-US" sz="1200" dirty="0">
+                <a:solidFill>
+                  <a:srgbClr val="3D555C"/>
+                </a:solidFill>
+                <a:latin typeface="Calibri" pitchFamily="34" charset="0"/>
+                <a:ea typeface="Calibri" pitchFamily="34" charset="-122"/>
+                <a:cs typeface="Calibri" pitchFamily="34" charset="-120"/>
+              </a:rPr>
+              <a:t>限流、缓存、Prompt 审查、Prometheus/Grafana</a:t>
+            </a:r>
+            <a:endParaRPr lang="en-US" sz="1200" dirty="0"/>
+          </a:p>
+        </p:txBody>
+      </p:sp>
+      <p:sp>
+        <p:nvSpPr>
           <p:cNvPr id="31" name="Text 29"/>
           <p:cNvSpPr/>
           <p:nvPr/>
         </p:nvSpPr>
         <p:spPr>
           <a:xfrm>
-            <a:off x="4754880" y="4041648"/>
-            <a:ext cx="3749040" cy="256032"/>
-          </a:xfrm>
-          <a:prstGeom prst="rect">
-            <a:avLst/>
-          </a:prstGeom>
-          <a:noFill/>
-          <a:ln/>
-        </p:spPr>
-        <p:txBody>
-          <a:bodyPr wrap="square" lIns="0" tIns="0" rIns="0" bIns="0" rtlCol="0" anchor="ctr"/>
-          <a:lstStyle/>
-          <a:p>
-            <a:pPr indent="0" marL="0">
-              <a:buNone/>
-            </a:pPr>
-            <a:r>
-              <a:rPr lang="en-US" sz="1200" dirty="0">
-                <a:solidFill>
-                  <a:srgbClr val="5A6F76"/>
-                </a:solidFill>
-                <a:latin typeface="Calibri" pitchFamily="34" charset="0"/>
-                <a:ea typeface="Calibri" pitchFamily="34" charset="-122"/>
-                <a:cs typeface="Calibri" pitchFamily="34" charset="-120"/>
-              </a:rPr>
-              <a:t>第 11–13 期：限流、缓存、Prompt 审查、Prometheus/Grafana</a:t>
-            </a:r>
-            <a:endParaRPr lang="en-US" sz="1200" dirty="0"/>
+            <a:off x="457200" y="4800600"/>
+            <a:ext cx="6858000" cy="256032"/>
+          </a:xfrm>
+          <a:prstGeom prst="rect">
+            <a:avLst/>
+          </a:prstGeom>
+          <a:noFill/>
+          <a:ln/>
+        </p:spPr>
+        <p:txBody>
+          <a:bodyPr wrap="square" lIns="0" tIns="0" rIns="0" bIns="0" rtlCol="0" anchor="ctr"/>
+          <a:lstStyle/>
+          <a:p>
+            <a:pPr indent="0" marL="0">
+              <a:buNone/>
+            </a:pPr>
+            <a:r>
+              <a:rPr lang="en-US" sz="1000" dirty="0">
+                <a:solidFill>
+                  <a:srgbClr val="3D555C"/>
+                </a:solidFill>
+                <a:latin typeface="Calibri" pitchFamily="34" charset="0"/>
+                <a:ea typeface="Calibri" pitchFamily="34" charset="-122"/>
+                <a:cs typeface="Calibri" pitchFamily="34" charset="-120"/>
+              </a:rPr>
+              <a:t>yu-ai-code-mother  ·  每日状态  ·  2026-07-30</a:t>
+            </a:r>
+            <a:endParaRPr lang="en-US" sz="1000" dirty="0"/>
           </a:p>
         </p:txBody>
       </p:sp>
@@ -5307,65 +5388,26 @@
         </p:nvSpPr>
         <p:spPr>
           <a:xfrm>
-            <a:off x="457200" y="4828032"/>
-            <a:ext cx="6858000" cy="256032"/>
-          </a:xfrm>
-          <a:prstGeom prst="rect">
-            <a:avLst/>
-          </a:prstGeom>
-          <a:noFill/>
-          <a:ln/>
-        </p:spPr>
-        <p:txBody>
-          <a:bodyPr wrap="square" lIns="0" tIns="0" rIns="0" bIns="0" rtlCol="0" anchor="ctr"/>
-          <a:lstStyle/>
-          <a:p>
-            <a:pPr indent="0" marL="0">
+            <a:off x="7772400" y="4800600"/>
+            <a:ext cx="914400" cy="256032"/>
+          </a:xfrm>
+          <a:prstGeom prst="rect">
+            <a:avLst/>
+          </a:prstGeom>
+          <a:noFill/>
+          <a:ln/>
+        </p:spPr>
+        <p:txBody>
+          <a:bodyPr wrap="square" lIns="0" tIns="0" rIns="0" bIns="0" rtlCol="0" anchor="ctr"/>
+          <a:lstStyle/>
+          <a:p>
+            <a:pPr algn="r" indent="0" marL="0">
               <a:buNone/>
             </a:pPr>
             <a:r>
               <a:rPr lang="en-US" sz="1000" dirty="0">
                 <a:solidFill>
-                  <a:srgbClr val="5A6F76"/>
-                </a:solidFill>
-                <a:latin typeface="Calibri" pitchFamily="34" charset="0"/>
-                <a:ea typeface="Calibri" pitchFamily="34" charset="-122"/>
-                <a:cs typeface="Calibri" pitchFamily="34" charset="-120"/>
-              </a:rPr>
-              <a:t>yu-ai-code-mother  ·  每日状态  ·  2026-07-30</a:t>
-            </a:r>
-            <a:endParaRPr lang="en-US" sz="1000" dirty="0"/>
-          </a:p>
-        </p:txBody>
-      </p:sp>
-      <p:sp>
-        <p:nvSpPr>
-          <p:cNvPr id="33" name="Text 31"/>
-          <p:cNvSpPr/>
-          <p:nvPr/>
-        </p:nvSpPr>
-        <p:spPr>
-          <a:xfrm>
-            <a:off x="7772400" y="4828032"/>
-            <a:ext cx="914400" cy="256032"/>
-          </a:xfrm>
-          <a:prstGeom prst="rect">
-            <a:avLst/>
-          </a:prstGeom>
-          <a:noFill/>
-          <a:ln/>
-        </p:spPr>
-        <p:txBody>
-          <a:bodyPr wrap="square" lIns="0" tIns="0" rIns="0" bIns="0" rtlCol="0" anchor="ctr"/>
-          <a:lstStyle/>
-          <a:p>
-            <a:pPr algn="r" indent="0" marL="0">
-              <a:buNone/>
-            </a:pPr>
-            <a:r>
-              <a:rPr lang="en-US" sz="1000" dirty="0">
-                <a:solidFill>
-                  <a:srgbClr val="5A6F76"/>
+                  <a:srgbClr val="3D555C"/>
                 </a:solidFill>
                 <a:latin typeface="Calibri" pitchFamily="34" charset="0"/>
                 <a:ea typeface="Calibri" pitchFamily="34" charset="-122"/>
@@ -5436,7 +5478,7 @@
         <p:spPr>
           <a:xfrm>
             <a:off x="0" y="0"/>
-            <a:ext cx="9144000" cy="109728"/>
+            <a:ext cx="9144000" cy="91440"/>
           </a:xfrm>
           <a:prstGeom prst="rect">
             <a:avLst/>
@@ -5454,14 +5496,312 @@
       </p:sp>
       <p:sp>
         <p:nvSpPr>
-          <p:cNvPr id="4" name="Shape 2"/>
-          <p:cNvSpPr/>
-          <p:nvPr/>
-        </p:nvSpPr>
-        <p:spPr>
-          <a:xfrm>
-            <a:off x="0" y="109728"/>
-            <a:ext cx="109728" cy="5033772"/>
+          <p:cNvPr id="4" name="Text 2"/>
+          <p:cNvSpPr/>
+          <p:nvPr/>
+        </p:nvSpPr>
+        <p:spPr>
+          <a:xfrm>
+            <a:off x="457200" y="256032"/>
+            <a:ext cx="8229600" cy="457200"/>
+          </a:xfrm>
+          <a:prstGeom prst="rect">
+            <a:avLst/>
+          </a:prstGeom>
+          <a:noFill/>
+          <a:ln/>
+        </p:spPr>
+        <p:txBody>
+          <a:bodyPr wrap="square" lIns="0" tIns="0" rIns="0" bIns="0" rtlCol="0" anchor="ctr"/>
+          <a:lstStyle/>
+          <a:p>
+            <a:pPr indent="0" marL="0">
+              <a:buNone/>
+            </a:pPr>
+            <a:r>
+              <a:rPr lang="en-US" sz="3200" b="1" dirty="0">
+                <a:solidFill>
+                  <a:srgbClr val="014F5E"/>
+                </a:solidFill>
+                <a:latin typeface="Georgia" pitchFamily="34" charset="0"/>
+                <a:ea typeface="Georgia" pitchFamily="34" charset="-122"/>
+                <a:cs typeface="Georgia" pitchFamily="34" charset="-120"/>
+              </a:rPr>
+              <a:t>模块架构要点</a:t>
+            </a:r>
+            <a:endParaRPr lang="en-US" sz="3200" dirty="0"/>
+          </a:p>
+        </p:txBody>
+      </p:sp>
+      <p:sp>
+        <p:nvSpPr>
+          <p:cNvPr id="5" name="Text 3"/>
+          <p:cNvSpPr/>
+          <p:nvPr/>
+        </p:nvSpPr>
+        <p:spPr>
+          <a:xfrm>
+            <a:off x="457200" y="713232"/>
+            <a:ext cx="8229600" cy="274320"/>
+          </a:xfrm>
+          <a:prstGeom prst="rect">
+            <a:avLst/>
+          </a:prstGeom>
+          <a:noFill/>
+          <a:ln/>
+        </p:spPr>
+        <p:txBody>
+          <a:bodyPr wrap="square" lIns="0" tIns="0" rIns="0" bIns="0" rtlCol="0" anchor="ctr"/>
+          <a:lstStyle/>
+          <a:p>
+            <a:pPr indent="0" marL="0">
+              <a:buNone/>
+            </a:pPr>
+            <a:r>
+              <a:rPr lang="en-US" sz="1300" i="1" dirty="0">
+                <a:solidFill>
+                  <a:srgbClr val="3D555C"/>
+                </a:solidFill>
+                <a:latin typeface="Calibri" pitchFamily="34" charset="0"/>
+                <a:ea typeface="Calibri" pitchFamily="34" charset="-122"/>
+                <a:cs typeface="Calibri" pitchFamily="34" charset="-120"/>
+              </a:rPr>
+              <a:t>单体与微服务并存，便于教学对照与渐进迁移</a:t>
+            </a:r>
+            <a:endParaRPr lang="en-US" sz="1300" dirty="0"/>
+          </a:p>
+        </p:txBody>
+      </p:sp>
+      <p:sp>
+        <p:nvSpPr>
+          <p:cNvPr id="6" name="Shape 4"/>
+          <p:cNvSpPr/>
+          <p:nvPr/>
+        </p:nvSpPr>
+        <p:spPr>
+          <a:xfrm>
+            <a:off x="457200" y="1097280"/>
+            <a:ext cx="4069080" cy="3383280"/>
+          </a:xfrm>
+          <a:prstGeom prst="roundRect">
+            <a:avLst>
+              <a:gd name="adj" fmla="val 2703"/>
+            </a:avLst>
+          </a:prstGeom>
+          <a:solidFill>
+            <a:srgbClr val="FFFFFF"/>
+          </a:solidFill>
+          <a:ln/>
+        </p:spPr>
+      </p:sp>
+      <p:sp>
+        <p:nvSpPr>
+          <p:cNvPr id="7" name="Shape 5"/>
+          <p:cNvSpPr/>
+          <p:nvPr/>
+        </p:nvSpPr>
+        <p:spPr>
+          <a:xfrm>
+            <a:off x="457200" y="1097280"/>
+            <a:ext cx="4069080" cy="502920"/>
+          </a:xfrm>
+          <a:prstGeom prst="rect">
+            <a:avLst/>
+          </a:prstGeom>
+          <a:solidFill>
+            <a:srgbClr val="028090"/>
+          </a:solidFill>
+          <a:ln w="12700">
+            <a:solidFill>
+              <a:srgbClr val="028090"/>
+            </a:solidFill>
+            <a:prstDash val="solid"/>
+          </a:ln>
+        </p:spPr>
+      </p:sp>
+      <p:sp>
+        <p:nvSpPr>
+          <p:cNvPr id="8" name="Text 6"/>
+          <p:cNvSpPr/>
+          <p:nvPr/>
+        </p:nvSpPr>
+        <p:spPr>
+          <a:xfrm>
+            <a:off x="640080" y="1188720"/>
+            <a:ext cx="3657600" cy="320040"/>
+          </a:xfrm>
+          <a:prstGeom prst="rect">
+            <a:avLst/>
+          </a:prstGeom>
+          <a:noFill/>
+          <a:ln/>
+        </p:spPr>
+        <p:txBody>
+          <a:bodyPr wrap="square" lIns="0" tIns="0" rIns="0" bIns="0" rtlCol="0" anchor="ctr"/>
+          <a:lstStyle/>
+          <a:p>
+            <a:pPr indent="0" marL="0">
+              <a:buNone/>
+            </a:pPr>
+            <a:r>
+              <a:rPr lang="en-US" sz="1600" b="1" dirty="0">
+                <a:solidFill>
+                  <a:srgbClr val="FFFFFF"/>
+                </a:solidFill>
+                <a:latin typeface="Georgia" pitchFamily="34" charset="0"/>
+                <a:ea typeface="Georgia" pitchFamily="34" charset="-122"/>
+                <a:cs typeface="Georgia" pitchFamily="34" charset="-120"/>
+              </a:rPr>
+              <a:t>单体应用（src/）</a:t>
+            </a:r>
+            <a:endParaRPr lang="en-US" sz="1600" dirty="0"/>
+          </a:p>
+        </p:txBody>
+      </p:sp>
+      <p:sp>
+        <p:nvSpPr>
+          <p:cNvPr id="9" name="Text 7"/>
+          <p:cNvSpPr/>
+          <p:nvPr/>
+        </p:nvSpPr>
+        <p:spPr>
+          <a:xfrm>
+            <a:off x="685800" y="1828800"/>
+            <a:ext cx="3611880" cy="2377440"/>
+          </a:xfrm>
+          <a:prstGeom prst="rect">
+            <a:avLst/>
+          </a:prstGeom>
+          <a:noFill/>
+          <a:ln/>
+        </p:spPr>
+        <p:txBody>
+          <a:bodyPr wrap="square" rtlCol="0" anchor="ctr"/>
+          <a:lstStyle/>
+          <a:p>
+            <a:pPr marL="342900" indent="-342900">
+              <a:buSzPct val="100000"/>
+              <a:buChar char="•"/>
+            </a:pPr>
+            <a:r>
+              <a:rPr lang="en-US" sz="1300" dirty="0">
+                <a:solidFill>
+                  <a:srgbClr val="1A2E35"/>
+                </a:solidFill>
+                <a:latin typeface="Calibri" pitchFamily="34" charset="0"/>
+                <a:ea typeface="Calibri" pitchFamily="34" charset="-122"/>
+                <a:cs typeface="Calibri" pitchFamily="34" charset="-120"/>
+              </a:rPr>
+              <a:t>ai / core / langgraph4j 生成链路</a:t>
+            </a:r>
+            <a:endParaRPr lang="en-US" sz="1300" dirty="0"/>
+          </a:p>
+          <a:p>
+            <a:pPr marL="342900" indent="-342900">
+              <a:buSzPct val="100000"/>
+              <a:buChar char="•"/>
+            </a:pPr>
+            <a:r>
+              <a:rPr lang="en-US" sz="1300" dirty="0">
+                <a:solidFill>
+                  <a:srgbClr val="1A2E35"/>
+                </a:solidFill>
+                <a:latin typeface="Calibri" pitchFamily="34" charset="0"/>
+                <a:ea typeface="Calibri" pitchFamily="34" charset="-122"/>
+                <a:cs typeface="Calibri" pitchFamily="34" charset="-120"/>
+              </a:rPr>
+              <a:t>应用、用户、对话、工作流 SSE 接口</a:t>
+            </a:r>
+            <a:endParaRPr lang="en-US" sz="1300" dirty="0"/>
+          </a:p>
+          <a:p>
+            <a:pPr marL="342900" indent="-342900">
+              <a:buSzPct val="100000"/>
+              <a:buChar char="•"/>
+            </a:pPr>
+            <a:r>
+              <a:rPr lang="en-US" sz="1300" dirty="0">
+                <a:solidFill>
+                  <a:srgbClr val="1A2E35"/>
+                </a:solidFill>
+                <a:latin typeface="Calibri" pitchFamily="34" charset="0"/>
+                <a:ea typeface="Calibri" pitchFamily="34" charset="-122"/>
+                <a:cs typeface="Calibri" pitchFamily="34" charset="-120"/>
+              </a:rPr>
+              <a:t>监控与限流保障稳定性与成本</a:t>
+            </a:r>
+            <a:endParaRPr lang="en-US" sz="1300" dirty="0"/>
+          </a:p>
+          <a:p>
+            <a:pPr marL="342900" indent="-342900">
+              <a:buSzPct val="100000"/>
+              <a:buChar char="•"/>
+            </a:pPr>
+            <a:r>
+              <a:rPr lang="en-US" sz="1300" dirty="0">
+                <a:solidFill>
+                  <a:srgbClr val="1A2E35"/>
+                </a:solidFill>
+                <a:latin typeface="Calibri" pitchFamily="34" charset="0"/>
+                <a:ea typeface="Calibri" pitchFamily="34" charset="-122"/>
+                <a:cs typeface="Calibri" pitchFamily="34" charset="-120"/>
+              </a:rPr>
+              <a:t>15 个测试类覆盖路由与工作流</a:t>
+            </a:r>
+            <a:endParaRPr lang="en-US" sz="1300" dirty="0"/>
+          </a:p>
+          <a:p>
+            <a:pPr marL="342900" indent="-342900">
+              <a:buSzPct val="100000"/>
+              <a:buChar char="•"/>
+            </a:pPr>
+            <a:r>
+              <a:rPr lang="en-US" sz="1300" dirty="0">
+                <a:solidFill>
+                  <a:srgbClr val="1A2E35"/>
+                </a:solidFill>
+                <a:latin typeface="Calibri" pitchFamily="34" charset="0"/>
+                <a:ea typeface="Calibri" pitchFamily="34" charset="-122"/>
+                <a:cs typeface="Calibri" pitchFamily="34" charset="-120"/>
+              </a:rPr>
+              <a:t>前端 Vue3：用户 / 应用 / 管理后台</a:t>
+            </a:r>
+            <a:endParaRPr lang="en-US" sz="1300" dirty="0"/>
+          </a:p>
+        </p:txBody>
+      </p:sp>
+      <p:sp>
+        <p:nvSpPr>
+          <p:cNvPr id="10" name="Shape 8"/>
+          <p:cNvSpPr/>
+          <p:nvPr/>
+        </p:nvSpPr>
+        <p:spPr>
+          <a:xfrm>
+            <a:off x="4800600" y="1097280"/>
+            <a:ext cx="3886200" cy="3383280"/>
+          </a:xfrm>
+          <a:prstGeom prst="roundRect">
+            <a:avLst>
+              <a:gd name="adj" fmla="val 2703"/>
+            </a:avLst>
+          </a:prstGeom>
+          <a:solidFill>
+            <a:srgbClr val="FFFFFF"/>
+          </a:solidFill>
+          <a:ln/>
+        </p:spPr>
+      </p:sp>
+      <p:sp>
+        <p:nvSpPr>
+          <p:cNvPr id="11" name="Shape 9"/>
+          <p:cNvSpPr/>
+          <p:nvPr/>
+        </p:nvSpPr>
+        <p:spPr>
+          <a:xfrm>
+            <a:off x="4800600" y="1097280"/>
+            <a:ext cx="3886200" cy="502920"/>
           </a:xfrm>
           <a:prstGeom prst="rect">
             <a:avLst/>
@@ -5479,116 +5819,55 @@
       </p:sp>
       <p:sp>
         <p:nvSpPr>
-          <p:cNvPr id="5" name="Text 3"/>
-          <p:cNvSpPr/>
-          <p:nvPr/>
-        </p:nvSpPr>
-        <p:spPr>
-          <a:xfrm>
-            <a:off x="457200" y="256032"/>
-            <a:ext cx="8229600" cy="502920"/>
-          </a:xfrm>
-          <a:prstGeom prst="rect">
-            <a:avLst/>
-          </a:prstGeom>
-          <a:noFill/>
-          <a:ln/>
-        </p:spPr>
-        <p:txBody>
-          <a:bodyPr wrap="square" lIns="0" tIns="0" rIns="0" bIns="0" rtlCol="0" anchor="ctr"/>
-          <a:lstStyle/>
-          <a:p>
-            <a:pPr indent="0" marL="0">
-              <a:buNone/>
-            </a:pPr>
-            <a:r>
-              <a:rPr lang="en-US" sz="3200" b="1" dirty="0">
-                <a:solidFill>
-                  <a:srgbClr val="014F5E"/>
+          <p:cNvPr id="12" name="Text 10"/>
+          <p:cNvSpPr/>
+          <p:nvPr/>
+        </p:nvSpPr>
+        <p:spPr>
+          <a:xfrm>
+            <a:off x="4983480" y="1188720"/>
+            <a:ext cx="3566160" cy="320040"/>
+          </a:xfrm>
+          <a:prstGeom prst="rect">
+            <a:avLst/>
+          </a:prstGeom>
+          <a:noFill/>
+          <a:ln/>
+        </p:spPr>
+        <p:txBody>
+          <a:bodyPr wrap="square" lIns="0" tIns="0" rIns="0" bIns="0" rtlCol="0" anchor="ctr"/>
+          <a:lstStyle/>
+          <a:p>
+            <a:pPr indent="0" marL="0">
+              <a:buNone/>
+            </a:pPr>
+            <a:r>
+              <a:rPr lang="en-US" sz="1600" b="1" dirty="0">
+                <a:solidFill>
+                  <a:srgbClr val="FFFFFF"/>
                 </a:solidFill>
                 <a:latin typeface="Georgia" pitchFamily="34" charset="0"/>
                 <a:ea typeface="Georgia" pitchFamily="34" charset="-122"/>
                 <a:cs typeface="Georgia" pitchFamily="34" charset="-120"/>
               </a:rPr>
-              <a:t>模块架构要点</a:t>
-            </a:r>
-            <a:endParaRPr lang="en-US" sz="3200" dirty="0"/>
-          </a:p>
-        </p:txBody>
-      </p:sp>
-      <p:sp>
-        <p:nvSpPr>
-          <p:cNvPr id="6" name="Text 4"/>
-          <p:cNvSpPr/>
-          <p:nvPr/>
-        </p:nvSpPr>
-        <p:spPr>
-          <a:xfrm>
-            <a:off x="457200" y="749808"/>
-            <a:ext cx="8229600" cy="292608"/>
-          </a:xfrm>
-          <a:prstGeom prst="rect">
-            <a:avLst/>
-          </a:prstGeom>
-          <a:noFill/>
-          <a:ln/>
-        </p:spPr>
-        <p:txBody>
-          <a:bodyPr wrap="square" lIns="0" tIns="0" rIns="0" bIns="0" rtlCol="0" anchor="ctr"/>
-          <a:lstStyle/>
-          <a:p>
-            <a:pPr indent="0" marL="0">
-              <a:buNone/>
-            </a:pPr>
-            <a:r>
-              <a:rPr lang="en-US" sz="1300" i="1" dirty="0">
-                <a:solidFill>
-                  <a:srgbClr val="5A6F76"/>
-                </a:solidFill>
-                <a:latin typeface="Calibri" pitchFamily="34" charset="0"/>
-                <a:ea typeface="Calibri" pitchFamily="34" charset="-122"/>
-                <a:cs typeface="Calibri" pitchFamily="34" charset="-120"/>
-              </a:rPr>
-              <a:t>单体与微服务并存，便于教学对照与渐进迁移</a:t>
-            </a:r>
-            <a:endParaRPr lang="en-US" sz="1300" dirty="0"/>
-          </a:p>
-        </p:txBody>
-      </p:sp>
-      <p:sp>
-        <p:nvSpPr>
-          <p:cNvPr id="7" name="Shape 5"/>
-          <p:cNvSpPr/>
-          <p:nvPr/>
-        </p:nvSpPr>
-        <p:spPr>
-          <a:xfrm>
-            <a:off x="457200" y="1188720"/>
-            <a:ext cx="4023360" cy="3291840"/>
-          </a:xfrm>
-          <a:prstGeom prst="roundRect">
-            <a:avLst>
-              <a:gd name="adj" fmla="val 2778"/>
-            </a:avLst>
-          </a:prstGeom>
-          <a:solidFill>
-            <a:srgbClr val="FFFFFF"/>
-          </a:solidFill>
-          <a:ln/>
-        </p:spPr>
-      </p:sp>
-      <p:sp>
-        <p:nvSpPr>
-          <p:cNvPr id="8" name="Shape 6"/>
-          <p:cNvSpPr/>
-          <p:nvPr/>
-        </p:nvSpPr>
-        <p:spPr>
-          <a:xfrm>
-            <a:off x="457200" y="1188720"/>
-            <a:ext cx="4023360" cy="502920"/>
-          </a:xfrm>
-          <a:prstGeom prst="rect">
+              <a:t>微服务（7 模块）</a:t>
+            </a:r>
+            <a:endParaRPr lang="en-US" sz="1600" dirty="0"/>
+          </a:p>
+        </p:txBody>
+      </p:sp>
+      <p:sp>
+        <p:nvSpPr>
+          <p:cNvPr id="13" name="Shape 11"/>
+          <p:cNvSpPr/>
+          <p:nvPr/>
+        </p:nvSpPr>
+        <p:spPr>
+          <a:xfrm>
+            <a:off x="4983480" y="1801368"/>
+            <a:ext cx="292608" cy="292608"/>
+          </a:xfrm>
+          <a:prstGeom prst="ellipse">
             <a:avLst/>
           </a:prstGeom>
           <a:solidFill>
@@ -5604,251 +5883,92 @@
       </p:sp>
       <p:sp>
         <p:nvSpPr>
-          <p:cNvPr id="9" name="Text 7"/>
-          <p:cNvSpPr/>
-          <p:nvPr/>
-        </p:nvSpPr>
-        <p:spPr>
-          <a:xfrm>
-            <a:off x="640080" y="1280160"/>
-            <a:ext cx="3657600" cy="320040"/>
-          </a:xfrm>
-          <a:prstGeom prst="rect">
-            <a:avLst/>
-          </a:prstGeom>
-          <a:noFill/>
-          <a:ln/>
-        </p:spPr>
-        <p:txBody>
-          <a:bodyPr wrap="square" lIns="0" tIns="0" rIns="0" bIns="0" rtlCol="0" anchor="ctr"/>
-          <a:lstStyle/>
-          <a:p>
-            <a:pPr indent="0" marL="0">
-              <a:buNone/>
-            </a:pPr>
-            <a:r>
-              <a:rPr lang="en-US" sz="1600" b="1" dirty="0">
-                <a:solidFill>
-                  <a:srgbClr val="FFFFFF"/>
-                </a:solidFill>
-                <a:latin typeface="Georgia" pitchFamily="34" charset="0"/>
-                <a:ea typeface="Georgia" pitchFamily="34" charset="-122"/>
-                <a:cs typeface="Georgia" pitchFamily="34" charset="-120"/>
-              </a:rPr>
-              <a:t>单体应用（src/）</a:t>
-            </a:r>
-            <a:endParaRPr lang="en-US" sz="1600" dirty="0"/>
-          </a:p>
-        </p:txBody>
-      </p:sp>
-      <p:sp>
-        <p:nvSpPr>
-          <p:cNvPr id="10" name="Text 8"/>
-          <p:cNvSpPr/>
-          <p:nvPr/>
-        </p:nvSpPr>
-        <p:spPr>
-          <a:xfrm>
-            <a:off x="685800" y="1920240"/>
-            <a:ext cx="3566160" cy="2286000"/>
-          </a:xfrm>
-          <a:prstGeom prst="rect">
-            <a:avLst/>
-          </a:prstGeom>
-          <a:noFill/>
-          <a:ln/>
-        </p:spPr>
-        <p:txBody>
-          <a:bodyPr wrap="square" rtlCol="0" anchor="ctr"/>
-          <a:lstStyle/>
-          <a:p>
-            <a:pPr marL="342900" indent="-342900">
-              <a:buSzPct val="100000"/>
-              <a:buChar char="•"/>
-            </a:pPr>
-            <a:r>
-              <a:rPr lang="en-US" sz="1300" dirty="0">
-                <a:solidFill>
-                  <a:srgbClr val="1A2E35"/>
-                </a:solidFill>
-                <a:latin typeface="Calibri" pitchFamily="34" charset="0"/>
-                <a:ea typeface="Calibri" pitchFamily="34" charset="-122"/>
-                <a:cs typeface="Calibri" pitchFamily="34" charset="-120"/>
-              </a:rPr>
-              <a:t>ai / core / langgraph4j 生成链路</a:t>
-            </a:r>
-            <a:endParaRPr lang="en-US" sz="1300" dirty="0"/>
-          </a:p>
-          <a:p>
-            <a:pPr marL="342900" indent="-342900">
-              <a:buSzPct val="100000"/>
-              <a:buChar char="•"/>
-            </a:pPr>
-            <a:r>
-              <a:rPr lang="en-US" sz="1300" dirty="0">
-                <a:solidFill>
-                  <a:srgbClr val="1A2E35"/>
-                </a:solidFill>
-                <a:latin typeface="Calibri" pitchFamily="34" charset="0"/>
-                <a:ea typeface="Calibri" pitchFamily="34" charset="-122"/>
-                <a:cs typeface="Calibri" pitchFamily="34" charset="-120"/>
-              </a:rPr>
-              <a:t>controller：应用、用户、对话、工作流 SSE</a:t>
-            </a:r>
-            <a:endParaRPr lang="en-US" sz="1300" dirty="0"/>
-          </a:p>
-          <a:p>
-            <a:pPr marL="342900" indent="-342900">
-              <a:buSzPct val="100000"/>
-              <a:buChar char="•"/>
-            </a:pPr>
-            <a:r>
-              <a:rPr lang="en-US" sz="1300" dirty="0">
-                <a:solidFill>
-                  <a:srgbClr val="1A2E35"/>
-                </a:solidFill>
-                <a:latin typeface="Calibri" pitchFamily="34" charset="0"/>
-                <a:ea typeface="Calibri" pitchFamily="34" charset="-122"/>
-                <a:cs typeface="Calibri" pitchFamily="34" charset="-120"/>
-              </a:rPr>
-              <a:t>monitor + ratelimter 稳定性与成本控制</a:t>
-            </a:r>
-            <a:endParaRPr lang="en-US" sz="1300" dirty="0"/>
-          </a:p>
-          <a:p>
-            <a:pPr marL="342900" indent="-342900">
-              <a:buSzPct val="100000"/>
-              <a:buChar char="•"/>
-            </a:pPr>
-            <a:r>
-              <a:rPr lang="en-US" sz="1300" dirty="0">
-                <a:solidFill>
-                  <a:srgbClr val="1A2E35"/>
-                </a:solidFill>
-                <a:latin typeface="Calibri" pitchFamily="34" charset="0"/>
-                <a:ea typeface="Calibri" pitchFamily="34" charset="-122"/>
-                <a:cs typeface="Calibri" pitchFamily="34" charset="-120"/>
-              </a:rPr>
-              <a:t>15 个测试类覆盖路由、工作流、工具</a:t>
-            </a:r>
-            <a:endParaRPr lang="en-US" sz="1300" dirty="0"/>
-          </a:p>
-          <a:p>
-            <a:pPr marL="342900" indent="-342900">
-              <a:buSzPct val="100000"/>
-              <a:buChar char="•"/>
-            </a:pPr>
-            <a:r>
-              <a:rPr lang="en-US" sz="1300" dirty="0">
-                <a:solidFill>
-                  <a:srgbClr val="1A2E35"/>
-                </a:solidFill>
-                <a:latin typeface="Calibri" pitchFamily="34" charset="0"/>
-                <a:ea typeface="Calibri" pitchFamily="34" charset="-122"/>
-                <a:cs typeface="Calibri" pitchFamily="34" charset="-120"/>
-              </a:rPr>
-              <a:t>前端 Vue3：用户/应用/管理后台页面</a:t>
-            </a:r>
-            <a:endParaRPr lang="en-US" sz="1300" dirty="0"/>
-          </a:p>
-        </p:txBody>
-      </p:sp>
-      <p:sp>
-        <p:nvSpPr>
-          <p:cNvPr id="11" name="Shape 9"/>
-          <p:cNvSpPr/>
-          <p:nvPr/>
-        </p:nvSpPr>
-        <p:spPr>
-          <a:xfrm>
-            <a:off x="4663440" y="1188720"/>
-            <a:ext cx="4023360" cy="3291840"/>
-          </a:xfrm>
-          <a:prstGeom prst="roundRect">
-            <a:avLst>
-              <a:gd name="adj" fmla="val 2778"/>
-            </a:avLst>
-          </a:prstGeom>
-          <a:solidFill>
-            <a:srgbClr val="FFFFFF"/>
-          </a:solidFill>
-          <a:ln/>
-        </p:spPr>
-      </p:sp>
-      <p:sp>
-        <p:nvSpPr>
-          <p:cNvPr id="12" name="Shape 10"/>
-          <p:cNvSpPr/>
-          <p:nvPr/>
-        </p:nvSpPr>
-        <p:spPr>
-          <a:xfrm>
-            <a:off x="4663440" y="1188720"/>
-            <a:ext cx="4023360" cy="502920"/>
-          </a:xfrm>
-          <a:prstGeom prst="rect">
-            <a:avLst/>
-          </a:prstGeom>
-          <a:solidFill>
-            <a:srgbClr val="00A896"/>
-          </a:solidFill>
-          <a:ln w="12700">
-            <a:solidFill>
-              <a:srgbClr val="00A896"/>
-            </a:solidFill>
-            <a:prstDash val="solid"/>
-          </a:ln>
-        </p:spPr>
-      </p:sp>
-      <p:sp>
-        <p:nvSpPr>
-          <p:cNvPr id="13" name="Text 11"/>
-          <p:cNvSpPr/>
-          <p:nvPr/>
-        </p:nvSpPr>
-        <p:spPr>
-          <a:xfrm>
-            <a:off x="4846320" y="1280160"/>
-            <a:ext cx="3657600" cy="320040"/>
-          </a:xfrm>
-          <a:prstGeom prst="rect">
-            <a:avLst/>
-          </a:prstGeom>
-          <a:noFill/>
-          <a:ln/>
-        </p:spPr>
-        <p:txBody>
-          <a:bodyPr wrap="square" lIns="0" tIns="0" rIns="0" bIns="0" rtlCol="0" anchor="ctr"/>
-          <a:lstStyle/>
-          <a:p>
-            <a:pPr indent="0" marL="0">
-              <a:buNone/>
-            </a:pPr>
-            <a:r>
-              <a:rPr lang="en-US" sz="1600" b="1" dirty="0">
-                <a:solidFill>
-                  <a:srgbClr val="FFFFFF"/>
-                </a:solidFill>
-                <a:latin typeface="Georgia" pitchFamily="34" charset="0"/>
-                <a:ea typeface="Georgia" pitchFamily="34" charset="-122"/>
-                <a:cs typeface="Georgia" pitchFamily="34" charset="-120"/>
-              </a:rPr>
-              <a:t>微服务（7 模块）</a:t>
-            </a:r>
-            <a:endParaRPr lang="en-US" sz="1600" dirty="0"/>
-          </a:p>
-        </p:txBody>
-      </p:sp>
-      <p:sp>
-        <p:nvSpPr>
-          <p:cNvPr id="14" name="Shape 12"/>
-          <p:cNvSpPr/>
-          <p:nvPr/>
-        </p:nvSpPr>
-        <p:spPr>
-          <a:xfrm>
-            <a:off x="4892040" y="1892808"/>
-            <a:ext cx="347472" cy="347472"/>
+          <p:cNvPr id="14" name="Text 12"/>
+          <p:cNvSpPr/>
+          <p:nvPr/>
+        </p:nvSpPr>
+        <p:spPr>
+          <a:xfrm>
+            <a:off x="5440680" y="1783080"/>
+            <a:ext cx="2194560" cy="292608"/>
+          </a:xfrm>
+          <a:prstGeom prst="rect">
+            <a:avLst/>
+          </a:prstGeom>
+          <a:noFill/>
+          <a:ln/>
+        </p:spPr>
+        <p:txBody>
+          <a:bodyPr wrap="square" lIns="0" tIns="0" rIns="0" bIns="0" rtlCol="0" anchor="ctr"/>
+          <a:lstStyle/>
+          <a:p>
+            <a:pPr indent="0" marL="0">
+              <a:buNone/>
+            </a:pPr>
+            <a:r>
+              <a:rPr lang="en-US" sz="1200" b="1" dirty="0">
+                <a:solidFill>
+                  <a:srgbClr val="014F5E"/>
+                </a:solidFill>
+                <a:latin typeface="Calibri" pitchFamily="34" charset="0"/>
+                <a:ea typeface="Calibri" pitchFamily="34" charset="-122"/>
+                <a:cs typeface="Calibri" pitchFamily="34" charset="-120"/>
+              </a:rPr>
+              <a:t>yu-ai-code-user</a:t>
+            </a:r>
+            <a:endParaRPr lang="en-US" sz="1200" dirty="0"/>
+          </a:p>
+        </p:txBody>
+      </p:sp>
+      <p:sp>
+        <p:nvSpPr>
+          <p:cNvPr id="15" name="Text 13"/>
+          <p:cNvSpPr/>
+          <p:nvPr/>
+        </p:nvSpPr>
+        <p:spPr>
+          <a:xfrm>
+            <a:off x="7635240" y="1783080"/>
+            <a:ext cx="914400" cy="292608"/>
+          </a:xfrm>
+          <a:prstGeom prst="rect">
+            <a:avLst/>
+          </a:prstGeom>
+          <a:noFill/>
+          <a:ln/>
+        </p:spPr>
+        <p:txBody>
+          <a:bodyPr wrap="square" lIns="0" tIns="0" rIns="0" bIns="0" rtlCol="0" anchor="ctr"/>
+          <a:lstStyle/>
+          <a:p>
+            <a:pPr indent="0" marL="0">
+              <a:buNone/>
+            </a:pPr>
+            <a:r>
+              <a:rPr lang="en-US" sz="1200" dirty="0">
+                <a:solidFill>
+                  <a:srgbClr val="3D555C"/>
+                </a:solidFill>
+                <a:latin typeface="Calibri" pitchFamily="34" charset="0"/>
+                <a:ea typeface="Calibri" pitchFamily="34" charset="-122"/>
+                <a:cs typeface="Calibri" pitchFamily="34" charset="-120"/>
+              </a:rPr>
+              <a:t>用户服务</a:t>
+            </a:r>
+            <a:endParaRPr lang="en-US" sz="1200" dirty="0"/>
+          </a:p>
+        </p:txBody>
+      </p:sp>
+      <p:sp>
+        <p:nvSpPr>
+          <p:cNvPr id="16" name="Shape 14"/>
+          <p:cNvSpPr/>
+          <p:nvPr/>
+        </p:nvSpPr>
+        <p:spPr>
+          <a:xfrm>
+            <a:off x="4983480" y="2167128"/>
+            <a:ext cx="292608" cy="292608"/>
           </a:xfrm>
           <a:prstGeom prst="ellipse">
             <a:avLst/>
@@ -5866,14 +5986,14 @@
       </p:sp>
       <p:sp>
         <p:nvSpPr>
-          <p:cNvPr id="15" name="Text 13"/>
-          <p:cNvSpPr/>
-          <p:nvPr/>
-        </p:nvSpPr>
-        <p:spPr>
-          <a:xfrm>
-            <a:off x="5394960" y="1874520"/>
-            <a:ext cx="2103120" cy="320040"/>
+          <p:cNvPr id="17" name="Text 15"/>
+          <p:cNvSpPr/>
+          <p:nvPr/>
+        </p:nvSpPr>
+        <p:spPr>
+          <a:xfrm>
+            <a:off x="5440680" y="2148840"/>
+            <a:ext cx="2194560" cy="292608"/>
           </a:xfrm>
           <a:prstGeom prst="rect">
             <a:avLst/>
@@ -5897,7 +6017,7 @@
                 <a:ea typeface="Calibri" pitchFamily="34" charset="-122"/>
                 <a:cs typeface="Calibri" pitchFamily="34" charset="-120"/>
               </a:rPr>
-              <a:t>yu-ai-code-user</a:t>
+              <a:t>yu-ai-code-app</a:t>
             </a:r>
             <a:endParaRPr lang="en-US" sz="1200" dirty="0"/>
           </a:p>
@@ -5905,14 +6025,14 @@
       </p:sp>
       <p:sp>
         <p:nvSpPr>
-          <p:cNvPr id="16" name="Text 14"/>
-          <p:cNvSpPr/>
-          <p:nvPr/>
-        </p:nvSpPr>
-        <p:spPr>
-          <a:xfrm>
-            <a:off x="7498080" y="1874520"/>
-            <a:ext cx="1005840" cy="320040"/>
+          <p:cNvPr id="18" name="Text 16"/>
+          <p:cNvSpPr/>
+          <p:nvPr/>
+        </p:nvSpPr>
+        <p:spPr>
+          <a:xfrm>
+            <a:off x="7635240" y="2148840"/>
+            <a:ext cx="914400" cy="292608"/>
           </a:xfrm>
           <a:prstGeom prst="rect">
             <a:avLst/>
@@ -5930,13 +6050,13 @@
             <a:r>
               <a:rPr lang="en-US" sz="1200" dirty="0">
                 <a:solidFill>
-                  <a:srgbClr val="5A6F76"/>
-                </a:solidFill>
-                <a:latin typeface="Calibri" pitchFamily="34" charset="0"/>
-                <a:ea typeface="Calibri" pitchFamily="34" charset="-122"/>
-                <a:cs typeface="Calibri" pitchFamily="34" charset="-120"/>
-              </a:rPr>
-              <a:t>用户服务</a:t>
+                  <a:srgbClr val="3D555C"/>
+                </a:solidFill>
+                <a:latin typeface="Calibri" pitchFamily="34" charset="0"/>
+                <a:ea typeface="Calibri" pitchFamily="34" charset="-122"/>
+                <a:cs typeface="Calibri" pitchFamily="34" charset="-120"/>
+              </a:rPr>
+              <a:t>应用服务</a:t>
             </a:r>
             <a:endParaRPr lang="en-US" sz="1200" dirty="0"/>
           </a:p>
@@ -5944,117 +6064,14 @@
       </p:sp>
       <p:sp>
         <p:nvSpPr>
-          <p:cNvPr id="17" name="Shape 15"/>
-          <p:cNvSpPr/>
-          <p:nvPr/>
-        </p:nvSpPr>
-        <p:spPr>
-          <a:xfrm>
-            <a:off x="4892040" y="2276856"/>
-            <a:ext cx="347472" cy="347472"/>
-          </a:xfrm>
-          <a:prstGeom prst="ellipse">
-            <a:avLst/>
-          </a:prstGeom>
-          <a:solidFill>
-            <a:srgbClr val="02C39A"/>
-          </a:solidFill>
-          <a:ln w="12700">
-            <a:solidFill>
-              <a:srgbClr val="02C39A"/>
-            </a:solidFill>
-            <a:prstDash val="solid"/>
-          </a:ln>
-        </p:spPr>
-      </p:sp>
-      <p:sp>
-        <p:nvSpPr>
-          <p:cNvPr id="18" name="Text 16"/>
-          <p:cNvSpPr/>
-          <p:nvPr/>
-        </p:nvSpPr>
-        <p:spPr>
-          <a:xfrm>
-            <a:off x="5394960" y="2258568"/>
-            <a:ext cx="2103120" cy="320040"/>
-          </a:xfrm>
-          <a:prstGeom prst="rect">
-            <a:avLst/>
-          </a:prstGeom>
-          <a:noFill/>
-          <a:ln/>
-        </p:spPr>
-        <p:txBody>
-          <a:bodyPr wrap="square" lIns="0" tIns="0" rIns="0" bIns="0" rtlCol="0" anchor="ctr"/>
-          <a:lstStyle/>
-          <a:p>
-            <a:pPr indent="0" marL="0">
-              <a:buNone/>
-            </a:pPr>
-            <a:r>
-              <a:rPr lang="en-US" sz="1200" b="1" dirty="0">
-                <a:solidFill>
-                  <a:srgbClr val="014F5E"/>
-                </a:solidFill>
-                <a:latin typeface="Calibri" pitchFamily="34" charset="0"/>
-                <a:ea typeface="Calibri" pitchFamily="34" charset="-122"/>
-                <a:cs typeface="Calibri" pitchFamily="34" charset="-120"/>
-              </a:rPr>
-              <a:t>yu-ai-code-app</a:t>
-            </a:r>
-            <a:endParaRPr lang="en-US" sz="1200" dirty="0"/>
-          </a:p>
-        </p:txBody>
-      </p:sp>
-      <p:sp>
-        <p:nvSpPr>
-          <p:cNvPr id="19" name="Text 17"/>
-          <p:cNvSpPr/>
-          <p:nvPr/>
-        </p:nvSpPr>
-        <p:spPr>
-          <a:xfrm>
-            <a:off x="7498080" y="2258568"/>
-            <a:ext cx="1005840" cy="320040"/>
-          </a:xfrm>
-          <a:prstGeom prst="rect">
-            <a:avLst/>
-          </a:prstGeom>
-          <a:noFill/>
-          <a:ln/>
-        </p:spPr>
-        <p:txBody>
-          <a:bodyPr wrap="square" lIns="0" tIns="0" rIns="0" bIns="0" rtlCol="0" anchor="ctr"/>
-          <a:lstStyle/>
-          <a:p>
-            <a:pPr indent="0" marL="0">
-              <a:buNone/>
-            </a:pPr>
-            <a:r>
-              <a:rPr lang="en-US" sz="1200" dirty="0">
-                <a:solidFill>
-                  <a:srgbClr val="5A6F76"/>
-                </a:solidFill>
-                <a:latin typeface="Calibri" pitchFamily="34" charset="0"/>
-                <a:ea typeface="Calibri" pitchFamily="34" charset="-122"/>
-                <a:cs typeface="Calibri" pitchFamily="34" charset="-120"/>
-              </a:rPr>
-              <a:t>应用服务</a:t>
-            </a:r>
-            <a:endParaRPr lang="en-US" sz="1200" dirty="0"/>
-          </a:p>
-        </p:txBody>
-      </p:sp>
-      <p:sp>
-        <p:nvSpPr>
-          <p:cNvPr id="20" name="Shape 18"/>
-          <p:cNvSpPr/>
-          <p:nvPr/>
-        </p:nvSpPr>
-        <p:spPr>
-          <a:xfrm>
-            <a:off x="4892040" y="2660904"/>
-            <a:ext cx="347472" cy="347472"/>
+          <p:cNvPr id="19" name="Shape 17"/>
+          <p:cNvSpPr/>
+          <p:nvPr/>
+        </p:nvSpPr>
+        <p:spPr>
+          <a:xfrm>
+            <a:off x="4983480" y="2532888"/>
+            <a:ext cx="292608" cy="292608"/>
           </a:xfrm>
           <a:prstGeom prst="ellipse">
             <a:avLst/>
@@ -6072,38 +6089,77 @@
       </p:sp>
       <p:sp>
         <p:nvSpPr>
+          <p:cNvPr id="20" name="Text 18"/>
+          <p:cNvSpPr/>
+          <p:nvPr/>
+        </p:nvSpPr>
+        <p:spPr>
+          <a:xfrm>
+            <a:off x="5440680" y="2514600"/>
+            <a:ext cx="2194560" cy="292608"/>
+          </a:xfrm>
+          <a:prstGeom prst="rect">
+            <a:avLst/>
+          </a:prstGeom>
+          <a:noFill/>
+          <a:ln/>
+        </p:spPr>
+        <p:txBody>
+          <a:bodyPr wrap="square" lIns="0" tIns="0" rIns="0" bIns="0" rtlCol="0" anchor="ctr"/>
+          <a:lstStyle/>
+          <a:p>
+            <a:pPr indent="0" marL="0">
+              <a:buNone/>
+            </a:pPr>
+            <a:r>
+              <a:rPr lang="en-US" sz="1200" b="1" dirty="0">
+                <a:solidFill>
+                  <a:srgbClr val="014F5E"/>
+                </a:solidFill>
+                <a:latin typeface="Calibri" pitchFamily="34" charset="0"/>
+                <a:ea typeface="Calibri" pitchFamily="34" charset="-122"/>
+                <a:cs typeface="Calibri" pitchFamily="34" charset="-120"/>
+              </a:rPr>
+              <a:t>yu-ai-code-ai</a:t>
+            </a:r>
+            <a:endParaRPr lang="en-US" sz="1200" dirty="0"/>
+          </a:p>
+        </p:txBody>
+      </p:sp>
+      <p:sp>
+        <p:nvSpPr>
           <p:cNvPr id="21" name="Text 19"/>
           <p:cNvSpPr/>
           <p:nvPr/>
         </p:nvSpPr>
         <p:spPr>
           <a:xfrm>
-            <a:off x="5394960" y="2642616"/>
-            <a:ext cx="2103120" cy="320040"/>
-          </a:xfrm>
-          <a:prstGeom prst="rect">
-            <a:avLst/>
-          </a:prstGeom>
-          <a:noFill/>
-          <a:ln/>
-        </p:spPr>
-        <p:txBody>
-          <a:bodyPr wrap="square" lIns="0" tIns="0" rIns="0" bIns="0" rtlCol="0" anchor="ctr"/>
-          <a:lstStyle/>
-          <a:p>
-            <a:pPr indent="0" marL="0">
-              <a:buNone/>
-            </a:pPr>
-            <a:r>
-              <a:rPr lang="en-US" sz="1200" b="1" dirty="0">
-                <a:solidFill>
-                  <a:srgbClr val="014F5E"/>
-                </a:solidFill>
-                <a:latin typeface="Calibri" pitchFamily="34" charset="0"/>
-                <a:ea typeface="Calibri" pitchFamily="34" charset="-122"/>
-                <a:cs typeface="Calibri" pitchFamily="34" charset="-120"/>
-              </a:rPr>
-              <a:t>yu-ai-code-ai</a:t>
+            <a:off x="7635240" y="2514600"/>
+            <a:ext cx="914400" cy="292608"/>
+          </a:xfrm>
+          <a:prstGeom prst="rect">
+            <a:avLst/>
+          </a:prstGeom>
+          <a:noFill/>
+          <a:ln/>
+        </p:spPr>
+        <p:txBody>
+          <a:bodyPr wrap="square" lIns="0" tIns="0" rIns="0" bIns="0" rtlCol="0" anchor="ctr"/>
+          <a:lstStyle/>
+          <a:p>
+            <a:pPr indent="0" marL="0">
+              <a:buNone/>
+            </a:pPr>
+            <a:r>
+              <a:rPr lang="en-US" sz="1200" dirty="0">
+                <a:solidFill>
+                  <a:srgbClr val="3D555C"/>
+                </a:solidFill>
+                <a:latin typeface="Calibri" pitchFamily="34" charset="0"/>
+                <a:ea typeface="Calibri" pitchFamily="34" charset="-122"/>
+                <a:cs typeface="Calibri" pitchFamily="34" charset="-120"/>
+              </a:rPr>
+              <a:t>AI 生成</a:t>
             </a:r>
             <a:endParaRPr lang="en-US" sz="1200" dirty="0"/>
           </a:p>
@@ -6111,156 +6167,14 @@
       </p:sp>
       <p:sp>
         <p:nvSpPr>
-          <p:cNvPr id="22" name="Text 20"/>
-          <p:cNvSpPr/>
-          <p:nvPr/>
-        </p:nvSpPr>
-        <p:spPr>
-          <a:xfrm>
-            <a:off x="7498080" y="2642616"/>
-            <a:ext cx="1005840" cy="320040"/>
-          </a:xfrm>
-          <a:prstGeom prst="rect">
-            <a:avLst/>
-          </a:prstGeom>
-          <a:noFill/>
-          <a:ln/>
-        </p:spPr>
-        <p:txBody>
-          <a:bodyPr wrap="square" lIns="0" tIns="0" rIns="0" bIns="0" rtlCol="0" anchor="ctr"/>
-          <a:lstStyle/>
-          <a:p>
-            <a:pPr indent="0" marL="0">
-              <a:buNone/>
-            </a:pPr>
-            <a:r>
-              <a:rPr lang="en-US" sz="1200" dirty="0">
-                <a:solidFill>
-                  <a:srgbClr val="5A6F76"/>
-                </a:solidFill>
-                <a:latin typeface="Calibri" pitchFamily="34" charset="0"/>
-                <a:ea typeface="Calibri" pitchFamily="34" charset="-122"/>
-                <a:cs typeface="Calibri" pitchFamily="34" charset="-120"/>
-              </a:rPr>
-              <a:t>AI 生成</a:t>
-            </a:r>
-            <a:endParaRPr lang="en-US" sz="1200" dirty="0"/>
-          </a:p>
-        </p:txBody>
-      </p:sp>
-      <p:sp>
-        <p:nvSpPr>
-          <p:cNvPr id="23" name="Shape 21"/>
-          <p:cNvSpPr/>
-          <p:nvPr/>
-        </p:nvSpPr>
-        <p:spPr>
-          <a:xfrm>
-            <a:off x="4892040" y="3044952"/>
-            <a:ext cx="347472" cy="347472"/>
-          </a:xfrm>
-          <a:prstGeom prst="ellipse">
-            <a:avLst/>
-          </a:prstGeom>
-          <a:solidFill>
-            <a:srgbClr val="02C39A"/>
-          </a:solidFill>
-          <a:ln w="12700">
-            <a:solidFill>
-              <a:srgbClr val="02C39A"/>
-            </a:solidFill>
-            <a:prstDash val="solid"/>
-          </a:ln>
-        </p:spPr>
-      </p:sp>
-      <p:sp>
-        <p:nvSpPr>
-          <p:cNvPr id="24" name="Text 22"/>
-          <p:cNvSpPr/>
-          <p:nvPr/>
-        </p:nvSpPr>
-        <p:spPr>
-          <a:xfrm>
-            <a:off x="5394960" y="3026664"/>
-            <a:ext cx="2103120" cy="320040"/>
-          </a:xfrm>
-          <a:prstGeom prst="rect">
-            <a:avLst/>
-          </a:prstGeom>
-          <a:noFill/>
-          <a:ln/>
-        </p:spPr>
-        <p:txBody>
-          <a:bodyPr wrap="square" lIns="0" tIns="0" rIns="0" bIns="0" rtlCol="0" anchor="ctr"/>
-          <a:lstStyle/>
-          <a:p>
-            <a:pPr indent="0" marL="0">
-              <a:buNone/>
-            </a:pPr>
-            <a:r>
-              <a:rPr lang="en-US" sz="1200" b="1" dirty="0">
-                <a:solidFill>
-                  <a:srgbClr val="014F5E"/>
-                </a:solidFill>
-                <a:latin typeface="Calibri" pitchFamily="34" charset="0"/>
-                <a:ea typeface="Calibri" pitchFamily="34" charset="-122"/>
-                <a:cs typeface="Calibri" pitchFamily="34" charset="-120"/>
-              </a:rPr>
-              <a:t>yu-ai-code-screenshot</a:t>
-            </a:r>
-            <a:endParaRPr lang="en-US" sz="1200" dirty="0"/>
-          </a:p>
-        </p:txBody>
-      </p:sp>
-      <p:sp>
-        <p:nvSpPr>
-          <p:cNvPr id="25" name="Text 23"/>
-          <p:cNvSpPr/>
-          <p:nvPr/>
-        </p:nvSpPr>
-        <p:spPr>
-          <a:xfrm>
-            <a:off x="7498080" y="3026664"/>
-            <a:ext cx="1005840" cy="320040"/>
-          </a:xfrm>
-          <a:prstGeom prst="rect">
-            <a:avLst/>
-          </a:prstGeom>
-          <a:noFill/>
-          <a:ln/>
-        </p:spPr>
-        <p:txBody>
-          <a:bodyPr wrap="square" lIns="0" tIns="0" rIns="0" bIns="0" rtlCol="0" anchor="ctr"/>
-          <a:lstStyle/>
-          <a:p>
-            <a:pPr indent="0" marL="0">
-              <a:buNone/>
-            </a:pPr>
-            <a:r>
-              <a:rPr lang="en-US" sz="1200" dirty="0">
-                <a:solidFill>
-                  <a:srgbClr val="5A6F76"/>
-                </a:solidFill>
-                <a:latin typeface="Calibri" pitchFamily="34" charset="0"/>
-                <a:ea typeface="Calibri" pitchFamily="34" charset="-122"/>
-                <a:cs typeface="Calibri" pitchFamily="34" charset="-120"/>
-              </a:rPr>
-              <a:t>截图服务</a:t>
-            </a:r>
-            <a:endParaRPr lang="en-US" sz="1200" dirty="0"/>
-          </a:p>
-        </p:txBody>
-      </p:sp>
-      <p:sp>
-        <p:nvSpPr>
-          <p:cNvPr id="26" name="Shape 24"/>
-          <p:cNvSpPr/>
-          <p:nvPr/>
-        </p:nvSpPr>
-        <p:spPr>
-          <a:xfrm>
-            <a:off x="4892040" y="3429000"/>
-            <a:ext cx="347472" cy="347472"/>
+          <p:cNvPr id="22" name="Shape 20"/>
+          <p:cNvSpPr/>
+          <p:nvPr/>
+        </p:nvSpPr>
+        <p:spPr>
+          <a:xfrm>
+            <a:off x="4983480" y="2898648"/>
+            <a:ext cx="292608" cy="292608"/>
           </a:xfrm>
           <a:prstGeom prst="ellipse">
             <a:avLst/>
@@ -6278,14 +6192,14 @@
       </p:sp>
       <p:sp>
         <p:nvSpPr>
-          <p:cNvPr id="27" name="Text 25"/>
-          <p:cNvSpPr/>
-          <p:nvPr/>
-        </p:nvSpPr>
-        <p:spPr>
-          <a:xfrm>
-            <a:off x="5394960" y="3410712"/>
-            <a:ext cx="2103120" cy="320040"/>
+          <p:cNvPr id="23" name="Text 21"/>
+          <p:cNvSpPr/>
+          <p:nvPr/>
+        </p:nvSpPr>
+        <p:spPr>
+          <a:xfrm>
+            <a:off x="5440680" y="2880360"/>
+            <a:ext cx="2194560" cy="292608"/>
           </a:xfrm>
           <a:prstGeom prst="rect">
             <a:avLst/>
@@ -6309,7 +6223,7 @@
                 <a:ea typeface="Calibri" pitchFamily="34" charset="-122"/>
                 <a:cs typeface="Calibri" pitchFamily="34" charset="-120"/>
               </a:rPr>
-              <a:t>yu-ai-code-client</a:t>
+              <a:t>yu-ai-code-screenshot</a:t>
             </a:r>
             <a:endParaRPr lang="en-US" sz="1200" dirty="0"/>
           </a:p>
@@ -6317,14 +6231,14 @@
       </p:sp>
       <p:sp>
         <p:nvSpPr>
-          <p:cNvPr id="28" name="Text 26"/>
-          <p:cNvSpPr/>
-          <p:nvPr/>
-        </p:nvSpPr>
-        <p:spPr>
-          <a:xfrm>
-            <a:off x="7498080" y="3410712"/>
-            <a:ext cx="1005840" cy="320040"/>
+          <p:cNvPr id="24" name="Text 22"/>
+          <p:cNvSpPr/>
+          <p:nvPr/>
+        </p:nvSpPr>
+        <p:spPr>
+          <a:xfrm>
+            <a:off x="7635240" y="2880360"/>
+            <a:ext cx="914400" cy="292608"/>
           </a:xfrm>
           <a:prstGeom prst="rect">
             <a:avLst/>
@@ -6342,13 +6256,13 @@
             <a:r>
               <a:rPr lang="en-US" sz="1200" dirty="0">
                 <a:solidFill>
-                  <a:srgbClr val="5A6F76"/>
-                </a:solidFill>
-                <a:latin typeface="Calibri" pitchFamily="34" charset="0"/>
-                <a:ea typeface="Calibri" pitchFamily="34" charset="-122"/>
-                <a:cs typeface="Calibri" pitchFamily="34" charset="-120"/>
-              </a:rPr>
-              <a:t>RPC 接口</a:t>
+                  <a:srgbClr val="3D555C"/>
+                </a:solidFill>
+                <a:latin typeface="Calibri" pitchFamily="34" charset="0"/>
+                <a:ea typeface="Calibri" pitchFamily="34" charset="-122"/>
+                <a:cs typeface="Calibri" pitchFamily="34" charset="-120"/>
+              </a:rPr>
+              <a:t>截图服务</a:t>
             </a:r>
             <a:endParaRPr lang="en-US" sz="1200" dirty="0"/>
           </a:p>
@@ -6356,24 +6270,24 @@
       </p:sp>
       <p:sp>
         <p:nvSpPr>
-          <p:cNvPr id="29" name="Shape 27"/>
-          <p:cNvSpPr/>
-          <p:nvPr/>
-        </p:nvSpPr>
-        <p:spPr>
-          <a:xfrm>
-            <a:off x="4892040" y="3813048"/>
-            <a:ext cx="347472" cy="347472"/>
+          <p:cNvPr id="25" name="Shape 23"/>
+          <p:cNvSpPr/>
+          <p:nvPr/>
+        </p:nvSpPr>
+        <p:spPr>
+          <a:xfrm>
+            <a:off x="4983480" y="3264408"/>
+            <a:ext cx="292608" cy="292608"/>
           </a:xfrm>
           <a:prstGeom prst="ellipse">
             <a:avLst/>
           </a:prstGeom>
           <a:solidFill>
-            <a:srgbClr val="02C39A"/>
+            <a:srgbClr val="028090"/>
           </a:solidFill>
           <a:ln w="12700">
             <a:solidFill>
-              <a:srgbClr val="02C39A"/>
+              <a:srgbClr val="028090"/>
             </a:solidFill>
             <a:prstDash val="solid"/>
           </a:ln>
@@ -6381,14 +6295,220 @@
       </p:sp>
       <p:sp>
         <p:nvSpPr>
+          <p:cNvPr id="26" name="Text 24"/>
+          <p:cNvSpPr/>
+          <p:nvPr/>
+        </p:nvSpPr>
+        <p:spPr>
+          <a:xfrm>
+            <a:off x="5440680" y="3246120"/>
+            <a:ext cx="2194560" cy="292608"/>
+          </a:xfrm>
+          <a:prstGeom prst="rect">
+            <a:avLst/>
+          </a:prstGeom>
+          <a:noFill/>
+          <a:ln/>
+        </p:spPr>
+        <p:txBody>
+          <a:bodyPr wrap="square" lIns="0" tIns="0" rIns="0" bIns="0" rtlCol="0" anchor="ctr"/>
+          <a:lstStyle/>
+          <a:p>
+            <a:pPr indent="0" marL="0">
+              <a:buNone/>
+            </a:pPr>
+            <a:r>
+              <a:rPr lang="en-US" sz="1200" b="1" dirty="0">
+                <a:solidFill>
+                  <a:srgbClr val="014F5E"/>
+                </a:solidFill>
+                <a:latin typeface="Calibri" pitchFamily="34" charset="0"/>
+                <a:ea typeface="Calibri" pitchFamily="34" charset="-122"/>
+                <a:cs typeface="Calibri" pitchFamily="34" charset="-120"/>
+              </a:rPr>
+              <a:t>yu-ai-code-client</a:t>
+            </a:r>
+            <a:endParaRPr lang="en-US" sz="1200" dirty="0"/>
+          </a:p>
+        </p:txBody>
+      </p:sp>
+      <p:sp>
+        <p:nvSpPr>
+          <p:cNvPr id="27" name="Text 25"/>
+          <p:cNvSpPr/>
+          <p:nvPr/>
+        </p:nvSpPr>
+        <p:spPr>
+          <a:xfrm>
+            <a:off x="7635240" y="3246120"/>
+            <a:ext cx="914400" cy="292608"/>
+          </a:xfrm>
+          <a:prstGeom prst="rect">
+            <a:avLst/>
+          </a:prstGeom>
+          <a:noFill/>
+          <a:ln/>
+        </p:spPr>
+        <p:txBody>
+          <a:bodyPr wrap="square" lIns="0" tIns="0" rIns="0" bIns="0" rtlCol="0" anchor="ctr"/>
+          <a:lstStyle/>
+          <a:p>
+            <a:pPr indent="0" marL="0">
+              <a:buNone/>
+            </a:pPr>
+            <a:r>
+              <a:rPr lang="en-US" sz="1200" dirty="0">
+                <a:solidFill>
+                  <a:srgbClr val="3D555C"/>
+                </a:solidFill>
+                <a:latin typeface="Calibri" pitchFamily="34" charset="0"/>
+                <a:ea typeface="Calibri" pitchFamily="34" charset="-122"/>
+                <a:cs typeface="Calibri" pitchFamily="34" charset="-120"/>
+              </a:rPr>
+              <a:t>RPC 接口</a:t>
+            </a:r>
+            <a:endParaRPr lang="en-US" sz="1200" dirty="0"/>
+          </a:p>
+        </p:txBody>
+      </p:sp>
+      <p:sp>
+        <p:nvSpPr>
+          <p:cNvPr id="28" name="Shape 26"/>
+          <p:cNvSpPr/>
+          <p:nvPr/>
+        </p:nvSpPr>
+        <p:spPr>
+          <a:xfrm>
+            <a:off x="4983480" y="3630168"/>
+            <a:ext cx="292608" cy="292608"/>
+          </a:xfrm>
+          <a:prstGeom prst="ellipse">
+            <a:avLst/>
+          </a:prstGeom>
+          <a:solidFill>
+            <a:srgbClr val="028090"/>
+          </a:solidFill>
+          <a:ln w="12700">
+            <a:solidFill>
+              <a:srgbClr val="028090"/>
+            </a:solidFill>
+            <a:prstDash val="solid"/>
+          </a:ln>
+        </p:spPr>
+      </p:sp>
+      <p:sp>
+        <p:nvSpPr>
+          <p:cNvPr id="29" name="Text 27"/>
+          <p:cNvSpPr/>
+          <p:nvPr/>
+        </p:nvSpPr>
+        <p:spPr>
+          <a:xfrm>
+            <a:off x="5440680" y="3611880"/>
+            <a:ext cx="2194560" cy="292608"/>
+          </a:xfrm>
+          <a:prstGeom prst="rect">
+            <a:avLst/>
+          </a:prstGeom>
+          <a:noFill/>
+          <a:ln/>
+        </p:spPr>
+        <p:txBody>
+          <a:bodyPr wrap="square" lIns="0" tIns="0" rIns="0" bIns="0" rtlCol="0" anchor="ctr"/>
+          <a:lstStyle/>
+          <a:p>
+            <a:pPr indent="0" marL="0">
+              <a:buNone/>
+            </a:pPr>
+            <a:r>
+              <a:rPr lang="en-US" sz="1200" b="1" dirty="0">
+                <a:solidFill>
+                  <a:srgbClr val="014F5E"/>
+                </a:solidFill>
+                <a:latin typeface="Calibri" pitchFamily="34" charset="0"/>
+                <a:ea typeface="Calibri" pitchFamily="34" charset="-122"/>
+                <a:cs typeface="Calibri" pitchFamily="34" charset="-120"/>
+              </a:rPr>
+              <a:t>yu-ai-code-common</a:t>
+            </a:r>
+            <a:endParaRPr lang="en-US" sz="1200" dirty="0"/>
+          </a:p>
+        </p:txBody>
+      </p:sp>
+      <p:sp>
+        <p:nvSpPr>
           <p:cNvPr id="30" name="Text 28"/>
           <p:cNvSpPr/>
           <p:nvPr/>
         </p:nvSpPr>
         <p:spPr>
           <a:xfrm>
-            <a:off x="5394960" y="3794760"/>
-            <a:ext cx="2103120" cy="320040"/>
+            <a:off x="7635240" y="3611880"/>
+            <a:ext cx="914400" cy="292608"/>
+          </a:xfrm>
+          <a:prstGeom prst="rect">
+            <a:avLst/>
+          </a:prstGeom>
+          <a:noFill/>
+          <a:ln/>
+        </p:spPr>
+        <p:txBody>
+          <a:bodyPr wrap="square" lIns="0" tIns="0" rIns="0" bIns="0" rtlCol="0" anchor="ctr"/>
+          <a:lstStyle/>
+          <a:p>
+            <a:pPr indent="0" marL="0">
+              <a:buNone/>
+            </a:pPr>
+            <a:r>
+              <a:rPr lang="en-US" sz="1200" dirty="0">
+                <a:solidFill>
+                  <a:srgbClr val="3D555C"/>
+                </a:solidFill>
+                <a:latin typeface="Calibri" pitchFamily="34" charset="0"/>
+                <a:ea typeface="Calibri" pitchFamily="34" charset="-122"/>
+                <a:cs typeface="Calibri" pitchFamily="34" charset="-120"/>
+              </a:rPr>
+              <a:t>通用能力</a:t>
+            </a:r>
+            <a:endParaRPr lang="en-US" sz="1200" dirty="0"/>
+          </a:p>
+        </p:txBody>
+      </p:sp>
+      <p:sp>
+        <p:nvSpPr>
+          <p:cNvPr id="31" name="Shape 29"/>
+          <p:cNvSpPr/>
+          <p:nvPr/>
+        </p:nvSpPr>
+        <p:spPr>
+          <a:xfrm>
+            <a:off x="4983480" y="3995928"/>
+            <a:ext cx="292608" cy="292608"/>
+          </a:xfrm>
+          <a:prstGeom prst="ellipse">
+            <a:avLst/>
+          </a:prstGeom>
+          <a:solidFill>
+            <a:srgbClr val="028090"/>
+          </a:solidFill>
+          <a:ln w="12700">
+            <a:solidFill>
+              <a:srgbClr val="028090"/>
+            </a:solidFill>
+            <a:prstDash val="solid"/>
+          </a:ln>
+        </p:spPr>
+      </p:sp>
+      <p:sp>
+        <p:nvSpPr>
+          <p:cNvPr id="32" name="Text 30"/>
+          <p:cNvSpPr/>
+          <p:nvPr/>
+        </p:nvSpPr>
+        <p:spPr>
+          <a:xfrm>
+            <a:off x="5440680" y="3977640"/>
+            <a:ext cx="2194560" cy="292608"/>
           </a:xfrm>
           <a:prstGeom prst="rect">
             <a:avLst/>
@@ -6412,7 +6532,7 @@
                 <a:ea typeface="Calibri" pitchFamily="34" charset="-122"/>
                 <a:cs typeface="Calibri" pitchFamily="34" charset="-120"/>
               </a:rPr>
-              <a:t>common / model</a:t>
+              <a:t>yu-ai-code-model</a:t>
             </a:r>
             <a:endParaRPr lang="en-US" sz="1200" dirty="0"/>
           </a:p>
@@ -6420,14 +6540,14 @@
       </p:sp>
       <p:sp>
         <p:nvSpPr>
-          <p:cNvPr id="31" name="Text 29"/>
-          <p:cNvSpPr/>
-          <p:nvPr/>
-        </p:nvSpPr>
-        <p:spPr>
-          <a:xfrm>
-            <a:off x="7498080" y="3794760"/>
-            <a:ext cx="1005840" cy="320040"/>
+          <p:cNvPr id="33" name="Text 31"/>
+          <p:cNvSpPr/>
+          <p:nvPr/>
+        </p:nvSpPr>
+        <p:spPr>
+          <a:xfrm>
+            <a:off x="7635240" y="3977640"/>
+            <a:ext cx="914400" cy="292608"/>
           </a:xfrm>
           <a:prstGeom prst="rect">
             <a:avLst/>
@@ -6445,13 +6565,13 @@
             <a:r>
               <a:rPr lang="en-US" sz="1200" dirty="0">
                 <a:solidFill>
-                  <a:srgbClr val="5A6F76"/>
-                </a:solidFill>
-                <a:latin typeface="Calibri" pitchFamily="34" charset="0"/>
-                <a:ea typeface="Calibri" pitchFamily="34" charset="-122"/>
-                <a:cs typeface="Calibri" pitchFamily="34" charset="-120"/>
-              </a:rPr>
-              <a:t>通用与模型</a:t>
+                  <a:srgbClr val="3D555C"/>
+                </a:solidFill>
+                <a:latin typeface="Calibri" pitchFamily="34" charset="0"/>
+                <a:ea typeface="Calibri" pitchFamily="34" charset="-122"/>
+                <a:cs typeface="Calibri" pitchFamily="34" charset="-120"/>
+              </a:rPr>
+              <a:t>数据模型</a:t>
             </a:r>
             <a:endParaRPr lang="en-US" sz="1200" dirty="0"/>
           </a:p>
@@ -6459,13 +6579,13 @@
       </p:sp>
       <p:sp>
         <p:nvSpPr>
-          <p:cNvPr id="32" name="Text 30"/>
-          <p:cNvSpPr/>
-          <p:nvPr/>
-        </p:nvSpPr>
-        <p:spPr>
-          <a:xfrm>
-            <a:off x="457200" y="4828032"/>
+          <p:cNvPr id="34" name="Text 32"/>
+          <p:cNvSpPr/>
+          <p:nvPr/>
+        </p:nvSpPr>
+        <p:spPr>
+          <a:xfrm>
+            <a:off x="457200" y="4800600"/>
             <a:ext cx="6858000" cy="256032"/>
           </a:xfrm>
           <a:prstGeom prst="rect">
@@ -6484,7 +6604,7 @@
             <a:r>
               <a:rPr lang="en-US" sz="1000" dirty="0">
                 <a:solidFill>
-                  <a:srgbClr val="5A6F76"/>
+                  <a:srgbClr val="3D555C"/>
                 </a:solidFill>
                 <a:latin typeface="Calibri" pitchFamily="34" charset="0"/>
                 <a:ea typeface="Calibri" pitchFamily="34" charset="-122"/>
@@ -6498,13 +6618,13 @@
       </p:sp>
       <p:sp>
         <p:nvSpPr>
-          <p:cNvPr id="33" name="Text 31"/>
-          <p:cNvSpPr/>
-          <p:nvPr/>
-        </p:nvSpPr>
-        <p:spPr>
-          <a:xfrm>
-            <a:off x="7772400" y="4828032"/>
+          <p:cNvPr id="35" name="Text 33"/>
+          <p:cNvSpPr/>
+          <p:nvPr/>
+        </p:nvSpPr>
+        <p:spPr>
+          <a:xfrm>
+            <a:off x="7772400" y="4800600"/>
             <a:ext cx="914400" cy="256032"/>
           </a:xfrm>
           <a:prstGeom prst="rect">
@@ -6523,7 +6643,7 @@
             <a:r>
               <a:rPr lang="en-US" sz="1000" dirty="0">
                 <a:solidFill>
-                  <a:srgbClr val="5A6F76"/>
+                  <a:srgbClr val="3D555C"/>
                 </a:solidFill>
                 <a:latin typeface="Calibri" pitchFamily="34" charset="0"/>
                 <a:ea typeface="Calibri" pitchFamily="34" charset="-122"/>
@@ -6594,7 +6714,7 @@
         <p:spPr>
           <a:xfrm>
             <a:off x="0" y="0"/>
-            <a:ext cx="9144000" cy="109728"/>
+            <a:ext cx="9144000" cy="91440"/>
           </a:xfrm>
           <a:prstGeom prst="rect">
             <a:avLst/>
@@ -6612,39 +6732,14 @@
       </p:sp>
       <p:sp>
         <p:nvSpPr>
-          <p:cNvPr id="4" name="Shape 2"/>
-          <p:cNvSpPr/>
-          <p:nvPr/>
-        </p:nvSpPr>
-        <p:spPr>
-          <a:xfrm>
-            <a:off x="0" y="109728"/>
-            <a:ext cx="109728" cy="5033772"/>
-          </a:xfrm>
-          <a:prstGeom prst="rect">
-            <a:avLst/>
-          </a:prstGeom>
-          <a:solidFill>
-            <a:srgbClr val="00A896"/>
-          </a:solidFill>
-          <a:ln w="12700">
-            <a:solidFill>
-              <a:srgbClr val="00A896"/>
-            </a:solidFill>
-            <a:prstDash val="solid"/>
-          </a:ln>
-        </p:spPr>
-      </p:sp>
-      <p:sp>
-        <p:nvSpPr>
-          <p:cNvPr id="5" name="Text 3"/>
+          <p:cNvPr id="4" name="Text 2"/>
           <p:cNvSpPr/>
           <p:nvPr/>
         </p:nvSpPr>
         <p:spPr>
           <a:xfrm>
             <a:off x="457200" y="256032"/>
-            <a:ext cx="8229600" cy="502920"/>
+            <a:ext cx="8229600" cy="457200"/>
           </a:xfrm>
           <a:prstGeom prst="rect">
             <a:avLst/>
@@ -6676,14 +6771,14 @@
       </p:sp>
       <p:sp>
         <p:nvSpPr>
-          <p:cNvPr id="6" name="Text 4"/>
-          <p:cNvSpPr/>
-          <p:nvPr/>
-        </p:nvSpPr>
-        <p:spPr>
-          <a:xfrm>
-            <a:off x="457200" y="749808"/>
-            <a:ext cx="8229600" cy="292608"/>
+          <p:cNvPr id="5" name="Text 3"/>
+          <p:cNvSpPr/>
+          <p:nvPr/>
+        </p:nvSpPr>
+        <p:spPr>
+          <a:xfrm>
+            <a:off x="457200" y="713232"/>
+            <a:ext cx="8229600" cy="274320"/>
           </a:xfrm>
           <a:prstGeom prst="rect">
             <a:avLst/>
@@ -6701,13 +6796,13 @@
             <a:r>
               <a:rPr lang="en-US" sz="1300" i="1" dirty="0">
                 <a:solidFill>
-                  <a:srgbClr val="5A6F76"/>
-                </a:solidFill>
-                <a:latin typeface="Calibri" pitchFamily="34" charset="0"/>
-                <a:ea typeface="Calibri" pitchFamily="34" charset="-122"/>
-                <a:cs typeface="Calibri" pitchFamily="34" charset="-120"/>
-              </a:rPr>
-              <a:t>运行指标尚未接入日报流水线，以下为可观测能力与待补齐项</a:t>
+                  <a:srgbClr val="3D555C"/>
+                </a:solidFill>
+                <a:latin typeface="Calibri" pitchFamily="34" charset="0"/>
+                <a:ea typeface="Calibri" pitchFamily="34" charset="-122"/>
+                <a:cs typeface="Calibri" pitchFamily="34" charset="-120"/>
+              </a:rPr>
+              <a:t>运行指标尚未接入日报流水线；以下为仓库侧可量化快照</a:t>
             </a:r>
             <a:endParaRPr lang="en-US" sz="1300" dirty="0"/>
           </a:p>
@@ -6715,18 +6810,18 @@
       </p:sp>
       <p:sp>
         <p:nvSpPr>
-          <p:cNvPr id="7" name="Shape 5"/>
-          <p:cNvSpPr/>
-          <p:nvPr/>
-        </p:nvSpPr>
-        <p:spPr>
-          <a:xfrm>
-            <a:off x="457200" y="1234440"/>
-            <a:ext cx="2011680" cy="1691640"/>
+          <p:cNvPr id="6" name="Shape 4"/>
+          <p:cNvSpPr/>
+          <p:nvPr/>
+        </p:nvSpPr>
+        <p:spPr>
+          <a:xfrm>
+            <a:off x="457200" y="1143000"/>
+            <a:ext cx="2011680" cy="1737360"/>
           </a:xfrm>
           <a:prstGeom prst="roundRect">
             <a:avLst>
-              <a:gd name="adj" fmla="val 5405"/>
+              <a:gd name="adj" fmla="val 5263"/>
             </a:avLst>
           </a:prstGeom>
           <a:solidFill>
@@ -6744,13 +6839,13 @@
       </p:sp>
       <p:sp>
         <p:nvSpPr>
-          <p:cNvPr id="8" name="Text 6"/>
-          <p:cNvSpPr/>
-          <p:nvPr/>
-        </p:nvSpPr>
-        <p:spPr>
-          <a:xfrm>
-            <a:off x="457200" y="1417320"/>
+          <p:cNvPr id="7" name="Text 5"/>
+          <p:cNvSpPr/>
+          <p:nvPr/>
+        </p:nvSpPr>
+        <p:spPr>
+          <a:xfrm>
+            <a:off x="457200" y="1325880"/>
             <a:ext cx="2011680" cy="640080"/>
           </a:xfrm>
           <a:prstGeom prst="rect">
@@ -6783,14 +6878,53 @@
       </p:sp>
       <p:sp>
         <p:nvSpPr>
+          <p:cNvPr id="8" name="Text 6"/>
+          <p:cNvSpPr/>
+          <p:nvPr/>
+        </p:nvSpPr>
+        <p:spPr>
+          <a:xfrm>
+            <a:off x="548640" y="2057400"/>
+            <a:ext cx="1828800" cy="320040"/>
+          </a:xfrm>
+          <a:prstGeom prst="rect">
+            <a:avLst/>
+          </a:prstGeom>
+          <a:noFill/>
+          <a:ln/>
+        </p:spPr>
+        <p:txBody>
+          <a:bodyPr wrap="square" lIns="0" tIns="0" rIns="0" bIns="0" rtlCol="0" anchor="ctr"/>
+          <a:lstStyle/>
+          <a:p>
+            <a:pPr algn="ctr" indent="0" marL="0">
+              <a:buNone/>
+            </a:pPr>
+            <a:r>
+              <a:rPr lang="en-US" sz="1300" b="1" dirty="0">
+                <a:solidFill>
+                  <a:srgbClr val="014F5E"/>
+                </a:solidFill>
+                <a:latin typeface="Calibri" pitchFamily="34" charset="0"/>
+                <a:ea typeface="Calibri" pitchFamily="34" charset="-122"/>
+                <a:cs typeface="Calibri" pitchFamily="34" charset="-120"/>
+              </a:rPr>
+              <a:t>单元/集成测试类</a:t>
+            </a:r>
+            <a:endParaRPr lang="en-US" sz="1300" dirty="0"/>
+          </a:p>
+        </p:txBody>
+      </p:sp>
+      <p:sp>
+        <p:nvSpPr>
           <p:cNvPr id="9" name="Text 7"/>
           <p:cNvSpPr/>
           <p:nvPr/>
         </p:nvSpPr>
         <p:spPr>
           <a:xfrm>
-            <a:off x="548640" y="2103120"/>
-            <a:ext cx="1828800" cy="320040"/>
+            <a:off x="548640" y="2423160"/>
+            <a:ext cx="1828800" cy="274320"/>
           </a:xfrm>
           <a:prstGeom prst="rect">
             <a:avLst/>
@@ -6806,73 +6940,34 @@
               <a:buNone/>
             </a:pPr>
             <a:r>
-              <a:rPr lang="en-US" sz="1300" b="1" dirty="0">
-                <a:solidFill>
-                  <a:srgbClr val="014F5E"/>
-                </a:solidFill>
-                <a:latin typeface="Calibri" pitchFamily="34" charset="0"/>
-                <a:ea typeface="Calibri" pitchFamily="34" charset="-122"/>
-                <a:cs typeface="Calibri" pitchFamily="34" charset="-120"/>
-              </a:rPr>
-              <a:t>单元/集成测试类</a:t>
-            </a:r>
-            <a:endParaRPr lang="en-US" sz="1300" dirty="0"/>
-          </a:p>
-        </p:txBody>
-      </p:sp>
-      <p:sp>
-        <p:nvSpPr>
-          <p:cNvPr id="10" name="Text 8"/>
-          <p:cNvSpPr/>
-          <p:nvPr/>
-        </p:nvSpPr>
-        <p:spPr>
-          <a:xfrm>
-            <a:off x="548640" y="2423160"/>
-            <a:ext cx="1828800" cy="320040"/>
-          </a:xfrm>
-          <a:prstGeom prst="rect">
-            <a:avLst/>
-          </a:prstGeom>
-          <a:noFill/>
-          <a:ln/>
-        </p:spPr>
-        <p:txBody>
-          <a:bodyPr wrap="square" lIns="0" tIns="0" rIns="0" bIns="0" rtlCol="0" anchor="ctr"/>
-          <a:lstStyle/>
-          <a:p>
-            <a:pPr algn="ctr" indent="0" marL="0">
-              <a:buNone/>
-            </a:pPr>
-            <a:r>
-              <a:rPr lang="en-US" sz="1100" dirty="0">
-                <a:solidFill>
-                  <a:srgbClr val="5A6F76"/>
-                </a:solidFill>
-                <a:latin typeface="Calibri" pitchFamily="34" charset="0"/>
-                <a:ea typeface="Calibri" pitchFamily="34" charset="-122"/>
-                <a:cs typeface="Calibri" pitchFamily="34" charset="-120"/>
-              </a:rPr>
-              <a:t>单体侧已覆盖核心链路</a:t>
-            </a:r>
-            <a:endParaRPr lang="en-US" sz="1100" dirty="0"/>
-          </a:p>
-        </p:txBody>
-      </p:sp>
-      <p:sp>
-        <p:nvSpPr>
-          <p:cNvPr id="11" name="Shape 9"/>
-          <p:cNvSpPr/>
-          <p:nvPr/>
-        </p:nvSpPr>
-        <p:spPr>
-          <a:xfrm>
-            <a:off x="2606040" y="1234440"/>
-            <a:ext cx="2011680" cy="1691640"/>
+              <a:rPr lang="en-US" sz="1200" dirty="0">
+                <a:solidFill>
+                  <a:srgbClr val="3D555C"/>
+                </a:solidFill>
+                <a:latin typeface="Calibri" pitchFamily="34" charset="0"/>
+                <a:ea typeface="Calibri" pitchFamily="34" charset="-122"/>
+                <a:cs typeface="Calibri" pitchFamily="34" charset="-120"/>
+              </a:rPr>
+              <a:t>单体侧覆盖核心链路</a:t>
+            </a:r>
+            <a:endParaRPr lang="en-US" sz="1200" dirty="0"/>
+          </a:p>
+        </p:txBody>
+      </p:sp>
+      <p:sp>
+        <p:nvSpPr>
+          <p:cNvPr id="10" name="Shape 8"/>
+          <p:cNvSpPr/>
+          <p:nvPr/>
+        </p:nvSpPr>
+        <p:spPr>
+          <a:xfrm>
+            <a:off x="2628900" y="1143000"/>
+            <a:ext cx="2011680" cy="1737360"/>
           </a:xfrm>
           <a:prstGeom prst="roundRect">
             <a:avLst>
-              <a:gd name="adj" fmla="val 5405"/>
+              <a:gd name="adj" fmla="val 5263"/>
             </a:avLst>
           </a:prstGeom>
           <a:solidFill>
@@ -6890,13 +6985,13 @@
       </p:sp>
       <p:sp>
         <p:nvSpPr>
-          <p:cNvPr id="12" name="Text 10"/>
-          <p:cNvSpPr/>
-          <p:nvPr/>
-        </p:nvSpPr>
-        <p:spPr>
-          <a:xfrm>
-            <a:off x="2606040" y="1417320"/>
+          <p:cNvPr id="11" name="Text 9"/>
+          <p:cNvSpPr/>
+          <p:nvPr/>
+        </p:nvSpPr>
+        <p:spPr>
+          <a:xfrm>
+            <a:off x="2628900" y="1325880"/>
             <a:ext cx="2011680" cy="640080"/>
           </a:xfrm>
           <a:prstGeom prst="rect">
@@ -6929,14 +7024,53 @@
       </p:sp>
       <p:sp>
         <p:nvSpPr>
+          <p:cNvPr id="12" name="Text 10"/>
+          <p:cNvSpPr/>
+          <p:nvPr/>
+        </p:nvSpPr>
+        <p:spPr>
+          <a:xfrm>
+            <a:off x="2720340" y="2057400"/>
+            <a:ext cx="1828800" cy="320040"/>
+          </a:xfrm>
+          <a:prstGeom prst="rect">
+            <a:avLst/>
+          </a:prstGeom>
+          <a:noFill/>
+          <a:ln/>
+        </p:spPr>
+        <p:txBody>
+          <a:bodyPr wrap="square" lIns="0" tIns="0" rIns="0" bIns="0" rtlCol="0" anchor="ctr"/>
+          <a:lstStyle/>
+          <a:p>
+            <a:pPr algn="ctr" indent="0" marL="0">
+              <a:buNone/>
+            </a:pPr>
+            <a:r>
+              <a:rPr lang="en-US" sz="1300" b="1" dirty="0">
+                <a:solidFill>
+                  <a:srgbClr val="014F5E"/>
+                </a:solidFill>
+                <a:latin typeface="Calibri" pitchFamily="34" charset="0"/>
+                <a:ea typeface="Calibri" pitchFamily="34" charset="-122"/>
+                <a:cs typeface="Calibri" pitchFamily="34" charset="-120"/>
+              </a:rPr>
+              <a:t>微服务模块</a:t>
+            </a:r>
+            <a:endParaRPr lang="en-US" sz="1300" dirty="0"/>
+          </a:p>
+        </p:txBody>
+      </p:sp>
+      <p:sp>
+        <p:nvSpPr>
           <p:cNvPr id="13" name="Text 11"/>
           <p:cNvSpPr/>
           <p:nvPr/>
         </p:nvSpPr>
         <p:spPr>
           <a:xfrm>
-            <a:off x="2697480" y="2103120"/>
-            <a:ext cx="1828800" cy="320040"/>
+            <a:off x="2720340" y="2423160"/>
+            <a:ext cx="1828800" cy="274320"/>
           </a:xfrm>
           <a:prstGeom prst="rect">
             <a:avLst/>
@@ -6952,48 +7086,9 @@
               <a:buNone/>
             </a:pPr>
             <a:r>
-              <a:rPr lang="en-US" sz="1300" b="1" dirty="0">
-                <a:solidFill>
-                  <a:srgbClr val="014F5E"/>
-                </a:solidFill>
-                <a:latin typeface="Calibri" pitchFamily="34" charset="0"/>
-                <a:ea typeface="Calibri" pitchFamily="34" charset="-122"/>
-                <a:cs typeface="Calibri" pitchFamily="34" charset="-120"/>
-              </a:rPr>
-              <a:t>微服务模块</a:t>
-            </a:r>
-            <a:endParaRPr lang="en-US" sz="1300" dirty="0"/>
-          </a:p>
-        </p:txBody>
-      </p:sp>
-      <p:sp>
-        <p:nvSpPr>
-          <p:cNvPr id="14" name="Text 12"/>
-          <p:cNvSpPr/>
-          <p:nvPr/>
-        </p:nvSpPr>
-        <p:spPr>
-          <a:xfrm>
-            <a:off x="2697480" y="2423160"/>
-            <a:ext cx="1828800" cy="320040"/>
-          </a:xfrm>
-          <a:prstGeom prst="rect">
-            <a:avLst/>
-          </a:prstGeom>
-          <a:noFill/>
-          <a:ln/>
-        </p:spPr>
-        <p:txBody>
-          <a:bodyPr wrap="square" lIns="0" tIns="0" rIns="0" bIns="0" rtlCol="0" anchor="ctr"/>
-          <a:lstStyle/>
-          <a:p>
-            <a:pPr algn="ctr" indent="0" marL="0">
-              <a:buNone/>
-            </a:pPr>
-            <a:r>
-              <a:rPr lang="en-US" sz="1100" dirty="0">
-                <a:solidFill>
-                  <a:srgbClr val="5A6F76"/>
+              <a:rPr lang="en-US" sz="1200" dirty="0">
+                <a:solidFill>
+                  <a:srgbClr val="3D555C"/>
                 </a:solidFill>
                 <a:latin typeface="Calibri" pitchFamily="34" charset="0"/>
                 <a:ea typeface="Calibri" pitchFamily="34" charset="-122"/>
@@ -7001,24 +7096,24 @@
               </a:rPr>
               <a:t>Dubbo + Nacos 跨服务</a:t>
             </a:r>
-            <a:endParaRPr lang="en-US" sz="1100" dirty="0"/>
-          </a:p>
-        </p:txBody>
-      </p:sp>
-      <p:sp>
-        <p:nvSpPr>
-          <p:cNvPr id="15" name="Shape 13"/>
-          <p:cNvSpPr/>
-          <p:nvPr/>
-        </p:nvSpPr>
-        <p:spPr>
-          <a:xfrm>
-            <a:off x="4754880" y="1234440"/>
-            <a:ext cx="2011680" cy="1691640"/>
+            <a:endParaRPr lang="en-US" sz="1200" dirty="0"/>
+          </a:p>
+        </p:txBody>
+      </p:sp>
+      <p:sp>
+        <p:nvSpPr>
+          <p:cNvPr id="14" name="Shape 12"/>
+          <p:cNvSpPr/>
+          <p:nvPr/>
+        </p:nvSpPr>
+        <p:spPr>
+          <a:xfrm>
+            <a:off x="4800600" y="1143000"/>
+            <a:ext cx="2011680" cy="1737360"/>
           </a:xfrm>
           <a:prstGeom prst="roundRect">
             <a:avLst>
-              <a:gd name="adj" fmla="val 5405"/>
+              <a:gd name="adj" fmla="val 5263"/>
             </a:avLst>
           </a:prstGeom>
           <a:solidFill>
@@ -7036,13 +7131,13 @@
       </p:sp>
       <p:sp>
         <p:nvSpPr>
-          <p:cNvPr id="16" name="Text 14"/>
-          <p:cNvSpPr/>
-          <p:nvPr/>
-        </p:nvSpPr>
-        <p:spPr>
-          <a:xfrm>
-            <a:off x="4754880" y="1417320"/>
+          <p:cNvPr id="15" name="Text 13"/>
+          <p:cNvSpPr/>
+          <p:nvPr/>
+        </p:nvSpPr>
+        <p:spPr>
+          <a:xfrm>
+            <a:off x="4800600" y="1325880"/>
             <a:ext cx="2011680" cy="640080"/>
           </a:xfrm>
           <a:prstGeom prst="rect">
@@ -7075,14 +7170,53 @@
       </p:sp>
       <p:sp>
         <p:nvSpPr>
+          <p:cNvPr id="16" name="Text 14"/>
+          <p:cNvSpPr/>
+          <p:nvPr/>
+        </p:nvSpPr>
+        <p:spPr>
+          <a:xfrm>
+            <a:off x="4892040" y="2057400"/>
+            <a:ext cx="1828800" cy="320040"/>
+          </a:xfrm>
+          <a:prstGeom prst="rect">
+            <a:avLst/>
+          </a:prstGeom>
+          <a:noFill/>
+          <a:ln/>
+        </p:spPr>
+        <p:txBody>
+          <a:bodyPr wrap="square" lIns="0" tIns="0" rIns="0" bIns="0" rtlCol="0" anchor="ctr"/>
+          <a:lstStyle/>
+          <a:p>
+            <a:pPr algn="ctr" indent="0" marL="0">
+              <a:buNone/>
+            </a:pPr>
+            <a:r>
+              <a:rPr lang="en-US" sz="1300" b="1" dirty="0">
+                <a:solidFill>
+                  <a:srgbClr val="014F5E"/>
+                </a:solidFill>
+                <a:latin typeface="Calibri" pitchFamily="34" charset="0"/>
+                <a:ea typeface="Calibri" pitchFamily="34" charset="-122"/>
+                <a:cs typeface="Calibri" pitchFamily="34" charset="-120"/>
+              </a:rPr>
+              <a:t>开放 Issues</a:t>
+            </a:r>
+            <a:endParaRPr lang="en-US" sz="1300" dirty="0"/>
+          </a:p>
+        </p:txBody>
+      </p:sp>
+      <p:sp>
+        <p:nvSpPr>
           <p:cNvPr id="17" name="Text 15"/>
           <p:cNvSpPr/>
           <p:nvPr/>
         </p:nvSpPr>
         <p:spPr>
           <a:xfrm>
-            <a:off x="4846320" y="2103120"/>
-            <a:ext cx="1828800" cy="320040"/>
+            <a:off x="4892040" y="2423160"/>
+            <a:ext cx="1828800" cy="274320"/>
           </a:xfrm>
           <a:prstGeom prst="rect">
             <a:avLst/>
@@ -7098,73 +7232,34 @@
               <a:buNone/>
             </a:pPr>
             <a:r>
-              <a:rPr lang="en-US" sz="1300" b="1" dirty="0">
-                <a:solidFill>
-                  <a:srgbClr val="014F5E"/>
-                </a:solidFill>
-                <a:latin typeface="Calibri" pitchFamily="34" charset="0"/>
-                <a:ea typeface="Calibri" pitchFamily="34" charset="-122"/>
-                <a:cs typeface="Calibri" pitchFamily="34" charset="-120"/>
-              </a:rPr>
-              <a:t>开放 Issues</a:t>
-            </a:r>
-            <a:endParaRPr lang="en-US" sz="1300" dirty="0"/>
-          </a:p>
-        </p:txBody>
-      </p:sp>
-      <p:sp>
-        <p:nvSpPr>
-          <p:cNvPr id="18" name="Text 16"/>
-          <p:cNvSpPr/>
-          <p:nvPr/>
-        </p:nvSpPr>
-        <p:spPr>
-          <a:xfrm>
-            <a:off x="4846320" y="2423160"/>
-            <a:ext cx="1828800" cy="320040"/>
-          </a:xfrm>
-          <a:prstGeom prst="rect">
-            <a:avLst/>
-          </a:prstGeom>
-          <a:noFill/>
-          <a:ln/>
-        </p:spPr>
-        <p:txBody>
-          <a:bodyPr wrap="square" lIns="0" tIns="0" rIns="0" bIns="0" rtlCol="0" anchor="ctr"/>
-          <a:lstStyle/>
-          <a:p>
-            <a:pPr algn="ctr" indent="0" marL="0">
-              <a:buNone/>
-            </a:pPr>
-            <a:r>
-              <a:rPr lang="en-US" sz="1100" dirty="0">
-                <a:solidFill>
-                  <a:srgbClr val="5A6F76"/>
-                </a:solidFill>
-                <a:latin typeface="Calibri" pitchFamily="34" charset="0"/>
-                <a:ea typeface="Calibri" pitchFamily="34" charset="-122"/>
-                <a:cs typeface="Calibri" pitchFamily="34" charset="-120"/>
-              </a:rPr>
-              <a:t>#5 · #65</a:t>
-            </a:r>
-            <a:endParaRPr lang="en-US" sz="1100" dirty="0"/>
-          </a:p>
-        </p:txBody>
-      </p:sp>
-      <p:sp>
-        <p:nvSpPr>
-          <p:cNvPr id="19" name="Shape 17"/>
-          <p:cNvSpPr/>
-          <p:nvPr/>
-        </p:nvSpPr>
-        <p:spPr>
-          <a:xfrm>
-            <a:off x="6903720" y="1234440"/>
-            <a:ext cx="2011680" cy="1691640"/>
+              <a:rPr lang="en-US" sz="1200" dirty="0">
+                <a:solidFill>
+                  <a:srgbClr val="3D555C"/>
+                </a:solidFill>
+                <a:latin typeface="Calibri" pitchFamily="34" charset="0"/>
+                <a:ea typeface="Calibri" pitchFamily="34" charset="-122"/>
+                <a:cs typeface="Calibri" pitchFamily="34" charset="-120"/>
+              </a:rPr>
+              <a:t>#5 与 #65</a:t>
+            </a:r>
+            <a:endParaRPr lang="en-US" sz="1200" dirty="0"/>
+          </a:p>
+        </p:txBody>
+      </p:sp>
+      <p:sp>
+        <p:nvSpPr>
+          <p:cNvPr id="18" name="Shape 16"/>
+          <p:cNvSpPr/>
+          <p:nvPr/>
+        </p:nvSpPr>
+        <p:spPr>
+          <a:xfrm>
+            <a:off x="6972300" y="1143000"/>
+            <a:ext cx="2011680" cy="1737360"/>
           </a:xfrm>
           <a:prstGeom prst="roundRect">
             <a:avLst>
-              <a:gd name="adj" fmla="val 5405"/>
+              <a:gd name="adj" fmla="val 5263"/>
             </a:avLst>
           </a:prstGeom>
           <a:solidFill>
@@ -7182,13 +7277,13 @@
       </p:sp>
       <p:sp>
         <p:nvSpPr>
-          <p:cNvPr id="20" name="Text 18"/>
-          <p:cNvSpPr/>
-          <p:nvPr/>
-        </p:nvSpPr>
-        <p:spPr>
-          <a:xfrm>
-            <a:off x="6903720" y="1417320"/>
+          <p:cNvPr id="19" name="Text 17"/>
+          <p:cNvSpPr/>
+          <p:nvPr/>
+        </p:nvSpPr>
+        <p:spPr>
+          <a:xfrm>
+            <a:off x="6972300" y="1325880"/>
             <a:ext cx="2011680" cy="640080"/>
           </a:xfrm>
           <a:prstGeom prst="rect">
@@ -7221,14 +7316,53 @@
       </p:sp>
       <p:sp>
         <p:nvSpPr>
+          <p:cNvPr id="20" name="Text 18"/>
+          <p:cNvSpPr/>
+          <p:nvPr/>
+        </p:nvSpPr>
+        <p:spPr>
+          <a:xfrm>
+            <a:off x="7063740" y="2057400"/>
+            <a:ext cx="1828800" cy="320040"/>
+          </a:xfrm>
+          <a:prstGeom prst="rect">
+            <a:avLst/>
+          </a:prstGeom>
+          <a:noFill/>
+          <a:ln/>
+        </p:spPr>
+        <p:txBody>
+          <a:bodyPr wrap="square" lIns="0" tIns="0" rIns="0" bIns="0" rtlCol="0" anchor="ctr"/>
+          <a:lstStyle/>
+          <a:p>
+            <a:pPr algn="ctr" indent="0" marL="0">
+              <a:buNone/>
+            </a:pPr>
+            <a:r>
+              <a:rPr lang="en-US" sz="1300" b="1" dirty="0">
+                <a:solidFill>
+                  <a:srgbClr val="014F5E"/>
+                </a:solidFill>
+                <a:latin typeface="Calibri" pitchFamily="34" charset="0"/>
+                <a:ea typeface="Calibri" pitchFamily="34" charset="-122"/>
+                <a:cs typeface="Calibri" pitchFamily="34" charset="-120"/>
+              </a:rPr>
+              <a:t>生产调用量</a:t>
+            </a:r>
+            <a:endParaRPr lang="en-US" sz="1300" dirty="0"/>
+          </a:p>
+        </p:txBody>
+      </p:sp>
+      <p:sp>
+        <p:nvSpPr>
           <p:cNvPr id="21" name="Text 19"/>
           <p:cNvSpPr/>
           <p:nvPr/>
         </p:nvSpPr>
         <p:spPr>
           <a:xfrm>
-            <a:off x="6995160" y="2103120"/>
-            <a:ext cx="1828800" cy="320040"/>
+            <a:off x="7063740" y="2423160"/>
+            <a:ext cx="1828800" cy="274320"/>
           </a:xfrm>
           <a:prstGeom prst="rect">
             <a:avLst/>
@@ -7244,48 +7378,9 @@
               <a:buNone/>
             </a:pPr>
             <a:r>
-              <a:rPr lang="en-US" sz="1300" b="1" dirty="0">
-                <a:solidFill>
-                  <a:srgbClr val="014F5E"/>
-                </a:solidFill>
-                <a:latin typeface="Calibri" pitchFamily="34" charset="0"/>
-                <a:ea typeface="Calibri" pitchFamily="34" charset="-122"/>
-                <a:cs typeface="Calibri" pitchFamily="34" charset="-120"/>
-              </a:rPr>
-              <a:t>生产调用量</a:t>
-            </a:r>
-            <a:endParaRPr lang="en-US" sz="1300" dirty="0"/>
-          </a:p>
-        </p:txBody>
-      </p:sp>
-      <p:sp>
-        <p:nvSpPr>
-          <p:cNvPr id="22" name="Text 20"/>
-          <p:cNvSpPr/>
-          <p:nvPr/>
-        </p:nvSpPr>
-        <p:spPr>
-          <a:xfrm>
-            <a:off x="6995160" y="2423160"/>
-            <a:ext cx="1828800" cy="320040"/>
-          </a:xfrm>
-          <a:prstGeom prst="rect">
-            <a:avLst/>
-          </a:prstGeom>
-          <a:noFill/>
-          <a:ln/>
-        </p:spPr>
-        <p:txBody>
-          <a:bodyPr wrap="square" lIns="0" tIns="0" rIns="0" bIns="0" rtlCol="0" anchor="ctr"/>
-          <a:lstStyle/>
-          <a:p>
-            <a:pPr algn="ctr" indent="0" marL="0">
-              <a:buNone/>
-            </a:pPr>
-            <a:r>
-              <a:rPr lang="en-US" sz="1100" dirty="0">
-                <a:solidFill>
-                  <a:srgbClr val="5A6F76"/>
+              <a:rPr lang="en-US" sz="1200" dirty="0">
+                <a:solidFill>
+                  <a:srgbClr val="3D555C"/>
                 </a:solidFill>
                 <a:latin typeface="Calibri" pitchFamily="34" charset="0"/>
                 <a:ea typeface="Calibri" pitchFamily="34" charset="-122"/>
@@ -7293,24 +7388,24 @@
               </a:rPr>
               <a:t>待接入监控导出</a:t>
             </a:r>
-            <a:endParaRPr lang="en-US" sz="1100" dirty="0"/>
-          </a:p>
-        </p:txBody>
-      </p:sp>
-      <p:sp>
-        <p:nvSpPr>
-          <p:cNvPr id="23" name="Shape 21"/>
-          <p:cNvSpPr/>
-          <p:nvPr/>
-        </p:nvSpPr>
-        <p:spPr>
-          <a:xfrm>
-            <a:off x="457200" y="3154680"/>
-            <a:ext cx="8229600" cy="1280160"/>
+            <a:endParaRPr lang="en-US" sz="1200" dirty="0"/>
+          </a:p>
+        </p:txBody>
+      </p:sp>
+      <p:sp>
+        <p:nvSpPr>
+          <p:cNvPr id="22" name="Shape 20"/>
+          <p:cNvSpPr/>
+          <p:nvPr/>
+        </p:nvSpPr>
+        <p:spPr>
+          <a:xfrm>
+            <a:off x="457200" y="3108960"/>
+            <a:ext cx="8229600" cy="1371600"/>
           </a:xfrm>
           <a:prstGeom prst="roundRect">
             <a:avLst>
-              <a:gd name="adj" fmla="val 7143"/>
+              <a:gd name="adj" fmla="val 6667"/>
             </a:avLst>
           </a:prstGeom>
           <a:solidFill>
@@ -7321,13 +7416,13 @@
       </p:sp>
       <p:sp>
         <p:nvSpPr>
-          <p:cNvPr id="24" name="Text 22"/>
-          <p:cNvSpPr/>
-          <p:nvPr/>
-        </p:nvSpPr>
-        <p:spPr>
-          <a:xfrm>
-            <a:off x="685800" y="3291840"/>
+          <p:cNvPr id="23" name="Text 21"/>
+          <p:cNvSpPr/>
+          <p:nvPr/>
+        </p:nvSpPr>
+        <p:spPr>
+          <a:xfrm>
+            <a:off x="685800" y="3246120"/>
             <a:ext cx="7772400" cy="320040"/>
           </a:xfrm>
           <a:prstGeom prst="rect">
@@ -7360,40 +7455,79 @@
       </p:sp>
       <p:sp>
         <p:nvSpPr>
+          <p:cNvPr id="24" name="Text 22"/>
+          <p:cNvSpPr/>
+          <p:nvPr/>
+        </p:nvSpPr>
+        <p:spPr>
+          <a:xfrm>
+            <a:off x="685800" y="3703320"/>
+            <a:ext cx="7772400" cy="594360"/>
+          </a:xfrm>
+          <a:prstGeom prst="rect">
+            <a:avLst/>
+          </a:prstGeom>
+          <a:noFill/>
+          <a:ln/>
+        </p:spPr>
+        <p:txBody>
+          <a:bodyPr wrap="square" lIns="0" tIns="0" rIns="0" bIns="0" rtlCol="0" anchor="ctr"/>
+          <a:lstStyle/>
+          <a:p>
+            <a:pPr indent="0" marL="0">
+              <a:buNone/>
+            </a:pPr>
+            <a:r>
+              <a:rPr lang="en-US" sz="1300" dirty="0">
+                <a:solidFill>
+                  <a:srgbClr val="1A2E35"/>
+                </a:solidFill>
+                <a:latin typeface="Calibri" pitchFamily="34" charset="0"/>
+                <a:ea typeface="Calibri" pitchFamily="34" charset="-122"/>
+                <a:cs typeface="Calibri" pitchFamily="34" charset="-120"/>
+              </a:rPr>
+              <a:t>Prometheus 与 Grafana AI 模型看板已入库。建议将 Token 用量、生成成功率、P95 延迟、部署成功率导出到日报指标区，替代当前「待接入」说明。</a:t>
+            </a:r>
+            <a:endParaRPr lang="en-US" sz="1300" dirty="0"/>
+          </a:p>
+        </p:txBody>
+      </p:sp>
+      <p:sp>
+        <p:nvSpPr>
           <p:cNvPr id="25" name="Text 23"/>
           <p:cNvSpPr/>
           <p:nvPr/>
         </p:nvSpPr>
         <p:spPr>
           <a:xfrm>
-            <a:off x="685800" y="3703320"/>
-            <a:ext cx="7772400" cy="548640"/>
-          </a:xfrm>
-          <a:prstGeom prst="rect">
-            <a:avLst/>
-          </a:prstGeom>
-          <a:noFill/>
-          <a:ln/>
-        </p:spPr>
-        <p:txBody>
-          <a:bodyPr wrap="square" lIns="0" tIns="0" rIns="0" bIns="0" rtlCol="0" anchor="ctr"/>
-          <a:lstStyle/>
-          <a:p>
-            <a:pPr indent="0" marL="0">
-              <a:buNone/>
-            </a:pPr>
-            <a:r>
-              <a:rPr lang="en-US" sz="1300" dirty="0">
-                <a:solidFill>
-                  <a:srgbClr val="1A2E35"/>
-                </a:solidFill>
-                <a:latin typeface="Calibri" pitchFamily="34" charset="0"/>
-                <a:ea typeface="Calibri" pitchFamily="34" charset="-122"/>
-                <a:cs typeface="Calibri" pitchFamily="34" charset="-120"/>
-              </a:rPr>
-              <a:t>Prometheus 配置与 Grafana AI 模型看板（grafana/）已入库；建议下一步将 Token 用量、生成成功率、P95 延迟、部署成功率导出到日报指标区，替代当前「待接入」说明。</a:t>
-            </a:r>
-            <a:endParaRPr lang="en-US" sz="1300" dirty="0"/>
+            <a:off x="457200" y="4800600"/>
+            <a:ext cx="6858000" cy="256032"/>
+          </a:xfrm>
+          <a:prstGeom prst="rect">
+            <a:avLst/>
+          </a:prstGeom>
+          <a:noFill/>
+          <a:ln/>
+        </p:spPr>
+        <p:txBody>
+          <a:bodyPr wrap="square" lIns="0" tIns="0" rIns="0" bIns="0" rtlCol="0" anchor="ctr"/>
+          <a:lstStyle/>
+          <a:p>
+            <a:pPr indent="0" marL="0">
+              <a:buNone/>
+            </a:pPr>
+            <a:r>
+              <a:rPr lang="en-US" sz="1000" dirty="0">
+                <a:solidFill>
+                  <a:srgbClr val="3D555C"/>
+                </a:solidFill>
+                <a:latin typeface="Calibri" pitchFamily="34" charset="0"/>
+                <a:ea typeface="Calibri" pitchFamily="34" charset="-122"/>
+                <a:cs typeface="Calibri" pitchFamily="34" charset="-120"/>
+              </a:rPr>
+              <a:t>yu-ai-code-mother  ·  每日状态  ·  2026-07-30</a:t>
+            </a:r>
+            <a:endParaRPr lang="en-US" sz="1000" dirty="0"/>
           </a:p>
         </p:txBody>
       </p:sp>
@@ -7405,65 +7539,26 @@
         </p:nvSpPr>
         <p:spPr>
           <a:xfrm>
-            <a:off x="457200" y="4828032"/>
-            <a:ext cx="6858000" cy="256032"/>
-          </a:xfrm>
-          <a:prstGeom prst="rect">
-            <a:avLst/>
-          </a:prstGeom>
-          <a:noFill/>
-          <a:ln/>
-        </p:spPr>
-        <p:txBody>
-          <a:bodyPr wrap="square" lIns="0" tIns="0" rIns="0" bIns="0" rtlCol="0" anchor="ctr"/>
-          <a:lstStyle/>
-          <a:p>
-            <a:pPr indent="0" marL="0">
+            <a:off x="7772400" y="4800600"/>
+            <a:ext cx="914400" cy="256032"/>
+          </a:xfrm>
+          <a:prstGeom prst="rect">
+            <a:avLst/>
+          </a:prstGeom>
+          <a:noFill/>
+          <a:ln/>
+        </p:spPr>
+        <p:txBody>
+          <a:bodyPr wrap="square" lIns="0" tIns="0" rIns="0" bIns="0" rtlCol="0" anchor="ctr"/>
+          <a:lstStyle/>
+          <a:p>
+            <a:pPr algn="r" indent="0" marL="0">
               <a:buNone/>
             </a:pPr>
             <a:r>
               <a:rPr lang="en-US" sz="1000" dirty="0">
                 <a:solidFill>
-                  <a:srgbClr val="5A6F76"/>
-                </a:solidFill>
-                <a:latin typeface="Calibri" pitchFamily="34" charset="0"/>
-                <a:ea typeface="Calibri" pitchFamily="34" charset="-122"/>
-                <a:cs typeface="Calibri" pitchFamily="34" charset="-120"/>
-              </a:rPr>
-              <a:t>yu-ai-code-mother  ·  每日状态  ·  2026-07-30</a:t>
-            </a:r>
-            <a:endParaRPr lang="en-US" sz="1000" dirty="0"/>
-          </a:p>
-        </p:txBody>
-      </p:sp>
-      <p:sp>
-        <p:nvSpPr>
-          <p:cNvPr id="27" name="Text 25"/>
-          <p:cNvSpPr/>
-          <p:nvPr/>
-        </p:nvSpPr>
-        <p:spPr>
-          <a:xfrm>
-            <a:off x="7772400" y="4828032"/>
-            <a:ext cx="914400" cy="256032"/>
-          </a:xfrm>
-          <a:prstGeom prst="rect">
-            <a:avLst/>
-          </a:prstGeom>
-          <a:noFill/>
-          <a:ln/>
-        </p:spPr>
-        <p:txBody>
-          <a:bodyPr wrap="square" lIns="0" tIns="0" rIns="0" bIns="0" rtlCol="0" anchor="ctr"/>
-          <a:lstStyle/>
-          <a:p>
-            <a:pPr algn="r" indent="0" marL="0">
-              <a:buNone/>
-            </a:pPr>
-            <a:r>
-              <a:rPr lang="en-US" sz="1000" dirty="0">
-                <a:solidFill>
-                  <a:srgbClr val="5A6F76"/>
+                  <a:srgbClr val="3D555C"/>
                 </a:solidFill>
                 <a:latin typeface="Calibri" pitchFamily="34" charset="0"/>
                 <a:ea typeface="Calibri" pitchFamily="34" charset="-122"/>
@@ -7534,7 +7629,7 @@
         <p:spPr>
           <a:xfrm>
             <a:off x="0" y="0"/>
-            <a:ext cx="9144000" cy="109728"/>
+            <a:ext cx="9144000" cy="91440"/>
           </a:xfrm>
           <a:prstGeom prst="rect">
             <a:avLst/>
@@ -7552,39 +7647,14 @@
       </p:sp>
       <p:sp>
         <p:nvSpPr>
-          <p:cNvPr id="4" name="Shape 2"/>
-          <p:cNvSpPr/>
-          <p:nvPr/>
-        </p:nvSpPr>
-        <p:spPr>
-          <a:xfrm>
-            <a:off x="0" y="109728"/>
-            <a:ext cx="109728" cy="5033772"/>
-          </a:xfrm>
-          <a:prstGeom prst="rect">
-            <a:avLst/>
-          </a:prstGeom>
-          <a:solidFill>
-            <a:srgbClr val="00A896"/>
-          </a:solidFill>
-          <a:ln w="12700">
-            <a:solidFill>
-              <a:srgbClr val="00A896"/>
-            </a:solidFill>
-            <a:prstDash val="solid"/>
-          </a:ln>
-        </p:spPr>
-      </p:sp>
-      <p:sp>
-        <p:nvSpPr>
-          <p:cNvPr id="5" name="Text 3"/>
+          <p:cNvPr id="4" name="Text 2"/>
           <p:cNvSpPr/>
           <p:nvPr/>
         </p:nvSpPr>
         <p:spPr>
           <a:xfrm>
             <a:off x="457200" y="256032"/>
-            <a:ext cx="8229600" cy="502920"/>
+            <a:ext cx="8229600" cy="457200"/>
           </a:xfrm>
           <a:prstGeom prst="rect">
             <a:avLst/>
@@ -7616,14 +7686,14 @@
       </p:sp>
       <p:sp>
         <p:nvSpPr>
-          <p:cNvPr id="6" name="Text 4"/>
-          <p:cNvSpPr/>
-          <p:nvPr/>
-        </p:nvSpPr>
-        <p:spPr>
-          <a:xfrm>
-            <a:off x="457200" y="749808"/>
-            <a:ext cx="8229600" cy="292608"/>
+          <p:cNvPr id="5" name="Text 3"/>
+          <p:cNvSpPr/>
+          <p:nvPr/>
+        </p:nvSpPr>
+        <p:spPr>
+          <a:xfrm>
+            <a:off x="457200" y="713232"/>
+            <a:ext cx="8229600" cy="274320"/>
           </a:xfrm>
           <a:prstGeom prst="rect">
             <a:avLst/>
@@ -7641,7 +7711,7 @@
             <a:r>
               <a:rPr lang="en-US" sz="1300" i="1" dirty="0">
                 <a:solidFill>
-                  <a:srgbClr val="5A6F76"/>
+                  <a:srgbClr val="3D555C"/>
                 </a:solidFill>
                 <a:latin typeface="Calibri" pitchFamily="34" charset="0"/>
                 <a:ea typeface="Calibri" pitchFamily="34" charset="-122"/>
@@ -7655,18 +7725,18 @@
       </p:sp>
       <p:sp>
         <p:nvSpPr>
-          <p:cNvPr id="7" name="Shape 5"/>
-          <p:cNvSpPr/>
-          <p:nvPr/>
-        </p:nvSpPr>
-        <p:spPr>
-          <a:xfrm>
-            <a:off x="457200" y="1143000"/>
-            <a:ext cx="8229600" cy="731520"/>
+          <p:cNvPr id="6" name="Shape 4"/>
+          <p:cNvSpPr/>
+          <p:nvPr/>
+        </p:nvSpPr>
+        <p:spPr>
+          <a:xfrm>
+            <a:off x="457200" y="1097280"/>
+            <a:ext cx="8229600" cy="749808"/>
           </a:xfrm>
           <a:prstGeom prst="roundRect">
             <a:avLst>
-              <a:gd name="adj" fmla="val 10000"/>
+              <a:gd name="adj" fmla="val 9756"/>
             </a:avLst>
           </a:prstGeom>
           <a:solidFill>
@@ -7677,13 +7747,13 @@
       </p:sp>
       <p:sp>
         <p:nvSpPr>
-          <p:cNvPr id="8" name="Shape 6"/>
-          <p:cNvSpPr/>
-          <p:nvPr/>
-        </p:nvSpPr>
-        <p:spPr>
-          <a:xfrm>
-            <a:off x="594360" y="1307592"/>
+          <p:cNvPr id="7" name="Shape 5"/>
+          <p:cNvSpPr/>
+          <p:nvPr/>
+        </p:nvSpPr>
+        <p:spPr>
+          <a:xfrm>
+            <a:off x="640080" y="1271016"/>
             <a:ext cx="502920" cy="402336"/>
           </a:xfrm>
           <a:prstGeom prst="roundRect">
@@ -7699,53 +7769,53 @@
       </p:sp>
       <p:sp>
         <p:nvSpPr>
+          <p:cNvPr id="8" name="Text 6"/>
+          <p:cNvSpPr/>
+          <p:nvPr/>
+        </p:nvSpPr>
+        <p:spPr>
+          <a:xfrm>
+            <a:off x="640080" y="1335024"/>
+            <a:ext cx="502920" cy="274320"/>
+          </a:xfrm>
+          <a:prstGeom prst="rect">
+            <a:avLst/>
+          </a:prstGeom>
+          <a:noFill/>
+          <a:ln/>
+        </p:spPr>
+        <p:txBody>
+          <a:bodyPr wrap="square" lIns="0" tIns="0" rIns="0" bIns="0" rtlCol="0" anchor="ctr"/>
+          <a:lstStyle/>
+          <a:p>
+            <a:pPr algn="ctr" indent="0" marL="0">
+              <a:buNone/>
+            </a:pPr>
+            <a:r>
+              <a:rPr lang="en-US" sz="1300" b="1" dirty="0">
+                <a:solidFill>
+                  <a:srgbClr val="C1121F"/>
+                </a:solidFill>
+                <a:latin typeface="Calibri" pitchFamily="34" charset="0"/>
+                <a:ea typeface="Calibri" pitchFamily="34" charset="-122"/>
+                <a:cs typeface="Calibri" pitchFamily="34" charset="-120"/>
+              </a:rPr>
+              <a:t>高</a:t>
+            </a:r>
+            <a:endParaRPr lang="en-US" sz="1300" dirty="0"/>
+          </a:p>
+        </p:txBody>
+      </p:sp>
+      <p:sp>
+        <p:nvSpPr>
           <p:cNvPr id="9" name="Text 7"/>
           <p:cNvSpPr/>
           <p:nvPr/>
         </p:nvSpPr>
         <p:spPr>
           <a:xfrm>
-            <a:off x="594360" y="1371600"/>
-            <a:ext cx="502920" cy="274320"/>
-          </a:xfrm>
-          <a:prstGeom prst="rect">
-            <a:avLst/>
-          </a:prstGeom>
-          <a:noFill/>
-          <a:ln/>
-        </p:spPr>
-        <p:txBody>
-          <a:bodyPr wrap="square" lIns="0" tIns="0" rIns="0" bIns="0" rtlCol="0" anchor="ctr"/>
-          <a:lstStyle/>
-          <a:p>
-            <a:pPr algn="ctr" indent="0" marL="0">
-              <a:buNone/>
-            </a:pPr>
-            <a:r>
-              <a:rPr lang="en-US" sz="1200" b="1" dirty="0">
-                <a:solidFill>
-                  <a:srgbClr val="C1121F"/>
-                </a:solidFill>
-                <a:latin typeface="Calibri" pitchFamily="34" charset="0"/>
-                <a:ea typeface="Calibri" pitchFamily="34" charset="-122"/>
-                <a:cs typeface="Calibri" pitchFamily="34" charset="-120"/>
-              </a:rPr>
-              <a:t>高</a:t>
-            </a:r>
-            <a:endParaRPr lang="en-US" sz="1200" dirty="0"/>
-          </a:p>
-        </p:txBody>
-      </p:sp>
-      <p:sp>
-        <p:nvSpPr>
-          <p:cNvPr id="10" name="Text 8"/>
-          <p:cNvSpPr/>
-          <p:nvPr/>
-        </p:nvSpPr>
-        <p:spPr>
-          <a:xfrm>
-            <a:off x="1280160" y="1234440"/>
-            <a:ext cx="7223760" cy="274320"/>
+            <a:off x="1325880" y="1207008"/>
+            <a:ext cx="7132320" cy="274320"/>
           </a:xfrm>
           <a:prstGeom prst="rect">
             <a:avLst/>
@@ -7777,32 +7847,32 @@
       </p:sp>
       <p:sp>
         <p:nvSpPr>
-          <p:cNvPr id="11" name="Text 9"/>
-          <p:cNvSpPr/>
-          <p:nvPr/>
-        </p:nvSpPr>
-        <p:spPr>
-          <a:xfrm>
-            <a:off x="1280160" y="1527048"/>
-            <a:ext cx="7223760" cy="256032"/>
-          </a:xfrm>
-          <a:prstGeom prst="rect">
-            <a:avLst/>
-          </a:prstGeom>
-          <a:noFill/>
-          <a:ln/>
-        </p:spPr>
-        <p:txBody>
-          <a:bodyPr wrap="square" lIns="0" tIns="0" rIns="0" bIns="0" rtlCol="0" anchor="ctr"/>
-          <a:lstStyle/>
-          <a:p>
-            <a:pPr indent="0" marL="0">
-              <a:buNone/>
-            </a:pPr>
-            <a:r>
-              <a:rPr lang="en-US" sz="1200" dirty="0">
-                <a:solidFill>
-                  <a:srgbClr val="5A6F76"/>
+          <p:cNvPr id="10" name="Text 8"/>
+          <p:cNvSpPr/>
+          <p:nvPr/>
+        </p:nvSpPr>
+        <p:spPr>
+          <a:xfrm>
+            <a:off x="1325880" y="1508760"/>
+            <a:ext cx="7132320" cy="256032"/>
+          </a:xfrm>
+          <a:prstGeom prst="rect">
+            <a:avLst/>
+          </a:prstGeom>
+          <a:noFill/>
+          <a:ln/>
+        </p:spPr>
+        <p:txBody>
+          <a:bodyPr wrap="square" lIns="0" tIns="0" rIns="0" bIns="0" rtlCol="0" anchor="ctr"/>
+          <a:lstStyle/>
+          <a:p>
+            <a:pPr indent="0" marL="0">
+              <a:buNone/>
+            </a:pPr>
+            <a:r>
+              <a:rPr lang="en-US" sz="1300" dirty="0">
+                <a:solidFill>
+                  <a:srgbClr val="3D555C"/>
                 </a:solidFill>
                 <a:latin typeface="Calibri" pitchFamily="34" charset="0"/>
                 <a:ea typeface="Calibri" pitchFamily="34" charset="-122"/>
@@ -7810,24 +7880,24 @@
               </a:rPr>
               <a:t>DeepSeek thinking 模式工具调用报错，影响 VUE_PROJECT 主路径可用性</a:t>
             </a:r>
-            <a:endParaRPr lang="en-US" sz="1200" dirty="0"/>
-          </a:p>
-        </p:txBody>
-      </p:sp>
-      <p:sp>
-        <p:nvSpPr>
-          <p:cNvPr id="12" name="Shape 10"/>
+            <a:endParaRPr lang="en-US" sz="1300" dirty="0"/>
+          </a:p>
+        </p:txBody>
+      </p:sp>
+      <p:sp>
+        <p:nvSpPr>
+          <p:cNvPr id="11" name="Shape 9"/>
           <p:cNvSpPr/>
           <p:nvPr/>
         </p:nvSpPr>
         <p:spPr>
           <a:xfrm>
             <a:off x="457200" y="1965960"/>
-            <a:ext cx="8229600" cy="731520"/>
+            <a:ext cx="8229600" cy="749808"/>
           </a:xfrm>
           <a:prstGeom prst="roundRect">
             <a:avLst>
-              <a:gd name="adj" fmla="val 10000"/>
+              <a:gd name="adj" fmla="val 9756"/>
             </a:avLst>
           </a:prstGeom>
           <a:solidFill>
@@ -7838,13 +7908,13 @@
       </p:sp>
       <p:sp>
         <p:nvSpPr>
-          <p:cNvPr id="13" name="Shape 11"/>
-          <p:cNvSpPr/>
-          <p:nvPr/>
-        </p:nvSpPr>
-        <p:spPr>
-          <a:xfrm>
-            <a:off x="594360" y="2130552"/>
+          <p:cNvPr id="12" name="Shape 10"/>
+          <p:cNvSpPr/>
+          <p:nvPr/>
+        </p:nvSpPr>
+        <p:spPr>
+          <a:xfrm>
+            <a:off x="640080" y="2139696"/>
             <a:ext cx="502920" cy="402336"/>
           </a:xfrm>
           <a:prstGeom prst="roundRect">
@@ -7860,53 +7930,53 @@
       </p:sp>
       <p:sp>
         <p:nvSpPr>
+          <p:cNvPr id="13" name="Text 11"/>
+          <p:cNvSpPr/>
+          <p:nvPr/>
+        </p:nvSpPr>
+        <p:spPr>
+          <a:xfrm>
+            <a:off x="640080" y="2203704"/>
+            <a:ext cx="502920" cy="274320"/>
+          </a:xfrm>
+          <a:prstGeom prst="rect">
+            <a:avLst/>
+          </a:prstGeom>
+          <a:noFill/>
+          <a:ln/>
+        </p:spPr>
+        <p:txBody>
+          <a:bodyPr wrap="square" lIns="0" tIns="0" rIns="0" bIns="0" rtlCol="0" anchor="ctr"/>
+          <a:lstStyle/>
+          <a:p>
+            <a:pPr algn="ctr" indent="0" marL="0">
+              <a:buNone/>
+            </a:pPr>
+            <a:r>
+              <a:rPr lang="en-US" sz="1300" b="1" dirty="0">
+                <a:solidFill>
+                  <a:srgbClr val="8A6A00"/>
+                </a:solidFill>
+                <a:latin typeface="Calibri" pitchFamily="34" charset="0"/>
+                <a:ea typeface="Calibri" pitchFamily="34" charset="-122"/>
+                <a:cs typeface="Calibri" pitchFamily="34" charset="-120"/>
+              </a:rPr>
+              <a:t>中</a:t>
+            </a:r>
+            <a:endParaRPr lang="en-US" sz="1300" dirty="0"/>
+          </a:p>
+        </p:txBody>
+      </p:sp>
+      <p:sp>
+        <p:nvSpPr>
           <p:cNvPr id="14" name="Text 12"/>
           <p:cNvSpPr/>
           <p:nvPr/>
         </p:nvSpPr>
         <p:spPr>
           <a:xfrm>
-            <a:off x="594360" y="2194560"/>
-            <a:ext cx="502920" cy="274320"/>
-          </a:xfrm>
-          <a:prstGeom prst="rect">
-            <a:avLst/>
-          </a:prstGeom>
-          <a:noFill/>
-          <a:ln/>
-        </p:spPr>
-        <p:txBody>
-          <a:bodyPr wrap="square" lIns="0" tIns="0" rIns="0" bIns="0" rtlCol="0" anchor="ctr"/>
-          <a:lstStyle/>
-          <a:p>
-            <a:pPr algn="ctr" indent="0" marL="0">
-              <a:buNone/>
-            </a:pPr>
-            <a:r>
-              <a:rPr lang="en-US" sz="1200" b="1" dirty="0">
-                <a:solidFill>
-                  <a:srgbClr val="E09F3E"/>
-                </a:solidFill>
-                <a:latin typeface="Calibri" pitchFamily="34" charset="0"/>
-                <a:ea typeface="Calibri" pitchFamily="34" charset="-122"/>
-                <a:cs typeface="Calibri" pitchFamily="34" charset="-120"/>
-              </a:rPr>
-              <a:t>中</a:t>
-            </a:r>
-            <a:endParaRPr lang="en-US" sz="1200" dirty="0"/>
-          </a:p>
-        </p:txBody>
-      </p:sp>
-      <p:sp>
-        <p:nvSpPr>
-          <p:cNvPr id="15" name="Text 13"/>
-          <p:cNvSpPr/>
-          <p:nvPr/>
-        </p:nvSpPr>
-        <p:spPr>
-          <a:xfrm>
-            <a:off x="1280160" y="2057400"/>
-            <a:ext cx="7223760" cy="274320"/>
+            <a:off x="1325880" y="2075688"/>
+            <a:ext cx="7132320" cy="274320"/>
           </a:xfrm>
           <a:prstGeom prst="rect">
             <a:avLst/>
@@ -7938,57 +8008,57 @@
       </p:sp>
       <p:sp>
         <p:nvSpPr>
-          <p:cNvPr id="16" name="Text 14"/>
-          <p:cNvSpPr/>
-          <p:nvPr/>
-        </p:nvSpPr>
-        <p:spPr>
-          <a:xfrm>
-            <a:off x="1280160" y="2350008"/>
-            <a:ext cx="7223760" cy="256032"/>
-          </a:xfrm>
-          <a:prstGeom prst="rect">
-            <a:avLst/>
-          </a:prstGeom>
-          <a:noFill/>
-          <a:ln/>
-        </p:spPr>
-        <p:txBody>
-          <a:bodyPr wrap="square" lIns="0" tIns="0" rIns="0" bIns="0" rtlCol="0" anchor="ctr"/>
-          <a:lstStyle/>
-          <a:p>
-            <a:pPr indent="0" marL="0">
-              <a:buNone/>
-            </a:pPr>
-            <a:r>
-              <a:rPr lang="en-US" sz="1200" dirty="0">
-                <a:solidFill>
-                  <a:srgbClr val="5A6F76"/>
-                </a:solidFill>
-                <a:latin typeface="Calibri" pitchFamily="34" charset="0"/>
-                <a:ea typeface="Calibri" pitchFamily="34" charset="-122"/>
-                <a:cs typeface="Calibri" pitchFamily="34" charset="-120"/>
-              </a:rPr>
-              <a:t>功能已实现且可合并，但缺评审与密钥/配置运维说明，合入节奏不确定</a:t>
-            </a:r>
-            <a:endParaRPr lang="en-US" sz="1200" dirty="0"/>
-          </a:p>
-        </p:txBody>
-      </p:sp>
-      <p:sp>
-        <p:nvSpPr>
-          <p:cNvPr id="17" name="Shape 15"/>
-          <p:cNvSpPr/>
-          <p:nvPr/>
-        </p:nvSpPr>
-        <p:spPr>
-          <a:xfrm>
-            <a:off x="457200" y="2788920"/>
-            <a:ext cx="8229600" cy="731520"/>
+          <p:cNvPr id="15" name="Text 13"/>
+          <p:cNvSpPr/>
+          <p:nvPr/>
+        </p:nvSpPr>
+        <p:spPr>
+          <a:xfrm>
+            <a:off x="1325880" y="2377440"/>
+            <a:ext cx="7132320" cy="256032"/>
+          </a:xfrm>
+          <a:prstGeom prst="rect">
+            <a:avLst/>
+          </a:prstGeom>
+          <a:noFill/>
+          <a:ln/>
+        </p:spPr>
+        <p:txBody>
+          <a:bodyPr wrap="square" lIns="0" tIns="0" rIns="0" bIns="0" rtlCol="0" anchor="ctr"/>
+          <a:lstStyle/>
+          <a:p>
+            <a:pPr indent="0" marL="0">
+              <a:buNone/>
+            </a:pPr>
+            <a:r>
+              <a:rPr lang="en-US" sz="1300" dirty="0">
+                <a:solidFill>
+                  <a:srgbClr val="3D555C"/>
+                </a:solidFill>
+                <a:latin typeface="Calibri" pitchFamily="34" charset="0"/>
+                <a:ea typeface="Calibri" pitchFamily="34" charset="-122"/>
+                <a:cs typeface="Calibri" pitchFamily="34" charset="-120"/>
+              </a:rPr>
+              <a:t>功能已实现且可合并，缺评审与密钥配置说明，合入节奏不确定</a:t>
+            </a:r>
+            <a:endParaRPr lang="en-US" sz="1300" dirty="0"/>
+          </a:p>
+        </p:txBody>
+      </p:sp>
+      <p:sp>
+        <p:nvSpPr>
+          <p:cNvPr id="16" name="Shape 14"/>
+          <p:cNvSpPr/>
+          <p:nvPr/>
+        </p:nvSpPr>
+        <p:spPr>
+          <a:xfrm>
+            <a:off x="457200" y="2834640"/>
+            <a:ext cx="8229600" cy="749808"/>
           </a:xfrm>
           <a:prstGeom prst="roundRect">
             <a:avLst>
-              <a:gd name="adj" fmla="val 10000"/>
+              <a:gd name="adj" fmla="val 9756"/>
             </a:avLst>
           </a:prstGeom>
           <a:solidFill>
@@ -7999,13 +8069,13 @@
       </p:sp>
       <p:sp>
         <p:nvSpPr>
-          <p:cNvPr id="18" name="Shape 16"/>
-          <p:cNvSpPr/>
-          <p:nvPr/>
-        </p:nvSpPr>
-        <p:spPr>
-          <a:xfrm>
-            <a:off x="594360" y="2953512"/>
+          <p:cNvPr id="17" name="Shape 15"/>
+          <p:cNvSpPr/>
+          <p:nvPr/>
+        </p:nvSpPr>
+        <p:spPr>
+          <a:xfrm>
+            <a:off x="640080" y="3008376"/>
             <a:ext cx="502920" cy="402336"/>
           </a:xfrm>
           <a:prstGeom prst="roundRect">
@@ -8021,53 +8091,53 @@
       </p:sp>
       <p:sp>
         <p:nvSpPr>
+          <p:cNvPr id="18" name="Text 16"/>
+          <p:cNvSpPr/>
+          <p:nvPr/>
+        </p:nvSpPr>
+        <p:spPr>
+          <a:xfrm>
+            <a:off x="640080" y="3072384"/>
+            <a:ext cx="502920" cy="274320"/>
+          </a:xfrm>
+          <a:prstGeom prst="rect">
+            <a:avLst/>
+          </a:prstGeom>
+          <a:noFill/>
+          <a:ln/>
+        </p:spPr>
+        <p:txBody>
+          <a:bodyPr wrap="square" lIns="0" tIns="0" rIns="0" bIns="0" rtlCol="0" anchor="ctr"/>
+          <a:lstStyle/>
+          <a:p>
+            <a:pPr algn="ctr" indent="0" marL="0">
+              <a:buNone/>
+            </a:pPr>
+            <a:r>
+              <a:rPr lang="en-US" sz="1300" b="1" dirty="0">
+                <a:solidFill>
+                  <a:srgbClr val="8A6A00"/>
+                </a:solidFill>
+                <a:latin typeface="Calibri" pitchFamily="34" charset="0"/>
+                <a:ea typeface="Calibri" pitchFamily="34" charset="-122"/>
+                <a:cs typeface="Calibri" pitchFamily="34" charset="-120"/>
+              </a:rPr>
+              <a:t>中</a:t>
+            </a:r>
+            <a:endParaRPr lang="en-US" sz="1300" dirty="0"/>
+          </a:p>
+        </p:txBody>
+      </p:sp>
+      <p:sp>
+        <p:nvSpPr>
           <p:cNvPr id="19" name="Text 17"/>
           <p:cNvSpPr/>
           <p:nvPr/>
         </p:nvSpPr>
         <p:spPr>
           <a:xfrm>
-            <a:off x="594360" y="3017520"/>
-            <a:ext cx="502920" cy="274320"/>
-          </a:xfrm>
-          <a:prstGeom prst="rect">
-            <a:avLst/>
-          </a:prstGeom>
-          <a:noFill/>
-          <a:ln/>
-        </p:spPr>
-        <p:txBody>
-          <a:bodyPr wrap="square" lIns="0" tIns="0" rIns="0" bIns="0" rtlCol="0" anchor="ctr"/>
-          <a:lstStyle/>
-          <a:p>
-            <a:pPr algn="ctr" indent="0" marL="0">
-              <a:buNone/>
-            </a:pPr>
-            <a:r>
-              <a:rPr lang="en-US" sz="1200" b="1" dirty="0">
-                <a:solidFill>
-                  <a:srgbClr val="E09F3E"/>
-                </a:solidFill>
-                <a:latin typeface="Calibri" pitchFamily="34" charset="0"/>
-                <a:ea typeface="Calibri" pitchFamily="34" charset="-122"/>
-                <a:cs typeface="Calibri" pitchFamily="34" charset="-120"/>
-              </a:rPr>
-              <a:t>中</a:t>
-            </a:r>
-            <a:endParaRPr lang="en-US" sz="1200" dirty="0"/>
-          </a:p>
-        </p:txBody>
-      </p:sp>
-      <p:sp>
-        <p:nvSpPr>
-          <p:cNvPr id="20" name="Text 18"/>
-          <p:cNvSpPr/>
-          <p:nvPr/>
-        </p:nvSpPr>
-        <p:spPr>
-          <a:xfrm>
-            <a:off x="1280160" y="2880360"/>
-            <a:ext cx="7223760" cy="274320"/>
+            <a:off x="1325880" y="2944368"/>
+            <a:ext cx="7132320" cy="274320"/>
           </a:xfrm>
           <a:prstGeom prst="rect">
             <a:avLst/>
@@ -8099,57 +8169,57 @@
       </p:sp>
       <p:sp>
         <p:nvSpPr>
-          <p:cNvPr id="21" name="Text 19"/>
-          <p:cNvSpPr/>
-          <p:nvPr/>
-        </p:nvSpPr>
-        <p:spPr>
-          <a:xfrm>
-            <a:off x="1280160" y="3172968"/>
-            <a:ext cx="7223760" cy="256032"/>
-          </a:xfrm>
-          <a:prstGeom prst="rect">
-            <a:avLst/>
-          </a:prstGeom>
-          <a:noFill/>
-          <a:ln/>
-        </p:spPr>
-        <p:txBody>
-          <a:bodyPr wrap="square" lIns="0" tIns="0" rIns="0" bIns="0" rtlCol="0" anchor="ctr"/>
-          <a:lstStyle/>
-          <a:p>
-            <a:pPr indent="0" marL="0">
-              <a:buNone/>
-            </a:pPr>
-            <a:r>
-              <a:rPr lang="en-US" sz="1200" dirty="0">
-                <a:solidFill>
-                  <a:srgbClr val="5A6F76"/>
-                </a:solidFill>
-                <a:latin typeface="Calibri" pitchFamily="34" charset="0"/>
-                <a:ea typeface="Calibri" pitchFamily="34" charset="-122"/>
-                <a:cs typeface="Calibri" pitchFamily="34" charset="-120"/>
-              </a:rPr>
-              <a:t>自 2025-08-26 后无业务变更；日报/Draft PR 堆积，维护信号偏弱</a:t>
-            </a:r>
-            <a:endParaRPr lang="en-US" sz="1200" dirty="0"/>
-          </a:p>
-        </p:txBody>
-      </p:sp>
-      <p:sp>
-        <p:nvSpPr>
-          <p:cNvPr id="22" name="Shape 20"/>
-          <p:cNvSpPr/>
-          <p:nvPr/>
-        </p:nvSpPr>
-        <p:spPr>
-          <a:xfrm>
-            <a:off x="457200" y="3611880"/>
-            <a:ext cx="8229600" cy="731520"/>
+          <p:cNvPr id="20" name="Text 18"/>
+          <p:cNvSpPr/>
+          <p:nvPr/>
+        </p:nvSpPr>
+        <p:spPr>
+          <a:xfrm>
+            <a:off x="1325880" y="3246120"/>
+            <a:ext cx="7132320" cy="256032"/>
+          </a:xfrm>
+          <a:prstGeom prst="rect">
+            <a:avLst/>
+          </a:prstGeom>
+          <a:noFill/>
+          <a:ln/>
+        </p:spPr>
+        <p:txBody>
+          <a:bodyPr wrap="square" lIns="0" tIns="0" rIns="0" bIns="0" rtlCol="0" anchor="ctr"/>
+          <a:lstStyle/>
+          <a:p>
+            <a:pPr indent="0" marL="0">
+              <a:buNone/>
+            </a:pPr>
+            <a:r>
+              <a:rPr lang="en-US" sz="1300" dirty="0">
+                <a:solidFill>
+                  <a:srgbClr val="3D555C"/>
+                </a:solidFill>
+                <a:latin typeface="Calibri" pitchFamily="34" charset="0"/>
+                <a:ea typeface="Calibri" pitchFamily="34" charset="-122"/>
+                <a:cs typeface="Calibri" pitchFamily="34" charset="-120"/>
+              </a:rPr>
+              <a:t>自 2025-08-26 后无业务变更；日报 Draft PR 堆积，维护信号偏弱</a:t>
+            </a:r>
+            <a:endParaRPr lang="en-US" sz="1300" dirty="0"/>
+          </a:p>
+        </p:txBody>
+      </p:sp>
+      <p:sp>
+        <p:nvSpPr>
+          <p:cNvPr id="21" name="Shape 19"/>
+          <p:cNvSpPr/>
+          <p:nvPr/>
+        </p:nvSpPr>
+        <p:spPr>
+          <a:xfrm>
+            <a:off x="457200" y="3703320"/>
+            <a:ext cx="8229600" cy="749808"/>
           </a:xfrm>
           <a:prstGeom prst="roundRect">
             <a:avLst>
-              <a:gd name="adj" fmla="val 10000"/>
+              <a:gd name="adj" fmla="val 9756"/>
             </a:avLst>
           </a:prstGeom>
           <a:solidFill>
@@ -8160,13 +8230,13 @@
       </p:sp>
       <p:sp>
         <p:nvSpPr>
-          <p:cNvPr id="23" name="Shape 21"/>
-          <p:cNvSpPr/>
-          <p:nvPr/>
-        </p:nvSpPr>
-        <p:spPr>
-          <a:xfrm>
-            <a:off x="594360" y="3776472"/>
+          <p:cNvPr id="22" name="Shape 20"/>
+          <p:cNvSpPr/>
+          <p:nvPr/>
+        </p:nvSpPr>
+        <p:spPr>
+          <a:xfrm>
+            <a:off x="640080" y="3877056"/>
             <a:ext cx="502920" cy="402336"/>
           </a:xfrm>
           <a:prstGeom prst="roundRect">
@@ -8182,53 +8252,53 @@
       </p:sp>
       <p:sp>
         <p:nvSpPr>
+          <p:cNvPr id="23" name="Text 21"/>
+          <p:cNvSpPr/>
+          <p:nvPr/>
+        </p:nvSpPr>
+        <p:spPr>
+          <a:xfrm>
+            <a:off x="640080" y="3941064"/>
+            <a:ext cx="502920" cy="274320"/>
+          </a:xfrm>
+          <a:prstGeom prst="rect">
+            <a:avLst/>
+          </a:prstGeom>
+          <a:noFill/>
+          <a:ln/>
+        </p:spPr>
+        <p:txBody>
+          <a:bodyPr wrap="square" lIns="0" tIns="0" rIns="0" bIns="0" rtlCol="0" anchor="ctr"/>
+          <a:lstStyle/>
+          <a:p>
+            <a:pPr algn="ctr" indent="0" marL="0">
+              <a:buNone/>
+            </a:pPr>
+            <a:r>
+              <a:rPr lang="en-US" sz="1300" b="1" dirty="0">
+                <a:solidFill>
+                  <a:srgbClr val="1B7A6E"/>
+                </a:solidFill>
+                <a:latin typeface="Calibri" pitchFamily="34" charset="0"/>
+                <a:ea typeface="Calibri" pitchFamily="34" charset="-122"/>
+                <a:cs typeface="Calibri" pitchFamily="34" charset="-120"/>
+              </a:rPr>
+              <a:t>低</a:t>
+            </a:r>
+            <a:endParaRPr lang="en-US" sz="1300" dirty="0"/>
+          </a:p>
+        </p:txBody>
+      </p:sp>
+      <p:sp>
+        <p:nvSpPr>
           <p:cNvPr id="24" name="Text 22"/>
           <p:cNvSpPr/>
           <p:nvPr/>
         </p:nvSpPr>
         <p:spPr>
           <a:xfrm>
-            <a:off x="594360" y="3840480"/>
-            <a:ext cx="502920" cy="274320"/>
-          </a:xfrm>
-          <a:prstGeom prst="rect">
-            <a:avLst/>
-          </a:prstGeom>
-          <a:noFill/>
-          <a:ln/>
-        </p:spPr>
-        <p:txBody>
-          <a:bodyPr wrap="square" lIns="0" tIns="0" rIns="0" bIns="0" rtlCol="0" anchor="ctr"/>
-          <a:lstStyle/>
-          <a:p>
-            <a:pPr algn="ctr" indent="0" marL="0">
-              <a:buNone/>
-            </a:pPr>
-            <a:r>
-              <a:rPr lang="en-US" sz="1200" b="1" dirty="0">
-                <a:solidFill>
-                  <a:srgbClr val="2A9D8F"/>
-                </a:solidFill>
-                <a:latin typeface="Calibri" pitchFamily="34" charset="0"/>
-                <a:ea typeface="Calibri" pitchFamily="34" charset="-122"/>
-                <a:cs typeface="Calibri" pitchFamily="34" charset="-120"/>
-              </a:rPr>
-              <a:t>低</a:t>
-            </a:r>
-            <a:endParaRPr lang="en-US" sz="1200" dirty="0"/>
-          </a:p>
-        </p:txBody>
-      </p:sp>
-      <p:sp>
-        <p:nvSpPr>
-          <p:cNvPr id="25" name="Text 23"/>
-          <p:cNvSpPr/>
-          <p:nvPr/>
-        </p:nvSpPr>
-        <p:spPr>
-          <a:xfrm>
-            <a:off x="1280160" y="3703320"/>
-            <a:ext cx="7223760" cy="274320"/>
+            <a:off x="1325880" y="3813048"/>
+            <a:ext cx="7132320" cy="274320"/>
           </a:xfrm>
           <a:prstGeom prst="rect">
             <a:avLst/>
@@ -8260,40 +8330,79 @@
       </p:sp>
       <p:sp>
         <p:nvSpPr>
+          <p:cNvPr id="25" name="Text 23"/>
+          <p:cNvSpPr/>
+          <p:nvPr/>
+        </p:nvSpPr>
+        <p:spPr>
+          <a:xfrm>
+            <a:off x="1325880" y="4114800"/>
+            <a:ext cx="7132320" cy="256032"/>
+          </a:xfrm>
+          <a:prstGeom prst="rect">
+            <a:avLst/>
+          </a:prstGeom>
+          <a:noFill/>
+          <a:ln/>
+        </p:spPr>
+        <p:txBody>
+          <a:bodyPr wrap="square" lIns="0" tIns="0" rIns="0" bIns="0" rtlCol="0" anchor="ctr"/>
+          <a:lstStyle/>
+          <a:p>
+            <a:pPr indent="0" marL="0">
+              <a:buNone/>
+            </a:pPr>
+            <a:r>
+              <a:rPr lang="en-US" sz="1300" dirty="0">
+                <a:solidFill>
+                  <a:srgbClr val="3D555C"/>
+                </a:solidFill>
+                <a:latin typeface="Calibri" pitchFamily="34" charset="0"/>
+                <a:ea typeface="Calibri" pitchFamily="34" charset="-122"/>
+                <a:cs typeface="Calibri" pitchFamily="34" charset="-120"/>
+              </a:rPr>
+              <a:t>无 GitHub Actions 工作流；仅有历史 Copilot 检查，回归依赖人工</a:t>
+            </a:r>
+            <a:endParaRPr lang="en-US" sz="1300" dirty="0"/>
+          </a:p>
+        </p:txBody>
+      </p:sp>
+      <p:sp>
+        <p:nvSpPr>
           <p:cNvPr id="26" name="Text 24"/>
           <p:cNvSpPr/>
           <p:nvPr/>
         </p:nvSpPr>
         <p:spPr>
           <a:xfrm>
-            <a:off x="1280160" y="3995928"/>
-            <a:ext cx="7223760" cy="256032"/>
-          </a:xfrm>
-          <a:prstGeom prst="rect">
-            <a:avLst/>
-          </a:prstGeom>
-          <a:noFill/>
-          <a:ln/>
-        </p:spPr>
-        <p:txBody>
-          <a:bodyPr wrap="square" lIns="0" tIns="0" rIns="0" bIns="0" rtlCol="0" anchor="ctr"/>
-          <a:lstStyle/>
-          <a:p>
-            <a:pPr indent="0" marL="0">
-              <a:buNone/>
-            </a:pPr>
-            <a:r>
-              <a:rPr lang="en-US" sz="1200" dirty="0">
-                <a:solidFill>
-                  <a:srgbClr val="5A6F76"/>
-                </a:solidFill>
-                <a:latin typeface="Calibri" pitchFamily="34" charset="0"/>
-                <a:ea typeface="Calibri" pitchFamily="34" charset="-122"/>
-                <a:cs typeface="Calibri" pitchFamily="34" charset="-120"/>
-              </a:rPr>
-              <a:t>无 .github workflows；仅有 Copilot 访问检查历史，回归依赖人工</a:t>
-            </a:r>
-            <a:endParaRPr lang="en-US" sz="1200" dirty="0"/>
+            <a:off x="457200" y="4800600"/>
+            <a:ext cx="6858000" cy="256032"/>
+          </a:xfrm>
+          <a:prstGeom prst="rect">
+            <a:avLst/>
+          </a:prstGeom>
+          <a:noFill/>
+          <a:ln/>
+        </p:spPr>
+        <p:txBody>
+          <a:bodyPr wrap="square" lIns="0" tIns="0" rIns="0" bIns="0" rtlCol="0" anchor="ctr"/>
+          <a:lstStyle/>
+          <a:p>
+            <a:pPr indent="0" marL="0">
+              <a:buNone/>
+            </a:pPr>
+            <a:r>
+              <a:rPr lang="en-US" sz="1000" dirty="0">
+                <a:solidFill>
+                  <a:srgbClr val="3D555C"/>
+                </a:solidFill>
+                <a:latin typeface="Calibri" pitchFamily="34" charset="0"/>
+                <a:ea typeface="Calibri" pitchFamily="34" charset="-122"/>
+                <a:cs typeface="Calibri" pitchFamily="34" charset="-120"/>
+              </a:rPr>
+              <a:t>yu-ai-code-mother  ·  每日状态  ·  2026-07-30</a:t>
+            </a:r>
+            <a:endParaRPr lang="en-US" sz="1000" dirty="0"/>
           </a:p>
         </p:txBody>
       </p:sp>
@@ -8305,65 +8414,26 @@
         </p:nvSpPr>
         <p:spPr>
           <a:xfrm>
-            <a:off x="457200" y="4828032"/>
-            <a:ext cx="6858000" cy="256032"/>
-          </a:xfrm>
-          <a:prstGeom prst="rect">
-            <a:avLst/>
-          </a:prstGeom>
-          <a:noFill/>
-          <a:ln/>
-        </p:spPr>
-        <p:txBody>
-          <a:bodyPr wrap="square" lIns="0" tIns="0" rIns="0" bIns="0" rtlCol="0" anchor="ctr"/>
-          <a:lstStyle/>
-          <a:p>
-            <a:pPr indent="0" marL="0">
+            <a:off x="7772400" y="4800600"/>
+            <a:ext cx="914400" cy="256032"/>
+          </a:xfrm>
+          <a:prstGeom prst="rect">
+            <a:avLst/>
+          </a:prstGeom>
+          <a:noFill/>
+          <a:ln/>
+        </p:spPr>
+        <p:txBody>
+          <a:bodyPr wrap="square" lIns="0" tIns="0" rIns="0" bIns="0" rtlCol="0" anchor="ctr"/>
+          <a:lstStyle/>
+          <a:p>
+            <a:pPr algn="r" indent="0" marL="0">
               <a:buNone/>
             </a:pPr>
             <a:r>
               <a:rPr lang="en-US" sz="1000" dirty="0">
                 <a:solidFill>
-                  <a:srgbClr val="5A6F76"/>
-                </a:solidFill>
-                <a:latin typeface="Calibri" pitchFamily="34" charset="0"/>
-                <a:ea typeface="Calibri" pitchFamily="34" charset="-122"/>
-                <a:cs typeface="Calibri" pitchFamily="34" charset="-120"/>
-              </a:rPr>
-              <a:t>yu-ai-code-mother  ·  每日状态  ·  2026-07-30</a:t>
-            </a:r>
-            <a:endParaRPr lang="en-US" sz="1000" dirty="0"/>
-          </a:p>
-        </p:txBody>
-      </p:sp>
-      <p:sp>
-        <p:nvSpPr>
-          <p:cNvPr id="28" name="Text 26"/>
-          <p:cNvSpPr/>
-          <p:nvPr/>
-        </p:nvSpPr>
-        <p:spPr>
-          <a:xfrm>
-            <a:off x="7772400" y="4828032"/>
-            <a:ext cx="914400" cy="256032"/>
-          </a:xfrm>
-          <a:prstGeom prst="rect">
-            <a:avLst/>
-          </a:prstGeom>
-          <a:noFill/>
-          <a:ln/>
-        </p:spPr>
-        <p:txBody>
-          <a:bodyPr wrap="square" lIns="0" tIns="0" rIns="0" bIns="0" rtlCol="0" anchor="ctr"/>
-          <a:lstStyle/>
-          <a:p>
-            <a:pPr algn="r" indent="0" marL="0">
-              <a:buNone/>
-            </a:pPr>
-            <a:r>
-              <a:rPr lang="en-US" sz="1000" dirty="0">
-                <a:solidFill>
-                  <a:srgbClr val="5A6F76"/>
+                  <a:srgbClr val="3D555C"/>
                 </a:solidFill>
                 <a:latin typeface="Calibri" pitchFamily="34" charset="0"/>
                 <a:ea typeface="Calibri" pitchFamily="34" charset="-122"/>
@@ -8434,7 +8504,7 @@
         <p:spPr>
           <a:xfrm>
             <a:off x="0" y="0"/>
-            <a:ext cx="9144000" cy="109728"/>
+            <a:ext cx="9144000" cy="91440"/>
           </a:xfrm>
           <a:prstGeom prst="rect">
             <a:avLst/>
@@ -8452,39 +8522,14 @@
       </p:sp>
       <p:sp>
         <p:nvSpPr>
-          <p:cNvPr id="4" name="Shape 2"/>
-          <p:cNvSpPr/>
-          <p:nvPr/>
-        </p:nvSpPr>
-        <p:spPr>
-          <a:xfrm>
-            <a:off x="0" y="109728"/>
-            <a:ext cx="109728" cy="5033772"/>
-          </a:xfrm>
-          <a:prstGeom prst="rect">
-            <a:avLst/>
-          </a:prstGeom>
-          <a:solidFill>
-            <a:srgbClr val="00A896"/>
-          </a:solidFill>
-          <a:ln w="12700">
-            <a:solidFill>
-              <a:srgbClr val="00A896"/>
-            </a:solidFill>
-            <a:prstDash val="solid"/>
-          </a:ln>
-        </p:spPr>
-      </p:sp>
-      <p:sp>
-        <p:nvSpPr>
-          <p:cNvPr id="5" name="Text 3"/>
+          <p:cNvPr id="4" name="Text 2"/>
           <p:cNvSpPr/>
           <p:nvPr/>
         </p:nvSpPr>
         <p:spPr>
           <a:xfrm>
             <a:off x="457200" y="256032"/>
-            <a:ext cx="8229600" cy="502920"/>
+            <a:ext cx="8229600" cy="457200"/>
           </a:xfrm>
           <a:prstGeom prst="rect">
             <a:avLst/>
@@ -8516,14 +8561,14 @@
       </p:sp>
       <p:sp>
         <p:nvSpPr>
-          <p:cNvPr id="6" name="Text 4"/>
-          <p:cNvSpPr/>
-          <p:nvPr/>
-        </p:nvSpPr>
-        <p:spPr>
-          <a:xfrm>
-            <a:off x="457200" y="749808"/>
-            <a:ext cx="8229600" cy="292608"/>
+          <p:cNvPr id="5" name="Text 3"/>
+          <p:cNvSpPr/>
+          <p:nvPr/>
+        </p:nvSpPr>
+        <p:spPr>
+          <a:xfrm>
+            <a:off x="457200" y="713232"/>
+            <a:ext cx="8229600" cy="274320"/>
           </a:xfrm>
           <a:prstGeom prst="rect">
             <a:avLst/>
@@ -8541,7 +8586,7 @@
             <a:r>
               <a:rPr lang="en-US" sz="1300" i="1" dirty="0">
                 <a:solidFill>
-                  <a:srgbClr val="5A6F76"/>
+                  <a:srgbClr val="3D555C"/>
                 </a:solidFill>
                 <a:latin typeface="Calibri" pitchFamily="34" charset="0"/>
                 <a:ea typeface="Calibri" pitchFamily="34" charset="-122"/>
@@ -8555,18 +8600,18 @@
       </p:sp>
       <p:sp>
         <p:nvSpPr>
-          <p:cNvPr id="7" name="Shape 5"/>
-          <p:cNvSpPr/>
-          <p:nvPr/>
-        </p:nvSpPr>
-        <p:spPr>
-          <a:xfrm>
-            <a:off x="457200" y="1188720"/>
-            <a:ext cx="4023360" cy="3291840"/>
+          <p:cNvPr id="6" name="Shape 4"/>
+          <p:cNvSpPr/>
+          <p:nvPr/>
+        </p:nvSpPr>
+        <p:spPr>
+          <a:xfrm>
+            <a:off x="457200" y="1097280"/>
+            <a:ext cx="4023360" cy="3383280"/>
           </a:xfrm>
           <a:prstGeom prst="roundRect">
             <a:avLst>
-              <a:gd name="adj" fmla="val 2778"/>
+              <a:gd name="adj" fmla="val 2703"/>
             </a:avLst>
           </a:prstGeom>
           <a:solidFill>
@@ -8577,13 +8622,13 @@
       </p:sp>
       <p:sp>
         <p:nvSpPr>
-          <p:cNvPr id="8" name="Text 6"/>
-          <p:cNvSpPr/>
-          <p:nvPr/>
-        </p:nvSpPr>
-        <p:spPr>
-          <a:xfrm>
-            <a:off x="685800" y="1371600"/>
+          <p:cNvPr id="7" name="Text 5"/>
+          <p:cNvSpPr/>
+          <p:nvPr/>
+        </p:nvSpPr>
+        <p:spPr>
+          <a:xfrm>
+            <a:off x="685800" y="1280160"/>
             <a:ext cx="3566160" cy="365760"/>
           </a:xfrm>
           <a:prstGeom prst="rect">
@@ -8616,13 +8661,13 @@
       </p:sp>
       <p:sp>
         <p:nvSpPr>
-          <p:cNvPr id="9" name="Text 7"/>
-          <p:cNvSpPr/>
-          <p:nvPr/>
-        </p:nvSpPr>
-        <p:spPr>
-          <a:xfrm>
-            <a:off x="685800" y="1920240"/>
+          <p:cNvPr id="8" name="Text 6"/>
+          <p:cNvSpPr/>
+          <p:nvPr/>
+        </p:nvSpPr>
+        <p:spPr>
+          <a:xfrm>
+            <a:off x="685800" y="1828800"/>
             <a:ext cx="3566160" cy="2286000"/>
           </a:xfrm>
           <a:prstGeom prst="rect">
@@ -8648,7 +8693,7 @@
                 <a:ea typeface="Calibri" pitchFamily="34" charset="-122"/>
                 <a:cs typeface="Calibri" pitchFamily="34" charset="-120"/>
               </a:rPr>
-              <a:t>修复 #5：reasoning_content 字段兼容</a:t>
+              <a:t>修复 #5：reasoning_content 兼容</a:t>
             </a:r>
             <a:endParaRPr lang="en-US" sz="1300" dirty="0"/>
           </a:p>
@@ -8684,7 +8729,7 @@
                 <a:ea typeface="Calibri" pitchFamily="34" charset="-122"/>
                 <a:cs typeface="Calibri" pitchFamily="34" charset="-120"/>
               </a:rPr>
-              <a:t>补充 youcom.api-key 运维与密钥管理说明</a:t>
+              <a:t>补充 youcom 密钥与配置运维说明</a:t>
             </a:r>
             <a:endParaRPr lang="en-US" sz="1300" dirty="0"/>
           </a:p>
@@ -8702,7 +8747,7 @@
                 <a:ea typeface="Calibri" pitchFamily="34" charset="-122"/>
                 <a:cs typeface="Calibri" pitchFamily="34" charset="-120"/>
               </a:rPr>
-              <a:t>梳理历史 Draft 日报 PR 的合入策略</a:t>
+              <a:t>梳理历史 Draft 日报 PR 合入策略</a:t>
             </a:r>
             <a:endParaRPr lang="en-US" sz="1300" dirty="0"/>
           </a:p>
@@ -8720,7 +8765,7 @@
                 <a:ea typeface="Calibri" pitchFamily="34" charset="-122"/>
                 <a:cs typeface="Calibri" pitchFamily="34" charset="-120"/>
               </a:rPr>
-              <a:t>将 Grafana 指标导出到日报指标区</a:t>
+              <a:t>将 Grafana 指标纳入日报指标区</a:t>
             </a:r>
             <a:endParaRPr lang="en-US" sz="1300" dirty="0"/>
           </a:p>
@@ -8728,18 +8773,18 @@
       </p:sp>
       <p:sp>
         <p:nvSpPr>
-          <p:cNvPr id="10" name="Shape 8"/>
-          <p:cNvSpPr/>
-          <p:nvPr/>
-        </p:nvSpPr>
-        <p:spPr>
-          <a:xfrm>
-            <a:off x="4663440" y="1188720"/>
-            <a:ext cx="4023360" cy="3291840"/>
+          <p:cNvPr id="9" name="Shape 7"/>
+          <p:cNvSpPr/>
+          <p:nvPr/>
+        </p:nvSpPr>
+        <p:spPr>
+          <a:xfrm>
+            <a:off x="4754880" y="1097280"/>
+            <a:ext cx="3931920" cy="3383280"/>
           </a:xfrm>
           <a:prstGeom prst="roundRect">
             <a:avLst>
-              <a:gd name="adj" fmla="val 2778"/>
+              <a:gd name="adj" fmla="val 2703"/>
             </a:avLst>
           </a:prstGeom>
           <a:solidFill>
@@ -8750,14 +8795,14 @@
       </p:sp>
       <p:sp>
         <p:nvSpPr>
-          <p:cNvPr id="11" name="Text 9"/>
-          <p:cNvSpPr/>
-          <p:nvPr/>
-        </p:nvSpPr>
-        <p:spPr>
-          <a:xfrm>
-            <a:off x="4892040" y="1371600"/>
-            <a:ext cx="3566160" cy="365760"/>
+          <p:cNvPr id="10" name="Text 8"/>
+          <p:cNvSpPr/>
+          <p:nvPr/>
+        </p:nvSpPr>
+        <p:spPr>
+          <a:xfrm>
+            <a:off x="4983480" y="1280160"/>
+            <a:ext cx="3474720" cy="365760"/>
           </a:xfrm>
           <a:prstGeom prst="rect">
             <a:avLst/>
@@ -8789,13 +8834,13 @@
       </p:sp>
       <p:sp>
         <p:nvSpPr>
-          <p:cNvPr id="12" name="Shape 10"/>
-          <p:cNvSpPr/>
-          <p:nvPr/>
-        </p:nvSpPr>
-        <p:spPr>
-          <a:xfrm>
-            <a:off x="4937760" y="1874520"/>
+          <p:cNvPr id="11" name="Shape 9"/>
+          <p:cNvSpPr/>
+          <p:nvPr/>
+        </p:nvSpPr>
+        <p:spPr>
+          <a:xfrm>
+            <a:off x="5029200" y="1828800"/>
             <a:ext cx="292608" cy="292608"/>
           </a:xfrm>
           <a:prstGeom prst="ellipse">
@@ -8814,53 +8859,53 @@
       </p:sp>
       <p:sp>
         <p:nvSpPr>
+          <p:cNvPr id="12" name="Text 10"/>
+          <p:cNvSpPr/>
+          <p:nvPr/>
+        </p:nvSpPr>
+        <p:spPr>
+          <a:xfrm>
+            <a:off x="5029200" y="1847088"/>
+            <a:ext cx="292608" cy="256032"/>
+          </a:xfrm>
+          <a:prstGeom prst="rect">
+            <a:avLst/>
+          </a:prstGeom>
+          <a:noFill/>
+          <a:ln/>
+        </p:spPr>
+        <p:txBody>
+          <a:bodyPr wrap="square" lIns="0" tIns="0" rIns="0" bIns="0" rtlCol="0" anchor="ctr"/>
+          <a:lstStyle/>
+          <a:p>
+            <a:pPr algn="ctr" indent="0" marL="0">
+              <a:buNone/>
+            </a:pPr>
+            <a:r>
+              <a:rPr lang="en-US" sz="1200" b="1" dirty="0">
+                <a:solidFill>
+                  <a:srgbClr val="012A36"/>
+                </a:solidFill>
+                <a:latin typeface="Calibri" pitchFamily="34" charset="0"/>
+                <a:ea typeface="Calibri" pitchFamily="34" charset="-122"/>
+                <a:cs typeface="Calibri" pitchFamily="34" charset="-120"/>
+              </a:rPr>
+              <a:t>1</a:t>
+            </a:r>
+            <a:endParaRPr lang="en-US" sz="1200" dirty="0"/>
+          </a:p>
+        </p:txBody>
+      </p:sp>
+      <p:sp>
+        <p:nvSpPr>
           <p:cNvPr id="13" name="Text 11"/>
           <p:cNvSpPr/>
           <p:nvPr/>
         </p:nvSpPr>
         <p:spPr>
           <a:xfrm>
-            <a:off x="4937760" y="1892808"/>
-            <a:ext cx="292608" cy="256032"/>
-          </a:xfrm>
-          <a:prstGeom prst="rect">
-            <a:avLst/>
-          </a:prstGeom>
-          <a:noFill/>
-          <a:ln/>
-        </p:spPr>
-        <p:txBody>
-          <a:bodyPr wrap="square" lIns="0" tIns="0" rIns="0" bIns="0" rtlCol="0" anchor="ctr"/>
-          <a:lstStyle/>
-          <a:p>
-            <a:pPr algn="ctr" indent="0" marL="0">
-              <a:buNone/>
-            </a:pPr>
-            <a:r>
-              <a:rPr lang="en-US" sz="1200" b="1" dirty="0">
-                <a:solidFill>
-                  <a:srgbClr val="012A36"/>
-                </a:solidFill>
-                <a:latin typeface="Calibri" pitchFamily="34" charset="0"/>
-                <a:ea typeface="Calibri" pitchFamily="34" charset="-122"/>
-                <a:cs typeface="Calibri" pitchFamily="34" charset="-120"/>
-              </a:rPr>
-              <a:t>1</a:t>
-            </a:r>
-            <a:endParaRPr lang="en-US" sz="1200" dirty="0"/>
-          </a:p>
-        </p:txBody>
-      </p:sp>
-      <p:sp>
-        <p:nvSpPr>
-          <p:cNvPr id="14" name="Text 12"/>
-          <p:cNvSpPr/>
-          <p:nvPr/>
-        </p:nvSpPr>
-        <p:spPr>
-          <a:xfrm>
-            <a:off x="5394960" y="1874520"/>
-            <a:ext cx="3017520" cy="320040"/>
+            <a:off x="5486400" y="1828800"/>
+            <a:ext cx="2926080" cy="320040"/>
           </a:xfrm>
           <a:prstGeom prst="rect">
             <a:avLst/>
@@ -8892,13 +8937,13 @@
       </p:sp>
       <p:sp>
         <p:nvSpPr>
-          <p:cNvPr id="15" name="Shape 13"/>
-          <p:cNvSpPr/>
-          <p:nvPr/>
-        </p:nvSpPr>
-        <p:spPr>
-          <a:xfrm>
-            <a:off x="4937760" y="2331720"/>
+          <p:cNvPr id="14" name="Shape 12"/>
+          <p:cNvSpPr/>
+          <p:nvPr/>
+        </p:nvSpPr>
+        <p:spPr>
+          <a:xfrm>
+            <a:off x="5029200" y="2286000"/>
             <a:ext cx="292608" cy="292608"/>
           </a:xfrm>
           <a:prstGeom prst="ellipse">
@@ -8917,53 +8962,53 @@
       </p:sp>
       <p:sp>
         <p:nvSpPr>
+          <p:cNvPr id="15" name="Text 13"/>
+          <p:cNvSpPr/>
+          <p:nvPr/>
+        </p:nvSpPr>
+        <p:spPr>
+          <a:xfrm>
+            <a:off x="5029200" y="2304288"/>
+            <a:ext cx="292608" cy="256032"/>
+          </a:xfrm>
+          <a:prstGeom prst="rect">
+            <a:avLst/>
+          </a:prstGeom>
+          <a:noFill/>
+          <a:ln/>
+        </p:spPr>
+        <p:txBody>
+          <a:bodyPr wrap="square" lIns="0" tIns="0" rIns="0" bIns="0" rtlCol="0" anchor="ctr"/>
+          <a:lstStyle/>
+          <a:p>
+            <a:pPr algn="ctr" indent="0" marL="0">
+              <a:buNone/>
+            </a:pPr>
+            <a:r>
+              <a:rPr lang="en-US" sz="1200" b="1" dirty="0">
+                <a:solidFill>
+                  <a:srgbClr val="012A36"/>
+                </a:solidFill>
+                <a:latin typeface="Calibri" pitchFamily="34" charset="0"/>
+                <a:ea typeface="Calibri" pitchFamily="34" charset="-122"/>
+                <a:cs typeface="Calibri" pitchFamily="34" charset="-120"/>
+              </a:rPr>
+              <a:t>2</a:t>
+            </a:r>
+            <a:endParaRPr lang="en-US" sz="1200" dirty="0"/>
+          </a:p>
+        </p:txBody>
+      </p:sp>
+      <p:sp>
+        <p:nvSpPr>
           <p:cNvPr id="16" name="Text 14"/>
           <p:cNvSpPr/>
           <p:nvPr/>
         </p:nvSpPr>
         <p:spPr>
           <a:xfrm>
-            <a:off x="4937760" y="2350008"/>
-            <a:ext cx="292608" cy="256032"/>
-          </a:xfrm>
-          <a:prstGeom prst="rect">
-            <a:avLst/>
-          </a:prstGeom>
-          <a:noFill/>
-          <a:ln/>
-        </p:spPr>
-        <p:txBody>
-          <a:bodyPr wrap="square" lIns="0" tIns="0" rIns="0" bIns="0" rtlCol="0" anchor="ctr"/>
-          <a:lstStyle/>
-          <a:p>
-            <a:pPr algn="ctr" indent="0" marL="0">
-              <a:buNone/>
-            </a:pPr>
-            <a:r>
-              <a:rPr lang="en-US" sz="1200" b="1" dirty="0">
-                <a:solidFill>
-                  <a:srgbClr val="012A36"/>
-                </a:solidFill>
-                <a:latin typeface="Calibri" pitchFamily="34" charset="0"/>
-                <a:ea typeface="Calibri" pitchFamily="34" charset="-122"/>
-                <a:cs typeface="Calibri" pitchFamily="34" charset="-120"/>
-              </a:rPr>
-              <a:t>2</a:t>
-            </a:r>
-            <a:endParaRPr lang="en-US" sz="1200" dirty="0"/>
-          </a:p>
-        </p:txBody>
-      </p:sp>
-      <p:sp>
-        <p:nvSpPr>
-          <p:cNvPr id="17" name="Text 15"/>
-          <p:cNvSpPr/>
-          <p:nvPr/>
-        </p:nvSpPr>
-        <p:spPr>
-          <a:xfrm>
-            <a:off x="5394960" y="2331720"/>
-            <a:ext cx="3017520" cy="320040"/>
+            <a:off x="5486400" y="2286000"/>
+            <a:ext cx="2926080" cy="320040"/>
           </a:xfrm>
           <a:prstGeom prst="rect">
             <a:avLst/>
@@ -8995,13 +9040,13 @@
       </p:sp>
       <p:sp>
         <p:nvSpPr>
-          <p:cNvPr id="18" name="Shape 16"/>
-          <p:cNvSpPr/>
-          <p:nvPr/>
-        </p:nvSpPr>
-        <p:spPr>
-          <a:xfrm>
-            <a:off x="4937760" y="2788920"/>
+          <p:cNvPr id="17" name="Shape 15"/>
+          <p:cNvSpPr/>
+          <p:nvPr/>
+        </p:nvSpPr>
+        <p:spPr>
+          <a:xfrm>
+            <a:off x="5029200" y="2743200"/>
             <a:ext cx="292608" cy="292608"/>
           </a:xfrm>
           <a:prstGeom prst="ellipse">
@@ -9020,53 +9065,53 @@
       </p:sp>
       <p:sp>
         <p:nvSpPr>
+          <p:cNvPr id="18" name="Text 16"/>
+          <p:cNvSpPr/>
+          <p:nvPr/>
+        </p:nvSpPr>
+        <p:spPr>
+          <a:xfrm>
+            <a:off x="5029200" y="2761488"/>
+            <a:ext cx="292608" cy="256032"/>
+          </a:xfrm>
+          <a:prstGeom prst="rect">
+            <a:avLst/>
+          </a:prstGeom>
+          <a:noFill/>
+          <a:ln/>
+        </p:spPr>
+        <p:txBody>
+          <a:bodyPr wrap="square" lIns="0" tIns="0" rIns="0" bIns="0" rtlCol="0" anchor="ctr"/>
+          <a:lstStyle/>
+          <a:p>
+            <a:pPr algn="ctr" indent="0" marL="0">
+              <a:buNone/>
+            </a:pPr>
+            <a:r>
+              <a:rPr lang="en-US" sz="1200" b="1" dirty="0">
+                <a:solidFill>
+                  <a:srgbClr val="012A36"/>
+                </a:solidFill>
+                <a:latin typeface="Calibri" pitchFamily="34" charset="0"/>
+                <a:ea typeface="Calibri" pitchFamily="34" charset="-122"/>
+                <a:cs typeface="Calibri" pitchFamily="34" charset="-120"/>
+              </a:rPr>
+              <a:t>3</a:t>
+            </a:r>
+            <a:endParaRPr lang="en-US" sz="1200" dirty="0"/>
+          </a:p>
+        </p:txBody>
+      </p:sp>
+      <p:sp>
+        <p:nvSpPr>
           <p:cNvPr id="19" name="Text 17"/>
           <p:cNvSpPr/>
           <p:nvPr/>
         </p:nvSpPr>
         <p:spPr>
           <a:xfrm>
-            <a:off x="4937760" y="2807208"/>
-            <a:ext cx="292608" cy="256032"/>
-          </a:xfrm>
-          <a:prstGeom prst="rect">
-            <a:avLst/>
-          </a:prstGeom>
-          <a:noFill/>
-          <a:ln/>
-        </p:spPr>
-        <p:txBody>
-          <a:bodyPr wrap="square" lIns="0" tIns="0" rIns="0" bIns="0" rtlCol="0" anchor="ctr"/>
-          <a:lstStyle/>
-          <a:p>
-            <a:pPr algn="ctr" indent="0" marL="0">
-              <a:buNone/>
-            </a:pPr>
-            <a:r>
-              <a:rPr lang="en-US" sz="1200" b="1" dirty="0">
-                <a:solidFill>
-                  <a:srgbClr val="012A36"/>
-                </a:solidFill>
-                <a:latin typeface="Calibri" pitchFamily="34" charset="0"/>
-                <a:ea typeface="Calibri" pitchFamily="34" charset="-122"/>
-                <a:cs typeface="Calibri" pitchFamily="34" charset="-120"/>
-              </a:rPr>
-              <a:t>3</a:t>
-            </a:r>
-            <a:endParaRPr lang="en-US" sz="1200" dirty="0"/>
-          </a:p>
-        </p:txBody>
-      </p:sp>
-      <p:sp>
-        <p:nvSpPr>
-          <p:cNvPr id="20" name="Text 18"/>
-          <p:cNvSpPr/>
-          <p:nvPr/>
-        </p:nvSpPr>
-        <p:spPr>
-          <a:xfrm>
-            <a:off x="5394960" y="2788920"/>
-            <a:ext cx="3017520" cy="320040"/>
+            <a:off x="5486400" y="2743200"/>
+            <a:ext cx="2926080" cy="320040"/>
           </a:xfrm>
           <a:prstGeom prst="rect">
             <a:avLst/>
@@ -9098,13 +9143,13 @@
       </p:sp>
       <p:sp>
         <p:nvSpPr>
-          <p:cNvPr id="21" name="Shape 19"/>
-          <p:cNvSpPr/>
-          <p:nvPr/>
-        </p:nvSpPr>
-        <p:spPr>
-          <a:xfrm>
-            <a:off x="4937760" y="3246120"/>
+          <p:cNvPr id="20" name="Shape 18"/>
+          <p:cNvSpPr/>
+          <p:nvPr/>
+        </p:nvSpPr>
+        <p:spPr>
+          <a:xfrm>
+            <a:off x="5029200" y="3200400"/>
             <a:ext cx="292608" cy="292608"/>
           </a:xfrm>
           <a:prstGeom prst="ellipse">
@@ -9123,53 +9168,53 @@
       </p:sp>
       <p:sp>
         <p:nvSpPr>
+          <p:cNvPr id="21" name="Text 19"/>
+          <p:cNvSpPr/>
+          <p:nvPr/>
+        </p:nvSpPr>
+        <p:spPr>
+          <a:xfrm>
+            <a:off x="5029200" y="3218688"/>
+            <a:ext cx="292608" cy="256032"/>
+          </a:xfrm>
+          <a:prstGeom prst="rect">
+            <a:avLst/>
+          </a:prstGeom>
+          <a:noFill/>
+          <a:ln/>
+        </p:spPr>
+        <p:txBody>
+          <a:bodyPr wrap="square" lIns="0" tIns="0" rIns="0" bIns="0" rtlCol="0" anchor="ctr"/>
+          <a:lstStyle/>
+          <a:p>
+            <a:pPr algn="ctr" indent="0" marL="0">
+              <a:buNone/>
+            </a:pPr>
+            <a:r>
+              <a:rPr lang="en-US" sz="1200" b="1" dirty="0">
+                <a:solidFill>
+                  <a:srgbClr val="012A36"/>
+                </a:solidFill>
+                <a:latin typeface="Calibri" pitchFamily="34" charset="0"/>
+                <a:ea typeface="Calibri" pitchFamily="34" charset="-122"/>
+                <a:cs typeface="Calibri" pitchFamily="34" charset="-120"/>
+              </a:rPr>
+              <a:t>4</a:t>
+            </a:r>
+            <a:endParaRPr lang="en-US" sz="1200" dirty="0"/>
+          </a:p>
+        </p:txBody>
+      </p:sp>
+      <p:sp>
+        <p:nvSpPr>
           <p:cNvPr id="22" name="Text 20"/>
           <p:cNvSpPr/>
           <p:nvPr/>
         </p:nvSpPr>
         <p:spPr>
           <a:xfrm>
-            <a:off x="4937760" y="3264408"/>
-            <a:ext cx="292608" cy="256032"/>
-          </a:xfrm>
-          <a:prstGeom prst="rect">
-            <a:avLst/>
-          </a:prstGeom>
-          <a:noFill/>
-          <a:ln/>
-        </p:spPr>
-        <p:txBody>
-          <a:bodyPr wrap="square" lIns="0" tIns="0" rIns="0" bIns="0" rtlCol="0" anchor="ctr"/>
-          <a:lstStyle/>
-          <a:p>
-            <a:pPr algn="ctr" indent="0" marL="0">
-              <a:buNone/>
-            </a:pPr>
-            <a:r>
-              <a:rPr lang="en-US" sz="1200" b="1" dirty="0">
-                <a:solidFill>
-                  <a:srgbClr val="012A36"/>
-                </a:solidFill>
-                <a:latin typeface="Calibri" pitchFamily="34" charset="0"/>
-                <a:ea typeface="Calibri" pitchFamily="34" charset="-122"/>
-                <a:cs typeface="Calibri" pitchFamily="34" charset="-120"/>
-              </a:rPr>
-              <a:t>4</a:t>
-            </a:r>
-            <a:endParaRPr lang="en-US" sz="1200" dirty="0"/>
-          </a:p>
-        </p:txBody>
-      </p:sp>
-      <p:sp>
-        <p:nvSpPr>
-          <p:cNvPr id="23" name="Text 21"/>
-          <p:cNvSpPr/>
-          <p:nvPr/>
-        </p:nvSpPr>
-        <p:spPr>
-          <a:xfrm>
-            <a:off x="5394960" y="3246120"/>
-            <a:ext cx="3017520" cy="320040"/>
+            <a:off x="5486400" y="3200400"/>
+            <a:ext cx="2926080" cy="320040"/>
           </a:xfrm>
           <a:prstGeom prst="rect">
             <a:avLst/>
@@ -9193,7 +9238,7 @@
                 <a:ea typeface="Calibri" pitchFamily="34" charset="-122"/>
                 <a:cs typeface="Calibri" pitchFamily="34" charset="-120"/>
               </a:rPr>
-              <a:t>接入 Token/成功率等运行指标</a:t>
+              <a:t>接入 Token 与成功率等运行指标</a:t>
             </a:r>
             <a:endParaRPr lang="en-US" sz="1300" dirty="0"/>
           </a:p>
@@ -9201,13 +9246,13 @@
       </p:sp>
       <p:sp>
         <p:nvSpPr>
-          <p:cNvPr id="24" name="Shape 22"/>
-          <p:cNvSpPr/>
-          <p:nvPr/>
-        </p:nvSpPr>
-        <p:spPr>
-          <a:xfrm>
-            <a:off x="4937760" y="3703320"/>
+          <p:cNvPr id="23" name="Shape 21"/>
+          <p:cNvSpPr/>
+          <p:nvPr/>
+        </p:nvSpPr>
+        <p:spPr>
+          <a:xfrm>
+            <a:off x="5029200" y="3657600"/>
             <a:ext cx="292608" cy="292608"/>
           </a:xfrm>
           <a:prstGeom prst="ellipse">
@@ -9226,40 +9271,79 @@
       </p:sp>
       <p:sp>
         <p:nvSpPr>
+          <p:cNvPr id="24" name="Text 22"/>
+          <p:cNvSpPr/>
+          <p:nvPr/>
+        </p:nvSpPr>
+        <p:spPr>
+          <a:xfrm>
+            <a:off x="5029200" y="3675888"/>
+            <a:ext cx="292608" cy="256032"/>
+          </a:xfrm>
+          <a:prstGeom prst="rect">
+            <a:avLst/>
+          </a:prstGeom>
+          <a:noFill/>
+          <a:ln/>
+        </p:spPr>
+        <p:txBody>
+          <a:bodyPr wrap="square" lIns="0" tIns="0" rIns="0" bIns="0" rtlCol="0" anchor="ctr"/>
+          <a:lstStyle/>
+          <a:p>
+            <a:pPr algn="ctr" indent="0" marL="0">
+              <a:buNone/>
+            </a:pPr>
+            <a:r>
+              <a:rPr lang="en-US" sz="1200" b="1" dirty="0">
+                <a:solidFill>
+                  <a:srgbClr val="012A36"/>
+                </a:solidFill>
+                <a:latin typeface="Calibri" pitchFamily="34" charset="0"/>
+                <a:ea typeface="Calibri" pitchFamily="34" charset="-122"/>
+                <a:cs typeface="Calibri" pitchFamily="34" charset="-120"/>
+              </a:rPr>
+              <a:t>5</a:t>
+            </a:r>
+            <a:endParaRPr lang="en-US" sz="1200" dirty="0"/>
+          </a:p>
+        </p:txBody>
+      </p:sp>
+      <p:sp>
+        <p:nvSpPr>
           <p:cNvPr id="25" name="Text 23"/>
           <p:cNvSpPr/>
           <p:nvPr/>
         </p:nvSpPr>
         <p:spPr>
           <a:xfrm>
-            <a:off x="4937760" y="3721608"/>
-            <a:ext cx="292608" cy="256032"/>
-          </a:xfrm>
-          <a:prstGeom prst="rect">
-            <a:avLst/>
-          </a:prstGeom>
-          <a:noFill/>
-          <a:ln/>
-        </p:spPr>
-        <p:txBody>
-          <a:bodyPr wrap="square" lIns="0" tIns="0" rIns="0" bIns="0" rtlCol="0" anchor="ctr"/>
-          <a:lstStyle/>
-          <a:p>
-            <a:pPr algn="ctr" indent="0" marL="0">
-              <a:buNone/>
-            </a:pPr>
-            <a:r>
-              <a:rPr lang="en-US" sz="1200" b="1" dirty="0">
-                <a:solidFill>
-                  <a:srgbClr val="012A36"/>
-                </a:solidFill>
-                <a:latin typeface="Calibri" pitchFamily="34" charset="0"/>
-                <a:ea typeface="Calibri" pitchFamily="34" charset="-122"/>
-                <a:cs typeface="Calibri" pitchFamily="34" charset="-120"/>
-              </a:rPr>
-              <a:t>5</a:t>
-            </a:r>
-            <a:endParaRPr lang="en-US" sz="1200" dirty="0"/>
+            <a:off x="5486400" y="3657600"/>
+            <a:ext cx="2926080" cy="320040"/>
+          </a:xfrm>
+          <a:prstGeom prst="rect">
+            <a:avLst/>
+          </a:prstGeom>
+          <a:noFill/>
+          <a:ln/>
+        </p:spPr>
+        <p:txBody>
+          <a:bodyPr wrap="square" lIns="0" tIns="0" rIns="0" bIns="0" rtlCol="0" anchor="ctr"/>
+          <a:lstStyle/>
+          <a:p>
+            <a:pPr indent="0" marL="0">
+              <a:buNone/>
+            </a:pPr>
+            <a:r>
+              <a:rPr lang="en-US" sz="1300" dirty="0">
+                <a:solidFill>
+                  <a:srgbClr val="FFFFFF"/>
+                </a:solidFill>
+                <a:latin typeface="Calibri" pitchFamily="34" charset="0"/>
+                <a:ea typeface="Calibri" pitchFamily="34" charset="-122"/>
+                <a:cs typeface="Calibri" pitchFamily="34" charset="-120"/>
+              </a:rPr>
+              <a:t>评估微服务与单体同步维护成本</a:t>
+            </a:r>
+            <a:endParaRPr lang="en-US" sz="1300" dirty="0"/>
           </a:p>
         </p:txBody>
       </p:sp>
@@ -9271,34 +9355,34 @@
         </p:nvSpPr>
         <p:spPr>
           <a:xfrm>
-            <a:off x="5394960" y="3703320"/>
-            <a:ext cx="3017520" cy="320040"/>
-          </a:xfrm>
-          <a:prstGeom prst="rect">
-            <a:avLst/>
-          </a:prstGeom>
-          <a:noFill/>
-          <a:ln/>
-        </p:spPr>
-        <p:txBody>
-          <a:bodyPr wrap="square" lIns="0" tIns="0" rIns="0" bIns="0" rtlCol="0" anchor="ctr"/>
-          <a:lstStyle/>
-          <a:p>
-            <a:pPr indent="0" marL="0">
-              <a:buNone/>
-            </a:pPr>
-            <a:r>
-              <a:rPr lang="en-US" sz="1300" dirty="0">
-                <a:solidFill>
-                  <a:srgbClr val="FFFFFF"/>
-                </a:solidFill>
-                <a:latin typeface="Calibri" pitchFamily="34" charset="0"/>
-                <a:ea typeface="Calibri" pitchFamily="34" charset="-122"/>
-                <a:cs typeface="Calibri" pitchFamily="34" charset="-120"/>
-              </a:rPr>
-              <a:t>评估微服务与单体同步维护成本</a:t>
-            </a:r>
-            <a:endParaRPr lang="en-US" sz="1300" dirty="0"/>
+            <a:off x="457200" y="4800600"/>
+            <a:ext cx="6858000" cy="256032"/>
+          </a:xfrm>
+          <a:prstGeom prst="rect">
+            <a:avLst/>
+          </a:prstGeom>
+          <a:noFill/>
+          <a:ln/>
+        </p:spPr>
+        <p:txBody>
+          <a:bodyPr wrap="square" lIns="0" tIns="0" rIns="0" bIns="0" rtlCol="0" anchor="ctr"/>
+          <a:lstStyle/>
+          <a:p>
+            <a:pPr indent="0" marL="0">
+              <a:buNone/>
+            </a:pPr>
+            <a:r>
+              <a:rPr lang="en-US" sz="1000" dirty="0">
+                <a:solidFill>
+                  <a:srgbClr val="3D555C"/>
+                </a:solidFill>
+                <a:latin typeface="Calibri" pitchFamily="34" charset="0"/>
+                <a:ea typeface="Calibri" pitchFamily="34" charset="-122"/>
+                <a:cs typeface="Calibri" pitchFamily="34" charset="-120"/>
+              </a:rPr>
+              <a:t>yu-ai-code-mother  ·  每日状态  ·  2026-07-30</a:t>
+            </a:r>
+            <a:endParaRPr lang="en-US" sz="1000" dirty="0"/>
           </a:p>
         </p:txBody>
       </p:sp>
@@ -9310,65 +9394,26 @@
         </p:nvSpPr>
         <p:spPr>
           <a:xfrm>
-            <a:off x="457200" y="4828032"/>
-            <a:ext cx="6858000" cy="256032"/>
-          </a:xfrm>
-          <a:prstGeom prst="rect">
-            <a:avLst/>
-          </a:prstGeom>
-          <a:noFill/>
-          <a:ln/>
-        </p:spPr>
-        <p:txBody>
-          <a:bodyPr wrap="square" lIns="0" tIns="0" rIns="0" bIns="0" rtlCol="0" anchor="ctr"/>
-          <a:lstStyle/>
-          <a:p>
-            <a:pPr indent="0" marL="0">
+            <a:off x="7772400" y="4800600"/>
+            <a:ext cx="914400" cy="256032"/>
+          </a:xfrm>
+          <a:prstGeom prst="rect">
+            <a:avLst/>
+          </a:prstGeom>
+          <a:noFill/>
+          <a:ln/>
+        </p:spPr>
+        <p:txBody>
+          <a:bodyPr wrap="square" lIns="0" tIns="0" rIns="0" bIns="0" rtlCol="0" anchor="ctr"/>
+          <a:lstStyle/>
+          <a:p>
+            <a:pPr algn="r" indent="0" marL="0">
               <a:buNone/>
             </a:pPr>
             <a:r>
               <a:rPr lang="en-US" sz="1000" dirty="0">
                 <a:solidFill>
-                  <a:srgbClr val="5A6F76"/>
-                </a:solidFill>
-                <a:latin typeface="Calibri" pitchFamily="34" charset="0"/>
-                <a:ea typeface="Calibri" pitchFamily="34" charset="-122"/>
-                <a:cs typeface="Calibri" pitchFamily="34" charset="-120"/>
-              </a:rPr>
-              <a:t>yu-ai-code-mother  ·  每日状态  ·  2026-07-30</a:t>
-            </a:r>
-            <a:endParaRPr lang="en-US" sz="1000" dirty="0"/>
-          </a:p>
-        </p:txBody>
-      </p:sp>
-      <p:sp>
-        <p:nvSpPr>
-          <p:cNvPr id="28" name="Text 26"/>
-          <p:cNvSpPr/>
-          <p:nvPr/>
-        </p:nvSpPr>
-        <p:spPr>
-          <a:xfrm>
-            <a:off x="7772400" y="4828032"/>
-            <a:ext cx="914400" cy="256032"/>
-          </a:xfrm>
-          <a:prstGeom prst="rect">
-            <a:avLst/>
-          </a:prstGeom>
-          <a:noFill/>
-          <a:ln/>
-        </p:spPr>
-        <p:txBody>
-          <a:bodyPr wrap="square" lIns="0" tIns="0" rIns="0" bIns="0" rtlCol="0" anchor="ctr"/>
-          <a:lstStyle/>
-          <a:p>
-            <a:pPr algn="r" indent="0" marL="0">
-              <a:buNone/>
-            </a:pPr>
-            <a:r>
-              <a:rPr lang="en-US" sz="1000" dirty="0">
-                <a:solidFill>
-                  <a:srgbClr val="5A6F76"/>
+                  <a:srgbClr val="3D555C"/>
                 </a:solidFill>
                 <a:latin typeface="Calibri" pitchFamily="34" charset="0"/>
                 <a:ea typeface="Calibri" pitchFamily="34" charset="-122"/>
@@ -9439,7 +9484,7 @@
         <p:spPr>
           <a:xfrm>
             <a:off x="0" y="0"/>
-            <a:ext cx="9144000" cy="109728"/>
+            <a:ext cx="9144000" cy="91440"/>
           </a:xfrm>
           <a:prstGeom prst="rect">
             <a:avLst/>
@@ -9457,39 +9502,14 @@
       </p:sp>
       <p:sp>
         <p:nvSpPr>
-          <p:cNvPr id="4" name="Shape 2"/>
-          <p:cNvSpPr/>
-          <p:nvPr/>
-        </p:nvSpPr>
-        <p:spPr>
-          <a:xfrm>
-            <a:off x="0" y="109728"/>
-            <a:ext cx="109728" cy="5033772"/>
-          </a:xfrm>
-          <a:prstGeom prst="rect">
-            <a:avLst/>
-          </a:prstGeom>
-          <a:solidFill>
-            <a:srgbClr val="00A896"/>
-          </a:solidFill>
-          <a:ln w="12700">
-            <a:solidFill>
-              <a:srgbClr val="00A896"/>
-            </a:solidFill>
-            <a:prstDash val="solid"/>
-          </a:ln>
-        </p:spPr>
-      </p:sp>
-      <p:sp>
-        <p:nvSpPr>
-          <p:cNvPr id="5" name="Text 3"/>
+          <p:cNvPr id="4" name="Text 2"/>
           <p:cNvSpPr/>
           <p:nvPr/>
         </p:nvSpPr>
         <p:spPr>
           <a:xfrm>
             <a:off x="457200" y="256032"/>
-            <a:ext cx="8229600" cy="502920"/>
+            <a:ext cx="8229600" cy="457200"/>
           </a:xfrm>
           <a:prstGeom prst="rect">
             <a:avLst/>
@@ -9521,14 +9541,14 @@
       </p:sp>
       <p:sp>
         <p:nvSpPr>
-          <p:cNvPr id="6" name="Text 4"/>
-          <p:cNvSpPr/>
-          <p:nvPr/>
-        </p:nvSpPr>
-        <p:spPr>
-          <a:xfrm>
-            <a:off x="457200" y="749808"/>
-            <a:ext cx="8229600" cy="292608"/>
+          <p:cNvPr id="5" name="Text 3"/>
+          <p:cNvSpPr/>
+          <p:nvPr/>
+        </p:nvSpPr>
+        <p:spPr>
+          <a:xfrm>
+            <a:off x="457200" y="713232"/>
+            <a:ext cx="8229600" cy="274320"/>
           </a:xfrm>
           <a:prstGeom prst="rect">
             <a:avLst/>
@@ -9546,7 +9566,7 @@
             <a:r>
               <a:rPr lang="en-US" sz="1300" i="1" dirty="0">
                 <a:solidFill>
-                  <a:srgbClr val="5A6F76"/>
+                  <a:srgbClr val="3D555C"/>
                 </a:solidFill>
                 <a:latin typeface="Calibri" pitchFamily="34" charset="0"/>
                 <a:ea typeface="Calibri" pitchFamily="34" charset="-122"/>
@@ -9560,18 +9580,18 @@
       </p:sp>
       <p:sp>
         <p:nvSpPr>
-          <p:cNvPr id="7" name="Shape 5"/>
-          <p:cNvSpPr/>
-          <p:nvPr/>
-        </p:nvSpPr>
-        <p:spPr>
-          <a:xfrm>
-            <a:off x="457200" y="1188720"/>
-            <a:ext cx="8229600" cy="914400"/>
+          <p:cNvPr id="6" name="Shape 4"/>
+          <p:cNvSpPr/>
+          <p:nvPr/>
+        </p:nvSpPr>
+        <p:spPr>
+          <a:xfrm>
+            <a:off x="457200" y="1097280"/>
+            <a:ext cx="8229600" cy="960120"/>
           </a:xfrm>
           <a:prstGeom prst="roundRect">
             <a:avLst>
-              <a:gd name="adj" fmla="val 10000"/>
+              <a:gd name="adj" fmla="val 9524"/>
             </a:avLst>
           </a:prstGeom>
           <a:solidFill>
@@ -9582,13 +9602,13 @@
       </p:sp>
       <p:sp>
         <p:nvSpPr>
-          <p:cNvPr id="8" name="Text 6"/>
-          <p:cNvSpPr/>
-          <p:nvPr/>
-        </p:nvSpPr>
-        <p:spPr>
-          <a:xfrm>
-            <a:off x="685800" y="1325880"/>
+          <p:cNvPr id="7" name="Text 5"/>
+          <p:cNvSpPr/>
+          <p:nvPr/>
+        </p:nvSpPr>
+        <p:spPr>
+          <a:xfrm>
+            <a:off x="685800" y="1234440"/>
             <a:ext cx="7772400" cy="320040"/>
           </a:xfrm>
           <a:prstGeom prst="rect">
@@ -9621,13 +9641,13 @@
       </p:sp>
       <p:sp>
         <p:nvSpPr>
-          <p:cNvPr id="9" name="Text 7"/>
-          <p:cNvSpPr/>
-          <p:nvPr/>
-        </p:nvSpPr>
-        <p:spPr>
-          <a:xfrm>
-            <a:off x="685800" y="1691640"/>
+          <p:cNvPr id="8" name="Text 6"/>
+          <p:cNvSpPr/>
+          <p:nvPr/>
+        </p:nvSpPr>
+        <p:spPr>
+          <a:xfrm>
+            <a:off x="685800" y="1600200"/>
             <a:ext cx="7772400" cy="274320"/>
           </a:xfrm>
           <a:prstGeom prst="rect">
@@ -9646,13 +9666,13 @@
             <a:r>
               <a:rPr lang="en-US" sz="1300" dirty="0">
                 <a:solidFill>
-                  <a:srgbClr val="5A6F76"/>
-                </a:solidFill>
-                <a:latin typeface="Calibri" pitchFamily="34" charset="0"/>
-                <a:ea typeface="Calibri" pitchFamily="34" charset="-122"/>
-                <a:cs typeface="Calibri" pitchFamily="34" charset="-120"/>
-              </a:rPr>
-              <a:t>最近 Actions 记录仅为 Copilot 访问检查（2026-03 成功），不能作为构建/测试门禁依据。</a:t>
+                  <a:srgbClr val="3D555C"/>
+                </a:solidFill>
+                <a:latin typeface="Calibri" pitchFamily="34" charset="0"/>
+                <a:ea typeface="Calibri" pitchFamily="34" charset="-122"/>
+                <a:cs typeface="Calibri" pitchFamily="34" charset="-120"/>
+              </a:rPr>
+              <a:t>最近 Actions 记录仅为 Copilot 访问检查（2026-03 成功），不能作为构建或测试门禁依据。</a:t>
             </a:r>
             <a:endParaRPr lang="en-US" sz="1300" dirty="0"/>
           </a:p>
@@ -9660,18 +9680,18 @@
       </p:sp>
       <p:sp>
         <p:nvSpPr>
-          <p:cNvPr id="10" name="Shape 8"/>
-          <p:cNvSpPr/>
-          <p:nvPr/>
-        </p:nvSpPr>
-        <p:spPr>
-          <a:xfrm>
-            <a:off x="457200" y="2331720"/>
-            <a:ext cx="2697480" cy="2011680"/>
+          <p:cNvPr id="9" name="Shape 7"/>
+          <p:cNvSpPr/>
+          <p:nvPr/>
+        </p:nvSpPr>
+        <p:spPr>
+          <a:xfrm>
+            <a:off x="457200" y="2286000"/>
+            <a:ext cx="2743200" cy="2103120"/>
           </a:xfrm>
           <a:prstGeom prst="roundRect">
             <a:avLst>
-              <a:gd name="adj" fmla="val 4545"/>
+              <a:gd name="adj" fmla="val 4348"/>
             </a:avLst>
           </a:prstGeom>
           <a:solidFill>
@@ -9682,14 +9702,14 @@
       </p:sp>
       <p:sp>
         <p:nvSpPr>
-          <p:cNvPr id="11" name="Shape 9"/>
-          <p:cNvSpPr/>
-          <p:nvPr/>
-        </p:nvSpPr>
-        <p:spPr>
-          <a:xfrm>
-            <a:off x="457200" y="2331720"/>
-            <a:ext cx="2697480" cy="109728"/>
+          <p:cNvPr id="10" name="Shape 8"/>
+          <p:cNvSpPr/>
+          <p:nvPr/>
+        </p:nvSpPr>
+        <p:spPr>
+          <a:xfrm>
+            <a:off x="457200" y="2286000"/>
+            <a:ext cx="2743200" cy="109728"/>
           </a:xfrm>
           <a:prstGeom prst="rect">
             <a:avLst/>
@@ -9707,14 +9727,14 @@
       </p:sp>
       <p:sp>
         <p:nvSpPr>
-          <p:cNvPr id="12" name="Text 10"/>
+          <p:cNvPr id="11" name="Text 9"/>
           <p:cNvSpPr/>
           <p:nvPr/>
         </p:nvSpPr>
         <p:spPr>
           <a:xfrm>
             <a:off x="640080" y="2606040"/>
-            <a:ext cx="2331720" cy="365760"/>
+            <a:ext cx="2377440" cy="365760"/>
           </a:xfrm>
           <a:prstGeom prst="rect">
             <a:avLst/>
@@ -9746,14 +9766,14 @@
       </p:sp>
       <p:sp>
         <p:nvSpPr>
-          <p:cNvPr id="13" name="Text 11"/>
-          <p:cNvSpPr/>
-          <p:nvPr/>
-        </p:nvSpPr>
-        <p:spPr>
-          <a:xfrm>
-            <a:off x="640080" y="3063240"/>
-            <a:ext cx="2331720" cy="1051560"/>
+          <p:cNvPr id="12" name="Text 10"/>
+          <p:cNvSpPr/>
+          <p:nvPr/>
+        </p:nvSpPr>
+        <p:spPr>
+          <a:xfrm>
+            <a:off x="640080" y="3108960"/>
+            <a:ext cx="2377440" cy="1051560"/>
           </a:xfrm>
           <a:prstGeom prst="rect">
             <a:avLst/>
@@ -9771,13 +9791,13 @@
             <a:r>
               <a:rPr lang="en-US" sz="1300" dirty="0">
                 <a:solidFill>
-                  <a:srgbClr val="5A6F76"/>
-                </a:solidFill>
-                <a:latin typeface="Calibri" pitchFamily="34" charset="0"/>
-                <a:ea typeface="Calibri" pitchFamily="34" charset="-122"/>
-                <a:cs typeface="Calibri" pitchFamily="34" charset="-120"/>
-              </a:rPr>
-              <a:t>单体侧 15 个测试类（约 528 行），覆盖 AI 路由、Facade、LangGraph 工作流与工具</a:t>
+                  <a:srgbClr val="3D555C"/>
+                </a:solidFill>
+                <a:latin typeface="Calibri" pitchFamily="34" charset="0"/>
+                <a:ea typeface="Calibri" pitchFamily="34" charset="-122"/>
+                <a:cs typeface="Calibri" pitchFamily="34" charset="-120"/>
+              </a:rPr>
+              <a:t>单体侧 15 个测试类，覆盖 AI 路由、Facade、LangGraph 工作流与工具。</a:t>
             </a:r>
             <a:endParaRPr lang="en-US" sz="1300" dirty="0"/>
           </a:p>
@@ -9785,18 +9805,18 @@
       </p:sp>
       <p:sp>
         <p:nvSpPr>
-          <p:cNvPr id="14" name="Shape 12"/>
-          <p:cNvSpPr/>
-          <p:nvPr/>
-        </p:nvSpPr>
-        <p:spPr>
-          <a:xfrm>
-            <a:off x="3291840" y="2331720"/>
-            <a:ext cx="2697480" cy="2011680"/>
+          <p:cNvPr id="13" name="Shape 11"/>
+          <p:cNvSpPr/>
+          <p:nvPr/>
+        </p:nvSpPr>
+        <p:spPr>
+          <a:xfrm>
+            <a:off x="3337560" y="2286000"/>
+            <a:ext cx="2743200" cy="2103120"/>
           </a:xfrm>
           <a:prstGeom prst="roundRect">
             <a:avLst>
-              <a:gd name="adj" fmla="val 4545"/>
+              <a:gd name="adj" fmla="val 4348"/>
             </a:avLst>
           </a:prstGeom>
           <a:solidFill>
@@ -9807,14 +9827,14 @@
       </p:sp>
       <p:sp>
         <p:nvSpPr>
-          <p:cNvPr id="15" name="Shape 13"/>
-          <p:cNvSpPr/>
-          <p:nvPr/>
-        </p:nvSpPr>
-        <p:spPr>
-          <a:xfrm>
-            <a:off x="3291840" y="2331720"/>
-            <a:ext cx="2697480" cy="109728"/>
+          <p:cNvPr id="14" name="Shape 12"/>
+          <p:cNvSpPr/>
+          <p:nvPr/>
+        </p:nvSpPr>
+        <p:spPr>
+          <a:xfrm>
+            <a:off x="3337560" y="2286000"/>
+            <a:ext cx="2743200" cy="109728"/>
           </a:xfrm>
           <a:prstGeom prst="rect">
             <a:avLst/>
@@ -9832,14 +9852,14 @@
       </p:sp>
       <p:sp>
         <p:nvSpPr>
-          <p:cNvPr id="16" name="Text 14"/>
-          <p:cNvSpPr/>
-          <p:nvPr/>
-        </p:nvSpPr>
-        <p:spPr>
-          <a:xfrm>
-            <a:off x="3474720" y="2606040"/>
-            <a:ext cx="2331720" cy="365760"/>
+          <p:cNvPr id="15" name="Text 13"/>
+          <p:cNvSpPr/>
+          <p:nvPr/>
+        </p:nvSpPr>
+        <p:spPr>
+          <a:xfrm>
+            <a:off x="3520440" y="2606040"/>
+            <a:ext cx="2377440" cy="365760"/>
           </a:xfrm>
           <a:prstGeom prst="rect">
             <a:avLst/>
@@ -9871,14 +9891,14 @@
       </p:sp>
       <p:sp>
         <p:nvSpPr>
-          <p:cNvPr id="17" name="Text 15"/>
-          <p:cNvSpPr/>
-          <p:nvPr/>
-        </p:nvSpPr>
-        <p:spPr>
-          <a:xfrm>
-            <a:off x="3474720" y="3063240"/>
-            <a:ext cx="2331720" cy="1051560"/>
+          <p:cNvPr id="16" name="Text 14"/>
+          <p:cNvSpPr/>
+          <p:nvPr/>
+        </p:nvSpPr>
+        <p:spPr>
+          <a:xfrm>
+            <a:off x="3520440" y="3108960"/>
+            <a:ext cx="2377440" cy="1051560"/>
           </a:xfrm>
           <a:prstGeom prst="rect">
             <a:avLst/>
@@ -9896,13 +9916,13 @@
             <a:r>
               <a:rPr lang="en-US" sz="1300" dirty="0">
                 <a:solidFill>
-                  <a:srgbClr val="5A6F76"/>
-                </a:solidFill>
-                <a:latin typeface="Calibri" pitchFamily="34" charset="0"/>
-                <a:ea typeface="Calibri" pitchFamily="34" charset="-122"/>
-                <a:cs typeface="Calibri" pitchFamily="34" charset="-120"/>
-              </a:rPr>
-              <a:t>多数用例依赖外部 API Key / Redis 等，难以在无密钥环境自动全绿</a:t>
+                  <a:srgbClr val="3D555C"/>
+                </a:solidFill>
+                <a:latin typeface="Calibri" pitchFamily="34" charset="0"/>
+                <a:ea typeface="Calibri" pitchFamily="34" charset="-122"/>
+                <a:cs typeface="Calibri" pitchFamily="34" charset="-120"/>
+              </a:rPr>
+              <a:t>多数用例依赖外部 API Key 与 Redis，无密钥环境难以自动全绿。</a:t>
             </a:r>
             <a:endParaRPr lang="en-US" sz="1300" dirty="0"/>
           </a:p>
@@ -9910,18 +9930,18 @@
       </p:sp>
       <p:sp>
         <p:nvSpPr>
-          <p:cNvPr id="18" name="Shape 16"/>
-          <p:cNvSpPr/>
-          <p:nvPr/>
-        </p:nvSpPr>
-        <p:spPr>
-          <a:xfrm>
-            <a:off x="6126480" y="2331720"/>
-            <a:ext cx="2697480" cy="2011680"/>
+          <p:cNvPr id="17" name="Shape 15"/>
+          <p:cNvSpPr/>
+          <p:nvPr/>
+        </p:nvSpPr>
+        <p:spPr>
+          <a:xfrm>
+            <a:off x="6217920" y="2286000"/>
+            <a:ext cx="2743200" cy="2103120"/>
           </a:xfrm>
           <a:prstGeom prst="roundRect">
             <a:avLst>
-              <a:gd name="adj" fmla="val 4545"/>
+              <a:gd name="adj" fmla="val 4348"/>
             </a:avLst>
           </a:prstGeom>
           <a:solidFill>
@@ -9932,24 +9952,24 @@
       </p:sp>
       <p:sp>
         <p:nvSpPr>
-          <p:cNvPr id="19" name="Shape 17"/>
-          <p:cNvSpPr/>
-          <p:nvPr/>
-        </p:nvSpPr>
-        <p:spPr>
-          <a:xfrm>
-            <a:off x="6126480" y="2331720"/>
-            <a:ext cx="2697480" cy="109728"/>
-          </a:xfrm>
-          <a:prstGeom prst="rect">
-            <a:avLst/>
-          </a:prstGeom>
-          <a:solidFill>
-            <a:srgbClr val="02C39A"/>
+          <p:cNvPr id="18" name="Shape 16"/>
+          <p:cNvSpPr/>
+          <p:nvPr/>
+        </p:nvSpPr>
+        <p:spPr>
+          <a:xfrm>
+            <a:off x="6217920" y="2286000"/>
+            <a:ext cx="2743200" cy="109728"/>
+          </a:xfrm>
+          <a:prstGeom prst="rect">
+            <a:avLst/>
+          </a:prstGeom>
+          <a:solidFill>
+            <a:srgbClr val="028090"/>
           </a:solidFill>
           <a:ln w="12700">
             <a:solidFill>
-              <a:srgbClr val="02C39A"/>
+              <a:srgbClr val="028090"/>
             </a:solidFill>
             <a:prstDash val="solid"/>
           </a:ln>
@@ -9957,14 +9977,14 @@
       </p:sp>
       <p:sp>
         <p:nvSpPr>
-          <p:cNvPr id="20" name="Text 18"/>
-          <p:cNvSpPr/>
-          <p:nvPr/>
-        </p:nvSpPr>
-        <p:spPr>
-          <a:xfrm>
-            <a:off x="6309360" y="2606040"/>
-            <a:ext cx="2331720" cy="365760"/>
+          <p:cNvPr id="19" name="Text 17"/>
+          <p:cNvSpPr/>
+          <p:nvPr/>
+        </p:nvSpPr>
+        <p:spPr>
+          <a:xfrm>
+            <a:off x="6400800" y="2606040"/>
+            <a:ext cx="2377440" cy="365760"/>
           </a:xfrm>
           <a:prstGeom prst="rect">
             <a:avLst/>
@@ -9996,40 +10016,79 @@
       </p:sp>
       <p:sp>
         <p:nvSpPr>
+          <p:cNvPr id="20" name="Text 18"/>
+          <p:cNvSpPr/>
+          <p:nvPr/>
+        </p:nvSpPr>
+        <p:spPr>
+          <a:xfrm>
+            <a:off x="6400800" y="3108960"/>
+            <a:ext cx="2377440" cy="1051560"/>
+          </a:xfrm>
+          <a:prstGeom prst="rect">
+            <a:avLst/>
+          </a:prstGeom>
+          <a:noFill/>
+          <a:ln/>
+        </p:spPr>
+        <p:txBody>
+          <a:bodyPr wrap="square" lIns="0" tIns="0" rIns="0" bIns="0" rtlCol="0" anchor="ctr"/>
+          <a:lstStyle/>
+          <a:p>
+            <a:pPr indent="0" marL="0">
+              <a:buNone/>
+            </a:pPr>
+            <a:r>
+              <a:rPr lang="en-US" sz="1300" dirty="0">
+                <a:solidFill>
+                  <a:srgbClr val="3D555C"/>
+                </a:solidFill>
+                <a:latin typeface="Calibri" pitchFamily="34" charset="0"/>
+                <a:ea typeface="Calibri" pitchFamily="34" charset="-122"/>
+                <a:cs typeface="Calibri" pitchFamily="34" charset="-120"/>
+              </a:rPr>
+              <a:t>先加 compile 与可离线单测；密钥相关用例标为 integration 并默认跳过。</a:t>
+            </a:r>
+            <a:endParaRPr lang="en-US" sz="1300" dirty="0"/>
+          </a:p>
+        </p:txBody>
+      </p:sp>
+      <p:sp>
+        <p:nvSpPr>
           <p:cNvPr id="21" name="Text 19"/>
           <p:cNvSpPr/>
           <p:nvPr/>
         </p:nvSpPr>
         <p:spPr>
           <a:xfrm>
-            <a:off x="6309360" y="3063240"/>
-            <a:ext cx="2331720" cy="1051560"/>
-          </a:xfrm>
-          <a:prstGeom prst="rect">
-            <a:avLst/>
-          </a:prstGeom>
-          <a:noFill/>
-          <a:ln/>
-        </p:spPr>
-        <p:txBody>
-          <a:bodyPr wrap="square" lIns="0" tIns="0" rIns="0" bIns="0" rtlCol="0" anchor="ctr"/>
-          <a:lstStyle/>
-          <a:p>
-            <a:pPr indent="0" marL="0">
-              <a:buNone/>
-            </a:pPr>
-            <a:r>
-              <a:rPr lang="en-US" sz="1300" dirty="0">
-                <a:solidFill>
-                  <a:srgbClr val="5A6F76"/>
-                </a:solidFill>
-                <a:latin typeface="Calibri" pitchFamily="34" charset="0"/>
-                <a:ea typeface="Calibri" pitchFamily="34" charset="-122"/>
-                <a:cs typeface="Calibri" pitchFamily="34" charset="-120"/>
-              </a:rPr>
-              <a:t>先加 compile + 可离线单测；密钥相关用例标记 integration 并默认跳过</a:t>
-            </a:r>
-            <a:endParaRPr lang="en-US" sz="1300" dirty="0"/>
+            <a:off x="457200" y="4800600"/>
+            <a:ext cx="6858000" cy="256032"/>
+          </a:xfrm>
+          <a:prstGeom prst="rect">
+            <a:avLst/>
+          </a:prstGeom>
+          <a:noFill/>
+          <a:ln/>
+        </p:spPr>
+        <p:txBody>
+          <a:bodyPr wrap="square" lIns="0" tIns="0" rIns="0" bIns="0" rtlCol="0" anchor="ctr"/>
+          <a:lstStyle/>
+          <a:p>
+            <a:pPr indent="0" marL="0">
+              <a:buNone/>
+            </a:pPr>
+            <a:r>
+              <a:rPr lang="en-US" sz="1000" dirty="0">
+                <a:solidFill>
+                  <a:srgbClr val="3D555C"/>
+                </a:solidFill>
+                <a:latin typeface="Calibri" pitchFamily="34" charset="0"/>
+                <a:ea typeface="Calibri" pitchFamily="34" charset="-122"/>
+                <a:cs typeface="Calibri" pitchFamily="34" charset="-120"/>
+              </a:rPr>
+              <a:t>yu-ai-code-mother  ·  每日状态  ·  2026-07-30</a:t>
+            </a:r>
+            <a:endParaRPr lang="en-US" sz="1000" dirty="0"/>
           </a:p>
         </p:txBody>
       </p:sp>
@@ -10041,65 +10100,26 @@
         </p:nvSpPr>
         <p:spPr>
           <a:xfrm>
-            <a:off x="457200" y="4828032"/>
-            <a:ext cx="6858000" cy="256032"/>
-          </a:xfrm>
-          <a:prstGeom prst="rect">
-            <a:avLst/>
-          </a:prstGeom>
-          <a:noFill/>
-          <a:ln/>
-        </p:spPr>
-        <p:txBody>
-          <a:bodyPr wrap="square" lIns="0" tIns="0" rIns="0" bIns="0" rtlCol="0" anchor="ctr"/>
-          <a:lstStyle/>
-          <a:p>
-            <a:pPr indent="0" marL="0">
+            <a:off x="7772400" y="4800600"/>
+            <a:ext cx="914400" cy="256032"/>
+          </a:xfrm>
+          <a:prstGeom prst="rect">
+            <a:avLst/>
+          </a:prstGeom>
+          <a:noFill/>
+          <a:ln/>
+        </p:spPr>
+        <p:txBody>
+          <a:bodyPr wrap="square" lIns="0" tIns="0" rIns="0" bIns="0" rtlCol="0" anchor="ctr"/>
+          <a:lstStyle/>
+          <a:p>
+            <a:pPr algn="r" indent="0" marL="0">
               <a:buNone/>
             </a:pPr>
             <a:r>
               <a:rPr lang="en-US" sz="1000" dirty="0">
                 <a:solidFill>
-                  <a:srgbClr val="5A6F76"/>
-                </a:solidFill>
-                <a:latin typeface="Calibri" pitchFamily="34" charset="0"/>
-                <a:ea typeface="Calibri" pitchFamily="34" charset="-122"/>
-                <a:cs typeface="Calibri" pitchFamily="34" charset="-120"/>
-              </a:rPr>
-              <a:t>yu-ai-code-mother  ·  每日状态  ·  2026-07-30</a:t>
-            </a:r>
-            <a:endParaRPr lang="en-US" sz="1000" dirty="0"/>
-          </a:p>
-        </p:txBody>
-      </p:sp>
-      <p:sp>
-        <p:nvSpPr>
-          <p:cNvPr id="23" name="Text 21"/>
-          <p:cNvSpPr/>
-          <p:nvPr/>
-        </p:nvSpPr>
-        <p:spPr>
-          <a:xfrm>
-            <a:off x="7772400" y="4828032"/>
-            <a:ext cx="914400" cy="256032"/>
-          </a:xfrm>
-          <a:prstGeom prst="rect">
-            <a:avLst/>
-          </a:prstGeom>
-          <a:noFill/>
-          <a:ln/>
-        </p:spPr>
-        <p:txBody>
-          <a:bodyPr wrap="square" lIns="0" tIns="0" rIns="0" bIns="0" rtlCol="0" anchor="ctr"/>
-          <a:lstStyle/>
-          <a:p>
-            <a:pPr algn="r" indent="0" marL="0">
-              <a:buNone/>
-            </a:pPr>
-            <a:r>
-              <a:rPr lang="en-US" sz="1000" dirty="0">
-                <a:solidFill>
-                  <a:srgbClr val="5A6F76"/>
+                  <a:srgbClr val="3D555C"/>
                 </a:solidFill>
                 <a:latin typeface="Calibri" pitchFamily="34" charset="0"/>
                 <a:ea typeface="Calibri" pitchFamily="34" charset="-122"/>
